--- a/模型规划.pptx
+++ b/模型规划.pptx
@@ -8207,7 +8207,7 @@
         <p:spPr>
           <a:xfrm>
             <a:off x="1033271" y="3081528"/>
-            <a:ext cx="4572000" cy="201168"/>
+            <a:ext cx="4572000" cy="118494"/>
           </a:xfrm>
           <a:prstGeom prst="rect">
             <a:avLst/>
@@ -8222,14 +8222,38 @@
           <a:p>
             <a:pPr algn="l"/>
             <a:r>
-              <a:rPr sz="770" b="0">
+              <a:rPr sz="770" b="0" dirty="0">
                 <a:solidFill>
                   <a:srgbClr val="606976"/>
                 </a:solidFill>
                 <a:latin typeface="Microsoft YaHei"/>
               </a:rPr>
-              <a:t>目标：统一流水识别、IDP2 链路与归因回传底座</a:t>
-            </a:r>
+              <a:t>目标：统一流水识别、IDP2 </a:t>
+            </a:r>
+            <a:r>
+              <a:rPr sz="770" b="0" dirty="0" err="1">
+                <a:solidFill>
+                  <a:srgbClr val="606976"/>
+                </a:solidFill>
+                <a:latin typeface="Microsoft YaHei"/>
+              </a:rPr>
+              <a:t>链路与</a:t>
+            </a:r>
+            <a:r>
+              <a:rPr lang="zh-CN" altLang="en-US" sz="770" dirty="0">
+                <a:solidFill>
+                  <a:srgbClr val="606976"/>
+                </a:solidFill>
+                <a:latin typeface="Microsoft YaHei"/>
+              </a:rPr>
+              <a:t>涉及市场投放归因底座</a:t>
+            </a:r>
+            <a:endParaRPr sz="770" b="0" dirty="0">
+              <a:solidFill>
+                <a:srgbClr val="606976"/>
+              </a:solidFill>
+              <a:latin typeface="Microsoft YaHei"/>
+            </a:endParaRPr>
           </a:p>
         </p:txBody>
       </p:sp>
@@ -8527,6 +8551,24 @@
               <a:rPr dirty="0" err="1"/>
               <a:t>生产化与并行验证</a:t>
             </a:r>
+            <a:endParaRPr lang="en-US" dirty="0"/>
+          </a:p>
+          <a:p>
+            <a:pPr>
+              <a:spcAft>
+                <a:spcPts val="100"/>
+              </a:spcAft>
+              <a:defRPr sz="725">
+                <a:solidFill>
+                  <a:srgbClr val="222C38"/>
+                </a:solidFill>
+                <a:latin typeface="Microsoft YaHei"/>
+              </a:defRPr>
+            </a:pPr>
+            <a:r>
+              <a:rPr lang="zh-CN" altLang="en-US" dirty="0"/>
+              <a:t>知识库运维智能体</a:t>
+            </a:r>
             <a:endParaRPr dirty="0"/>
           </a:p>
           <a:p>
@@ -8546,38 +8588,13 @@
             </a:pPr>
             <a:r>
               <a:rPr dirty="0"/>
-              <a:t>★ IDP2 </a:t>
+              <a:t>IDP2 </a:t>
             </a:r>
             <a:r>
               <a:rPr dirty="0" err="1"/>
               <a:t>全链路跑通</a:t>
             </a:r>
             <a:endParaRPr lang="en-US" dirty="0"/>
-          </a:p>
-          <a:p>
-            <a:pPr>
-              <a:spcAft>
-                <a:spcPts val="100"/>
-              </a:spcAft>
-              <a:defRPr sz="725">
-                <a:solidFill>
-                  <a:srgbClr val="222C38"/>
-                </a:solidFill>
-                <a:latin typeface="Microsoft YaHei"/>
-              </a:defRPr>
-            </a:pPr>
-            <a:r>
-              <a:rPr lang="zh-CN" altLang="en-US" dirty="0"/>
-              <a:t>商户 </a:t>
-            </a:r>
-            <a:r>
-              <a:rPr lang="en-US" altLang="zh-CN" dirty="0"/>
-              <a:t>/ </a:t>
-            </a:r>
-            <a:r>
-              <a:rPr lang="zh-CN" altLang="en-US" dirty="0"/>
-              <a:t>类别知识库智能体</a:t>
-            </a:r>
           </a:p>
           <a:p>
             <a:pPr>
@@ -8612,8 +8629,8 @@
         </p:nvSpPr>
         <p:spPr>
           <a:xfrm>
-            <a:off x="3255264" y="3639312"/>
-            <a:ext cx="2359152" cy="612988"/>
+            <a:off x="3255264" y="3620394"/>
+            <a:ext cx="2359152" cy="488595"/>
           </a:xfrm>
           <a:prstGeom prst="rect">
             <a:avLst/>
@@ -8638,9 +8655,23 @@
               </a:defRPr>
             </a:pPr>
             <a:r>
-              <a:rPr lang="zh-CN" altLang="en-US"/>
-              <a:t>★ </a:t>
-            </a:r>
+              <a:rPr lang="zh-CN" altLang="en-US" dirty="0"/>
+              <a:t>★回传归因追踪监控</a:t>
+            </a:r>
+            <a:endParaRPr lang="en-US" altLang="zh-CN" dirty="0"/>
+          </a:p>
+          <a:p>
+            <a:pPr>
+              <a:spcAft>
+                <a:spcPts val="100"/>
+              </a:spcAft>
+              <a:defRPr sz="725">
+                <a:solidFill>
+                  <a:srgbClr val="222C38"/>
+                </a:solidFill>
+                <a:latin typeface="Microsoft YaHei"/>
+              </a:defRPr>
+            </a:pPr>
             <a:r>
               <a:rPr lang="zh-CN" altLang="en-US" dirty="0"/>
               <a:t>投放归因监控：渠道 </a:t>
@@ -8669,51 +8700,9 @@
                 <a:latin typeface="Microsoft YaHei"/>
               </a:defRPr>
             </a:pPr>
-            <a:endParaRPr lang="zh-CN" altLang="en-US" dirty="0"/>
-          </a:p>
-          <a:p>
-            <a:pPr>
-              <a:lnSpc>
-                <a:spcPct val="100000"/>
-              </a:lnSpc>
-              <a:spcAft>
-                <a:spcPts val="100"/>
-              </a:spcAft>
-              <a:defRPr sz="725">
-                <a:solidFill>
-                  <a:srgbClr val="222C38"/>
-                </a:solidFill>
-                <a:latin typeface="Microsoft YaHei"/>
-              </a:defRPr>
-            </a:pPr>
             <a:r>
               <a:rPr lang="zh-CN" altLang="en-US" dirty="0"/>
-              <a:t> </a:t>
-            </a:r>
-            <a:r>
-              <a:rPr lang="en-US" altLang="zh-CN" dirty="0"/>
-              <a:t>/ </a:t>
-            </a:r>
-            <a:r>
-              <a:rPr lang="zh-CN" altLang="en-US" dirty="0"/>
-              <a:t>触达归因回传：</a:t>
-            </a:r>
-          </a:p>
-          <a:p>
-            <a:pPr>
-              <a:spcAft>
-                <a:spcPts val="100"/>
-              </a:spcAft>
-              <a:defRPr sz="725">
-                <a:solidFill>
-                  <a:srgbClr val="222C38"/>
-                </a:solidFill>
-                <a:latin typeface="Microsoft YaHei"/>
-              </a:defRPr>
-            </a:pPr>
-            <a:r>
-              <a:rPr lang="zh-CN" altLang="en-US" dirty="0"/>
-              <a:t>短信 </a:t>
+              <a:t>触达归因回传：短信 </a:t>
             </a:r>
             <a:r>
               <a:rPr lang="en-US" altLang="zh-CN" dirty="0"/>
@@ -9000,7 +8989,7 @@
         <p:spPr>
           <a:xfrm>
             <a:off x="6519672" y="3081528"/>
-            <a:ext cx="4572000" cy="201168"/>
+            <a:ext cx="4572000" cy="118494"/>
           </a:xfrm>
           <a:prstGeom prst="rect">
             <a:avLst/>
@@ -9015,14 +9004,20 @@
           <a:p>
             <a:pPr algn="l"/>
             <a:r>
-              <a:rPr sz="770" b="0">
+              <a:rPr sz="770" b="0" dirty="0" err="1">
                 <a:solidFill>
                   <a:srgbClr val="606976"/>
                 </a:solidFill>
                 <a:latin typeface="Microsoft YaHei"/>
               </a:rPr>
-              <a:t>目标：用风险 × 意愿 × 价值分层，指导优质增量获取</a:t>
-            </a:r>
+              <a:t>目标：优质增量获取</a:t>
+            </a:r>
+            <a:endParaRPr sz="770" b="0" dirty="0">
+              <a:solidFill>
+                <a:srgbClr val="606976"/>
+              </a:solidFill>
+              <a:latin typeface="Microsoft YaHei"/>
+            </a:endParaRPr>
           </a:p>
         </p:txBody>
       </p:sp>
@@ -9141,7 +9136,7 @@
         <p:spPr>
           <a:xfrm>
             <a:off x="6245352" y="3419856"/>
-            <a:ext cx="548640" cy="164592"/>
+            <a:ext cx="548640" cy="116955"/>
           </a:xfrm>
           <a:prstGeom prst="rect">
             <a:avLst/>
@@ -9156,14 +9151,20 @@
           <a:p>
             <a:pPr algn="l"/>
             <a:r>
-              <a:rPr sz="760" b="1">
+              <a:rPr lang="zh-CN" altLang="en-US" sz="760" b="1" dirty="0">
                 <a:solidFill>
                   <a:srgbClr val="144970"/>
                 </a:solidFill>
                 <a:latin typeface="Microsoft YaHei"/>
               </a:rPr>
-              <a:t>重点项目</a:t>
-            </a:r>
+              <a:t>人群圈选</a:t>
+            </a:r>
+            <a:endParaRPr sz="760" b="1" dirty="0">
+              <a:solidFill>
+                <a:srgbClr val="144970"/>
+              </a:solidFill>
+              <a:latin typeface="Microsoft YaHei"/>
+            </a:endParaRPr>
           </a:p>
         </p:txBody>
       </p:sp>
@@ -9231,8 +9232,8 @@
         </p:nvSpPr>
         <p:spPr>
           <a:xfrm>
-            <a:off x="8823960" y="3419856"/>
-            <a:ext cx="548640" cy="164592"/>
+            <a:off x="8823960" y="3438774"/>
+            <a:ext cx="548640" cy="116955"/>
           </a:xfrm>
           <a:prstGeom prst="rect">
             <a:avLst/>
@@ -9247,14 +9248,20 @@
           <a:p>
             <a:pPr algn="l"/>
             <a:r>
-              <a:rPr sz="760" b="1">
+              <a:rPr lang="zh-CN" altLang="en-US" sz="760" b="1" dirty="0">
                 <a:solidFill>
                   <a:srgbClr val="144970"/>
                 </a:solidFill>
                 <a:latin typeface="Microsoft YaHei"/>
               </a:rPr>
-              <a:t>关键抓手</a:t>
-            </a:r>
+              <a:t>出价优化</a:t>
+            </a:r>
+            <a:endParaRPr sz="760" b="1" dirty="0">
+              <a:solidFill>
+                <a:srgbClr val="144970"/>
+              </a:solidFill>
+              <a:latin typeface="Microsoft YaHei"/>
+            </a:endParaRPr>
           </a:p>
         </p:txBody>
       </p:sp>
@@ -9273,7 +9280,7 @@
         <p:spPr>
           <a:xfrm>
             <a:off x="6163056" y="3639312"/>
-            <a:ext cx="2359152" cy="576072"/>
+            <a:ext cx="2359152" cy="243656"/>
           </a:xfrm>
           <a:prstGeom prst="rect">
             <a:avLst/>
@@ -9301,9 +9308,85 @@
               </a:defRPr>
             </a:pPr>
             <a:r>
-              <a:t>★ 人群圈选：输出可投放人群包</a:t>
-            </a:r>
-          </a:p>
+              <a:rPr dirty="0"/>
+              <a:t>★</a:t>
+            </a:r>
+            <a:r>
+              <a:rPr lang="en-US" dirty="0"/>
+              <a:t> </a:t>
+            </a:r>
+            <a:r>
+              <a:rPr lang="zh-CN" altLang="en-US" dirty="0"/>
+              <a:t>高价值人群圈选</a:t>
+            </a:r>
+            <a:r>
+              <a:rPr dirty="0"/>
+              <a:t>：</a:t>
+            </a:r>
+            <a:r>
+              <a:rPr dirty="0" err="1"/>
+              <a:t>输出可</a:t>
+            </a:r>
+            <a:r>
+              <a:rPr lang="zh-CN" altLang="en-US" dirty="0"/>
+              <a:t>回传</a:t>
+            </a:r>
+            <a:r>
+              <a:rPr dirty="0" err="1"/>
+              <a:t>人群包</a:t>
+            </a:r>
+            <a:endParaRPr lang="en-US" dirty="0"/>
+          </a:p>
+          <a:p>
+            <a:pPr>
+              <a:spcAft>
+                <a:spcPts val="100"/>
+              </a:spcAft>
+              <a:defRPr sz="750">
+                <a:solidFill>
+                  <a:srgbClr val="222C38"/>
+                </a:solidFill>
+                <a:latin typeface="Microsoft YaHei"/>
+              </a:defRPr>
+            </a:pPr>
+            <a:r>
+              <a:rPr lang="en-US" altLang="zh-CN" dirty="0"/>
+              <a:t>Lead Partner </a:t>
+            </a:r>
+            <a:r>
+              <a:rPr lang="zh-CN" altLang="en-US" dirty="0"/>
+              <a:t>模型</a:t>
+            </a:r>
+          </a:p>
+        </p:txBody>
+      </p:sp>
+      <p:sp>
+        <p:nvSpPr>
+          <p:cNvPr id="63" name="TextBox 54">
+            <a:extLst>
+              <a:ext uri="{FF2B5EF4-FFF2-40B4-BE49-F238E27FC236}">
+                <a16:creationId xmlns:a16="http://schemas.microsoft.com/office/drawing/2014/main" id="{9AC1C6D8-6D5B-4F91-82B5-A750BDAA5BE0}"/>
+              </a:ext>
+            </a:extLst>
+          </p:cNvPr>
+          <p:cNvSpPr txBox="1"/>
+          <p:nvPr/>
+        </p:nvSpPr>
+        <p:spPr>
+          <a:xfrm>
+            <a:off x="8741664" y="3639312"/>
+            <a:ext cx="2359152" cy="243656"/>
+          </a:xfrm>
+          <a:prstGeom prst="rect">
+            <a:avLst/>
+          </a:prstGeom>
+          <a:noFill/>
+        </p:spPr>
+        <p:txBody>
+          <a:bodyPr wrap="square" lIns="0" tIns="0" rIns="0" bIns="0">
+            <a:spAutoFit/>
+          </a:bodyPr>
+          <a:lstStyle/>
           <a:p>
             <a:pPr>
               <a:lnSpc>
@@ -9320,7 +9403,16 @@
               </a:defRPr>
             </a:pPr>
             <a:r>
-              <a:t>★ 边际 CPS 与扩量决策</a:t>
+              <a:rPr lang="zh-CN" altLang="en-US" dirty="0"/>
+              <a:t>★ 边际 </a:t>
+            </a:r>
+            <a:r>
+              <a:rPr lang="en-US" altLang="zh-CN" dirty="0"/>
+              <a:t>CPS </a:t>
+            </a:r>
+            <a:r>
+              <a:rPr lang="zh-CN" altLang="en-US" dirty="0"/>
+              <a:t>与扩量阈值与预算分配决策工具</a:t>
             </a:r>
           </a:p>
           <a:p>
@@ -9339,17 +9431,175 @@
               </a:defRPr>
             </a:pPr>
             <a:r>
-              <a:t>Campaign 早期质量预测</a:t>
-            </a:r>
-          </a:p>
-        </p:txBody>
-      </p:sp>
-      <p:sp>
-        <p:nvSpPr>
-          <p:cNvPr id="63" name="TextBox 54">
-            <a:extLst>
-              <a:ext uri="{FF2B5EF4-FFF2-40B4-BE49-F238E27FC236}">
-                <a16:creationId xmlns:a16="http://schemas.microsoft.com/office/drawing/2014/main" id="{9AC1C6D8-6D5B-4F91-82B5-A750BDAA5BE0}"/>
+              <a:rPr lang="en-US" altLang="zh-CN" dirty="0"/>
+              <a:t>Campaign </a:t>
+            </a:r>
+            <a:r>
+              <a:rPr lang="zh-CN" altLang="en-US" dirty="0"/>
+              <a:t>早期质量预测</a:t>
+            </a:r>
+            <a:endParaRPr lang="en-US" dirty="0"/>
+          </a:p>
+        </p:txBody>
+      </p:sp>
+      <p:sp>
+        <p:nvSpPr>
+          <p:cNvPr id="64" name="Rectangle 55">
+            <a:extLst>
+              <a:ext uri="{FF2B5EF4-FFF2-40B4-BE49-F238E27FC236}">
+                <a16:creationId xmlns:a16="http://schemas.microsoft.com/office/drawing/2014/main" id="{6727FC50-B3EB-44E0-B2D6-07352E2DACBD}"/>
+              </a:ext>
+            </a:extLst>
+          </p:cNvPr>
+          <p:cNvSpPr/>
+          <p:nvPr/>
+        </p:nvSpPr>
+        <p:spPr>
+          <a:xfrm>
+            <a:off x="530352" y="4636008"/>
+            <a:ext cx="5321808" cy="1609344"/>
+          </a:xfrm>
+          <a:prstGeom prst="rect">
+            <a:avLst/>
+          </a:prstGeom>
+          <a:solidFill>
+            <a:srgbClr val="FFFFFF"/>
+          </a:solidFill>
+          <a:ln w="7620">
+            <a:solidFill>
+              <a:srgbClr val="D6DBE1"/>
+            </a:solidFill>
+          </a:ln>
+        </p:spPr>
+        <p:style>
+          <a:lnRef idx="1">
+            <a:schemeClr val="accent1"/>
+          </a:lnRef>
+          <a:fillRef idx="3">
+            <a:schemeClr val="accent1"/>
+          </a:fillRef>
+          <a:effectRef idx="2">
+            <a:schemeClr val="accent1"/>
+          </a:effectRef>
+          <a:fontRef idx="minor">
+            <a:schemeClr val="lt1"/>
+          </a:fontRef>
+        </p:style>
+        <p:txBody>
+          <a:bodyPr rtlCol="0" anchor="ctr"/>
+          <a:lstStyle/>
+          <a:p>
+            <a:pPr algn="ctr"/>
+            <a:endParaRPr/>
+          </a:p>
+        </p:txBody>
+      </p:sp>
+      <p:sp>
+        <p:nvSpPr>
+          <p:cNvPr id="65" name="Rectangle 56">
+            <a:extLst>
+              <a:ext uri="{FF2B5EF4-FFF2-40B4-BE49-F238E27FC236}">
+                <a16:creationId xmlns:a16="http://schemas.microsoft.com/office/drawing/2014/main" id="{6991C922-BB10-43BB-A3C5-295524DD4AF1}"/>
+              </a:ext>
+            </a:extLst>
+          </p:cNvPr>
+          <p:cNvSpPr/>
+          <p:nvPr/>
+        </p:nvSpPr>
+        <p:spPr>
+          <a:xfrm>
+            <a:off x="530352" y="4636008"/>
+            <a:ext cx="5321808" cy="50292"/>
+          </a:xfrm>
+          <a:prstGeom prst="rect">
+            <a:avLst/>
+          </a:prstGeom>
+          <a:solidFill>
+            <a:srgbClr val="0C3658"/>
+          </a:solidFill>
+          <a:ln>
+            <a:noFill/>
+          </a:ln>
+        </p:spPr>
+        <p:style>
+          <a:lnRef idx="1">
+            <a:schemeClr val="accent1"/>
+          </a:lnRef>
+          <a:fillRef idx="3">
+            <a:schemeClr val="accent1"/>
+          </a:fillRef>
+          <a:effectRef idx="2">
+            <a:schemeClr val="accent1"/>
+          </a:effectRef>
+          <a:fontRef idx="minor">
+            <a:schemeClr val="lt1"/>
+          </a:fontRef>
+        </p:style>
+        <p:txBody>
+          <a:bodyPr rtlCol="0" anchor="ctr"/>
+          <a:lstStyle/>
+          <a:p>
+            <a:pPr algn="ctr"/>
+            <a:endParaRPr/>
+          </a:p>
+        </p:txBody>
+      </p:sp>
+      <p:sp>
+        <p:nvSpPr>
+          <p:cNvPr id="66" name="Rectangle 57">
+            <a:extLst>
+              <a:ext uri="{FF2B5EF4-FFF2-40B4-BE49-F238E27FC236}">
+                <a16:creationId xmlns:a16="http://schemas.microsoft.com/office/drawing/2014/main" id="{B0EFB840-6033-4E7A-8B06-5AF80D9ACE41}"/>
+              </a:ext>
+            </a:extLst>
+          </p:cNvPr>
+          <p:cNvSpPr/>
+          <p:nvPr/>
+        </p:nvSpPr>
+        <p:spPr>
+          <a:xfrm>
+            <a:off x="676656" y="4791456"/>
+            <a:ext cx="292608" cy="228600"/>
+          </a:xfrm>
+          <a:prstGeom prst="rect">
+            <a:avLst/>
+          </a:prstGeom>
+          <a:solidFill>
+            <a:srgbClr val="EFF5FB"/>
+          </a:solidFill>
+          <a:ln>
+            <a:noFill/>
+          </a:ln>
+        </p:spPr>
+        <p:style>
+          <a:lnRef idx="1">
+            <a:schemeClr val="accent1"/>
+          </a:lnRef>
+          <a:fillRef idx="3">
+            <a:schemeClr val="accent1"/>
+          </a:fillRef>
+          <a:effectRef idx="2">
+            <a:schemeClr val="accent1"/>
+          </a:effectRef>
+          <a:fontRef idx="minor">
+            <a:schemeClr val="lt1"/>
+          </a:fontRef>
+        </p:style>
+        <p:txBody>
+          <a:bodyPr rtlCol="0" anchor="ctr"/>
+          <a:lstStyle/>
+          <a:p>
+            <a:pPr algn="ctr"/>
+            <a:endParaRPr/>
+          </a:p>
+        </p:txBody>
+      </p:sp>
+      <p:sp>
+        <p:nvSpPr>
+          <p:cNvPr id="67" name="TextBox 58">
+            <a:extLst>
+              <a:ext uri="{FF2B5EF4-FFF2-40B4-BE49-F238E27FC236}">
+                <a16:creationId xmlns:a16="http://schemas.microsoft.com/office/drawing/2014/main" id="{FC6C61B2-3AC0-4FA2-BE63-82AEA6A287E2}"/>
               </a:ext>
             </a:extLst>
           </p:cNvPr>
@@ -9358,7 +9608,380 @@
         </p:nvSpPr>
         <p:spPr>
           <a:xfrm>
-            <a:off x="8741664" y="3639312"/>
+            <a:off x="704088" y="4823460"/>
+            <a:ext cx="237744" cy="146304"/>
+          </a:xfrm>
+          <a:prstGeom prst="rect">
+            <a:avLst/>
+          </a:prstGeom>
+          <a:noFill/>
+        </p:spPr>
+        <p:txBody>
+          <a:bodyPr wrap="square" lIns="0" tIns="0" rIns="0" bIns="0">
+            <a:spAutoFit/>
+          </a:bodyPr>
+          <a:lstStyle/>
+          <a:p>
+            <a:pPr algn="ctr"/>
+            <a:r>
+              <a:rPr sz="740" b="1">
+                <a:solidFill>
+                  <a:srgbClr val="144970"/>
+                </a:solidFill>
+                <a:latin typeface="Microsoft YaHei"/>
+              </a:rPr>
+              <a:t>03</a:t>
+            </a:r>
+          </a:p>
+        </p:txBody>
+      </p:sp>
+      <p:sp>
+        <p:nvSpPr>
+          <p:cNvPr id="68" name="TextBox 59">
+            <a:extLst>
+              <a:ext uri="{FF2B5EF4-FFF2-40B4-BE49-F238E27FC236}">
+                <a16:creationId xmlns:a16="http://schemas.microsoft.com/office/drawing/2014/main" id="{A17E72E4-6C43-4F6A-B247-2F5FE14D958C}"/>
+              </a:ext>
+            </a:extLst>
+          </p:cNvPr>
+          <p:cNvSpPr txBox="1"/>
+          <p:nvPr/>
+        </p:nvSpPr>
+        <p:spPr>
+          <a:xfrm>
+            <a:off x="1033271" y="4773168"/>
+            <a:ext cx="1097280" cy="219456"/>
+          </a:xfrm>
+          <a:prstGeom prst="rect">
+            <a:avLst/>
+          </a:prstGeom>
+          <a:noFill/>
+        </p:spPr>
+        <p:txBody>
+          <a:bodyPr wrap="square" lIns="0" tIns="0" rIns="0" bIns="0">
+            <a:spAutoFit/>
+          </a:bodyPr>
+          <a:lstStyle/>
+          <a:p>
+            <a:pPr algn="l"/>
+            <a:r>
+              <a:rPr sz="1320" b="1">
+                <a:solidFill>
+                  <a:srgbClr val="222C38"/>
+                </a:solidFill>
+                <a:latin typeface="Microsoft YaHei"/>
+              </a:rPr>
+              <a:t>用户运营</a:t>
+            </a:r>
+          </a:p>
+        </p:txBody>
+      </p:sp>
+      <p:sp>
+        <p:nvSpPr>
+          <p:cNvPr id="69" name="TextBox 60">
+            <a:extLst>
+              <a:ext uri="{FF2B5EF4-FFF2-40B4-BE49-F238E27FC236}">
+                <a16:creationId xmlns:a16="http://schemas.microsoft.com/office/drawing/2014/main" id="{4E62C11B-8C28-4028-869A-3229B5101554}"/>
+              </a:ext>
+            </a:extLst>
+          </p:cNvPr>
+          <p:cNvSpPr txBox="1"/>
+          <p:nvPr/>
+        </p:nvSpPr>
+        <p:spPr>
+          <a:xfrm>
+            <a:off x="1033271" y="5020056"/>
+            <a:ext cx="4572000" cy="201168"/>
+          </a:xfrm>
+          <a:prstGeom prst="rect">
+            <a:avLst/>
+          </a:prstGeom>
+          <a:noFill/>
+        </p:spPr>
+        <p:txBody>
+          <a:bodyPr wrap="square" lIns="0" tIns="0" rIns="0" bIns="0">
+            <a:spAutoFit/>
+          </a:bodyPr>
+          <a:lstStyle/>
+          <a:p>
+            <a:pPr algn="l"/>
+            <a:r>
+              <a:rPr sz="770" b="0" dirty="0" err="1">
+                <a:solidFill>
+                  <a:srgbClr val="606976"/>
+                </a:solidFill>
+                <a:latin typeface="Microsoft YaHei"/>
+              </a:rPr>
+              <a:t>目标：围绕客户价值、定价和触达，提升复贷与经营效率</a:t>
+            </a:r>
+            <a:endParaRPr sz="770" b="0" dirty="0">
+              <a:solidFill>
+                <a:srgbClr val="606976"/>
+              </a:solidFill>
+              <a:latin typeface="Microsoft YaHei"/>
+            </a:endParaRPr>
+          </a:p>
+        </p:txBody>
+      </p:sp>
+      <p:sp>
+        <p:nvSpPr>
+          <p:cNvPr id="70" name="Rectangle 61">
+            <a:extLst>
+              <a:ext uri="{FF2B5EF4-FFF2-40B4-BE49-F238E27FC236}">
+                <a16:creationId xmlns:a16="http://schemas.microsoft.com/office/drawing/2014/main" id="{609306D9-9DCA-4A53-B78A-72D88079A5E9}"/>
+              </a:ext>
+            </a:extLst>
+          </p:cNvPr>
+          <p:cNvSpPr/>
+          <p:nvPr/>
+        </p:nvSpPr>
+        <p:spPr>
+          <a:xfrm>
+            <a:off x="676656" y="5257800"/>
+            <a:ext cx="5029200" cy="9144"/>
+          </a:xfrm>
+          <a:prstGeom prst="rect">
+            <a:avLst/>
+          </a:prstGeom>
+          <a:solidFill>
+            <a:srgbClr val="D6DBE1"/>
+          </a:solidFill>
+          <a:ln>
+            <a:noFill/>
+          </a:ln>
+        </p:spPr>
+        <p:style>
+          <a:lnRef idx="1">
+            <a:schemeClr val="accent1"/>
+          </a:lnRef>
+          <a:fillRef idx="3">
+            <a:schemeClr val="accent1"/>
+          </a:fillRef>
+          <a:effectRef idx="2">
+            <a:schemeClr val="accent1"/>
+          </a:effectRef>
+          <a:fontRef idx="minor">
+            <a:schemeClr val="lt1"/>
+          </a:fontRef>
+        </p:style>
+        <p:txBody>
+          <a:bodyPr rtlCol="0" anchor="ctr"/>
+          <a:lstStyle/>
+          <a:p>
+            <a:pPr algn="ctr"/>
+            <a:endParaRPr/>
+          </a:p>
+        </p:txBody>
+      </p:sp>
+      <p:sp>
+        <p:nvSpPr>
+          <p:cNvPr id="71" name="Rectangle 62">
+            <a:extLst>
+              <a:ext uri="{FF2B5EF4-FFF2-40B4-BE49-F238E27FC236}">
+                <a16:creationId xmlns:a16="http://schemas.microsoft.com/office/drawing/2014/main" id="{B0D5F27D-3224-417E-BA49-6E10971B5A9B}"/>
+              </a:ext>
+            </a:extLst>
+          </p:cNvPr>
+          <p:cNvSpPr/>
+          <p:nvPr/>
+        </p:nvSpPr>
+        <p:spPr>
+          <a:xfrm>
+            <a:off x="3255264" y="5491930"/>
+            <a:ext cx="54864" cy="118872"/>
+          </a:xfrm>
+          <a:prstGeom prst="rect">
+            <a:avLst/>
+          </a:prstGeom>
+          <a:solidFill>
+            <a:srgbClr val="E2A600"/>
+          </a:solidFill>
+          <a:ln>
+            <a:noFill/>
+          </a:ln>
+        </p:spPr>
+        <p:style>
+          <a:lnRef idx="1">
+            <a:schemeClr val="accent1"/>
+          </a:lnRef>
+          <a:fillRef idx="3">
+            <a:schemeClr val="accent1"/>
+          </a:fillRef>
+          <a:effectRef idx="2">
+            <a:schemeClr val="accent1"/>
+          </a:effectRef>
+          <a:fontRef idx="minor">
+            <a:schemeClr val="lt1"/>
+          </a:fontRef>
+        </p:style>
+        <p:txBody>
+          <a:bodyPr rtlCol="0" anchor="ctr"/>
+          <a:lstStyle/>
+          <a:p>
+            <a:pPr algn="ctr"/>
+            <a:endParaRPr/>
+          </a:p>
+        </p:txBody>
+      </p:sp>
+      <p:sp>
+        <p:nvSpPr>
+          <p:cNvPr id="72" name="TextBox 63">
+            <a:extLst>
+              <a:ext uri="{FF2B5EF4-FFF2-40B4-BE49-F238E27FC236}">
+                <a16:creationId xmlns:a16="http://schemas.microsoft.com/office/drawing/2014/main" id="{BC781291-CC61-426B-B326-71039F24415F}"/>
+              </a:ext>
+            </a:extLst>
+          </p:cNvPr>
+          <p:cNvSpPr txBox="1"/>
+          <p:nvPr/>
+        </p:nvSpPr>
+        <p:spPr>
+          <a:xfrm>
+            <a:off x="3337560" y="5473642"/>
+            <a:ext cx="760844" cy="116955"/>
+          </a:xfrm>
+          <a:prstGeom prst="rect">
+            <a:avLst/>
+          </a:prstGeom>
+          <a:noFill/>
+        </p:spPr>
+        <p:txBody>
+          <a:bodyPr wrap="square" lIns="0" tIns="0" rIns="0" bIns="0">
+            <a:spAutoFit/>
+          </a:bodyPr>
+          <a:lstStyle/>
+          <a:p>
+            <a:pPr algn="l"/>
+            <a:r>
+              <a:rPr sz="760" b="1" dirty="0" err="1">
+                <a:solidFill>
+                  <a:srgbClr val="144970"/>
+                </a:solidFill>
+                <a:latin typeface="Microsoft YaHei"/>
+              </a:rPr>
+              <a:t>客户价值与定价</a:t>
+            </a:r>
+            <a:endParaRPr sz="760" b="1" dirty="0">
+              <a:solidFill>
+                <a:srgbClr val="144970"/>
+              </a:solidFill>
+              <a:latin typeface="Microsoft YaHei"/>
+            </a:endParaRPr>
+          </a:p>
+        </p:txBody>
+      </p:sp>
+      <p:sp>
+        <p:nvSpPr>
+          <p:cNvPr id="73" name="Rectangle 64">
+            <a:extLst>
+              <a:ext uri="{FF2B5EF4-FFF2-40B4-BE49-F238E27FC236}">
+                <a16:creationId xmlns:a16="http://schemas.microsoft.com/office/drawing/2014/main" id="{B2DC9C04-4EDD-4ACA-8B3E-651D4C8B8E3F}"/>
+              </a:ext>
+            </a:extLst>
+          </p:cNvPr>
+          <p:cNvSpPr/>
+          <p:nvPr/>
+        </p:nvSpPr>
+        <p:spPr>
+          <a:xfrm>
+            <a:off x="699831" y="5475837"/>
+            <a:ext cx="54864" cy="118872"/>
+          </a:xfrm>
+          <a:prstGeom prst="rect">
+            <a:avLst/>
+          </a:prstGeom>
+          <a:solidFill>
+            <a:srgbClr val="E2A600"/>
+          </a:solidFill>
+          <a:ln>
+            <a:noFill/>
+          </a:ln>
+        </p:spPr>
+        <p:style>
+          <a:lnRef idx="1">
+            <a:schemeClr val="accent1"/>
+          </a:lnRef>
+          <a:fillRef idx="3">
+            <a:schemeClr val="accent1"/>
+          </a:fillRef>
+          <a:effectRef idx="2">
+            <a:schemeClr val="accent1"/>
+          </a:effectRef>
+          <a:fontRef idx="minor">
+            <a:schemeClr val="lt1"/>
+          </a:fontRef>
+        </p:style>
+        <p:txBody>
+          <a:bodyPr rtlCol="0" anchor="ctr"/>
+          <a:lstStyle/>
+          <a:p>
+            <a:pPr algn="ctr"/>
+            <a:endParaRPr/>
+          </a:p>
+        </p:txBody>
+      </p:sp>
+      <p:sp>
+        <p:nvSpPr>
+          <p:cNvPr id="74" name="TextBox 65">
+            <a:extLst>
+              <a:ext uri="{FF2B5EF4-FFF2-40B4-BE49-F238E27FC236}">
+                <a16:creationId xmlns:a16="http://schemas.microsoft.com/office/drawing/2014/main" id="{5E7E4289-2147-435B-A952-F1819463B8E8}"/>
+              </a:ext>
+            </a:extLst>
+          </p:cNvPr>
+          <p:cNvSpPr txBox="1"/>
+          <p:nvPr/>
+        </p:nvSpPr>
+        <p:spPr>
+          <a:xfrm>
+            <a:off x="782127" y="5457549"/>
+            <a:ext cx="795528" cy="116955"/>
+          </a:xfrm>
+          <a:prstGeom prst="rect">
+            <a:avLst/>
+          </a:prstGeom>
+          <a:noFill/>
+        </p:spPr>
+        <p:txBody>
+          <a:bodyPr wrap="square" lIns="0" tIns="0" rIns="0" bIns="0">
+            <a:spAutoFit/>
+          </a:bodyPr>
+          <a:lstStyle/>
+          <a:p>
+            <a:pPr algn="l"/>
+            <a:r>
+              <a:rPr sz="760" b="1" dirty="0" err="1">
+                <a:solidFill>
+                  <a:srgbClr val="144970"/>
+                </a:solidFill>
+                <a:latin typeface="Microsoft YaHei"/>
+              </a:rPr>
+              <a:t>触达与智能经营</a:t>
+            </a:r>
+            <a:endParaRPr sz="760" b="1" dirty="0">
+              <a:solidFill>
+                <a:srgbClr val="144970"/>
+              </a:solidFill>
+              <a:latin typeface="Microsoft YaHei"/>
+            </a:endParaRPr>
+          </a:p>
+        </p:txBody>
+      </p:sp>
+      <p:sp>
+        <p:nvSpPr>
+          <p:cNvPr id="75" name="TextBox 66">
+            <a:extLst>
+              <a:ext uri="{FF2B5EF4-FFF2-40B4-BE49-F238E27FC236}">
+                <a16:creationId xmlns:a16="http://schemas.microsoft.com/office/drawing/2014/main" id="{4E32CBA2-DA28-48E4-B3AD-318F0533089E}"/>
+              </a:ext>
+            </a:extLst>
+          </p:cNvPr>
+          <p:cNvSpPr txBox="1"/>
+          <p:nvPr/>
+        </p:nvSpPr>
+        <p:spPr>
+          <a:xfrm>
+            <a:off x="3255264" y="5693098"/>
             <a:ext cx="2359152" cy="576072"/>
           </a:xfrm>
           <a:prstGeom prst="rect">
@@ -9387,8 +10010,10 @@
               </a:defRPr>
             </a:pPr>
             <a:r>
-              <a:t>Lead Partner 线索评估</a:t>
-            </a:r>
+              <a:rPr dirty="0" err="1"/>
+              <a:t>盈利性评估</a:t>
+            </a:r>
+            <a:endParaRPr dirty="0"/>
           </a:p>
           <a:p>
             <a:pPr>
@@ -9406,8 +10031,10 @@
               </a:defRPr>
             </a:pPr>
             <a:r>
-              <a:t>渠道 / Campaign 质量追踪</a:t>
-            </a:r>
+              <a:rPr dirty="0" err="1"/>
+              <a:t>自动寻优定价</a:t>
+            </a:r>
+            <a:endParaRPr dirty="0"/>
           </a:p>
           <a:p>
             <a:pPr>
@@ -9425,17 +10052,130 @@
               </a:defRPr>
             </a:pPr>
             <a:r>
-              <a:t>扩量阈值与预算分配建议</a:t>
-            </a:r>
-          </a:p>
-        </p:txBody>
-      </p:sp>
-      <p:sp>
-        <p:nvSpPr>
-          <p:cNvPr id="64" name="Rectangle 55">
-            <a:extLst>
-              <a:ext uri="{FF2B5EF4-FFF2-40B4-BE49-F238E27FC236}">
-                <a16:creationId xmlns:a16="http://schemas.microsoft.com/office/drawing/2014/main" id="{6727FC50-B3EB-44E0-B2D6-07352E2DACBD}"/>
+              <a:rPr dirty="0"/>
+              <a:t>Fundo Score</a:t>
+            </a:r>
+          </a:p>
+        </p:txBody>
+      </p:sp>
+      <p:sp>
+        <p:nvSpPr>
+          <p:cNvPr id="76" name="TextBox 67">
+            <a:extLst>
+              <a:ext uri="{FF2B5EF4-FFF2-40B4-BE49-F238E27FC236}">
+                <a16:creationId xmlns:a16="http://schemas.microsoft.com/office/drawing/2014/main" id="{E053EBE7-76F4-40CF-899E-97891E5DC652}"/>
+              </a:ext>
+            </a:extLst>
+          </p:cNvPr>
+          <p:cNvSpPr txBox="1"/>
+          <p:nvPr/>
+        </p:nvSpPr>
+        <p:spPr>
+          <a:xfrm>
+            <a:off x="699831" y="5677005"/>
+            <a:ext cx="2359152" cy="371897"/>
+          </a:xfrm>
+          <a:prstGeom prst="rect">
+            <a:avLst/>
+          </a:prstGeom>
+          <a:noFill/>
+        </p:spPr>
+        <p:txBody>
+          <a:bodyPr wrap="square" lIns="0" tIns="0" rIns="0" bIns="0">
+            <a:spAutoFit/>
+          </a:bodyPr>
+          <a:lstStyle/>
+          <a:p>
+            <a:pPr>
+              <a:lnSpc>
+                <a:spcPct val="100000"/>
+              </a:lnSpc>
+              <a:spcAft>
+                <a:spcPts val="100"/>
+              </a:spcAft>
+              <a:defRPr sz="750">
+                <a:solidFill>
+                  <a:srgbClr val="222C38"/>
+                </a:solidFill>
+                <a:latin typeface="Microsoft YaHei"/>
+              </a:defRPr>
+            </a:pPr>
+            <a:r>
+              <a:rPr dirty="0"/>
+              <a:t> </a:t>
+            </a:r>
+            <a:r>
+              <a:rPr dirty="0" err="1"/>
+              <a:t>触达策略与人群编排</a:t>
+            </a:r>
+            <a:endParaRPr dirty="0"/>
+          </a:p>
+          <a:p>
+            <a:pPr>
+              <a:lnSpc>
+                <a:spcPct val="100000"/>
+              </a:lnSpc>
+              <a:spcAft>
+                <a:spcPts val="100"/>
+              </a:spcAft>
+              <a:defRPr sz="750">
+                <a:solidFill>
+                  <a:srgbClr val="222C38"/>
+                </a:solidFill>
+                <a:latin typeface="Microsoft YaHei"/>
+              </a:defRPr>
+            </a:pPr>
+            <a:r>
+              <a:rPr dirty="0"/>
+              <a:t>★ </a:t>
+            </a:r>
+            <a:r>
+              <a:rPr dirty="0" err="1"/>
+              <a:t>结清客户复贷召回</a:t>
+            </a:r>
+            <a:endParaRPr dirty="0"/>
+          </a:p>
+          <a:p>
+            <a:pPr>
+              <a:lnSpc>
+                <a:spcPct val="100000"/>
+              </a:lnSpc>
+              <a:spcAft>
+                <a:spcPts val="100"/>
+              </a:spcAft>
+              <a:defRPr sz="750">
+                <a:solidFill>
+                  <a:srgbClr val="222C38"/>
+                </a:solidFill>
+                <a:latin typeface="Microsoft YaHei"/>
+              </a:defRPr>
+            </a:pPr>
+            <a:r>
+              <a:rPr lang="zh-CN" altLang="en-US" dirty="0"/>
+              <a:t>★</a:t>
+            </a:r>
+            <a:r>
+              <a:rPr dirty="0" err="1"/>
+              <a:t>竞品洞察</a:t>
+            </a:r>
+            <a:r>
+              <a:rPr dirty="0"/>
+              <a:t> AI </a:t>
+            </a:r>
+            <a:r>
+              <a:rPr dirty="0" err="1"/>
+              <a:t>智能体</a:t>
+            </a:r>
+            <a:endParaRPr dirty="0"/>
+          </a:p>
+        </p:txBody>
+      </p:sp>
+      <p:sp>
+        <p:nvSpPr>
+          <p:cNvPr id="77" name="Rectangle 68">
+            <a:extLst>
+              <a:ext uri="{FF2B5EF4-FFF2-40B4-BE49-F238E27FC236}">
+                <a16:creationId xmlns:a16="http://schemas.microsoft.com/office/drawing/2014/main" id="{E2749237-B8E9-4D1E-98EC-1D745132F593}"/>
               </a:ext>
             </a:extLst>
           </p:cNvPr>
@@ -9444,7 +10184,7 @@
         </p:nvSpPr>
         <p:spPr>
           <a:xfrm>
-            <a:off x="530352" y="4636008"/>
+            <a:off x="6016752" y="4636008"/>
             <a:ext cx="5321808" cy="1609344"/>
           </a:xfrm>
           <a:prstGeom prst="rect">
@@ -9478,16 +10218,16 @@
           <a:lstStyle/>
           <a:p>
             <a:pPr algn="ctr"/>
-            <a:endParaRPr/>
-          </a:p>
-        </p:txBody>
-      </p:sp>
-      <p:sp>
-        <p:nvSpPr>
-          <p:cNvPr id="65" name="Rectangle 56">
-            <a:extLst>
-              <a:ext uri="{FF2B5EF4-FFF2-40B4-BE49-F238E27FC236}">
-                <a16:creationId xmlns:a16="http://schemas.microsoft.com/office/drawing/2014/main" id="{6991C922-BB10-43BB-A3C5-295524DD4AF1}"/>
+            <a:endParaRPr lang="zh-CN" altLang="en-US" dirty="0"/>
+          </a:p>
+        </p:txBody>
+      </p:sp>
+      <p:sp>
+        <p:nvSpPr>
+          <p:cNvPr id="78" name="Rectangle 69">
+            <a:extLst>
+              <a:ext uri="{FF2B5EF4-FFF2-40B4-BE49-F238E27FC236}">
+                <a16:creationId xmlns:a16="http://schemas.microsoft.com/office/drawing/2014/main" id="{B8F06AE8-B3B0-4F05-9FE8-2ADE4CB5A382}"/>
               </a:ext>
             </a:extLst>
           </p:cNvPr>
@@ -9496,7 +10236,7 @@
         </p:nvSpPr>
         <p:spPr>
           <a:xfrm>
-            <a:off x="530352" y="4636008"/>
+            <a:off x="6016752" y="4636008"/>
             <a:ext cx="5321808" cy="50292"/>
           </a:xfrm>
           <a:prstGeom prst="rect">
@@ -9534,10 +10274,10 @@
       </p:sp>
       <p:sp>
         <p:nvSpPr>
-          <p:cNvPr id="66" name="Rectangle 57">
-            <a:extLst>
-              <a:ext uri="{FF2B5EF4-FFF2-40B4-BE49-F238E27FC236}">
-                <a16:creationId xmlns:a16="http://schemas.microsoft.com/office/drawing/2014/main" id="{B0EFB840-6033-4E7A-8B06-5AF80D9ACE41}"/>
+          <p:cNvPr id="79" name="Rectangle 70">
+            <a:extLst>
+              <a:ext uri="{FF2B5EF4-FFF2-40B4-BE49-F238E27FC236}">
+                <a16:creationId xmlns:a16="http://schemas.microsoft.com/office/drawing/2014/main" id="{144AFD4A-47E9-4F8E-9878-0AADEB5B4BF6}"/>
               </a:ext>
             </a:extLst>
           </p:cNvPr>
@@ -9546,7 +10286,7 @@
         </p:nvSpPr>
         <p:spPr>
           <a:xfrm>
-            <a:off x="676656" y="4791456"/>
+            <a:off x="6163056" y="4791456"/>
             <a:ext cx="292608" cy="228600"/>
           </a:xfrm>
           <a:prstGeom prst="rect">
@@ -9584,10 +10324,10 @@
       </p:sp>
       <p:sp>
         <p:nvSpPr>
-          <p:cNvPr id="67" name="TextBox 58">
-            <a:extLst>
-              <a:ext uri="{FF2B5EF4-FFF2-40B4-BE49-F238E27FC236}">
-                <a16:creationId xmlns:a16="http://schemas.microsoft.com/office/drawing/2014/main" id="{FC6C61B2-3AC0-4FA2-BE63-82AEA6A287E2}"/>
+          <p:cNvPr id="80" name="TextBox 71">
+            <a:extLst>
+              <a:ext uri="{FF2B5EF4-FFF2-40B4-BE49-F238E27FC236}">
+                <a16:creationId xmlns:a16="http://schemas.microsoft.com/office/drawing/2014/main" id="{214EBC0E-DC9A-484E-8333-A48A1115DCF0}"/>
               </a:ext>
             </a:extLst>
           </p:cNvPr>
@@ -9596,7 +10336,7 @@
         </p:nvSpPr>
         <p:spPr>
           <a:xfrm>
-            <a:off x="704088" y="4823460"/>
+            <a:off x="6190488" y="4823460"/>
             <a:ext cx="237744" cy="146304"/>
           </a:xfrm>
           <a:prstGeom prst="rect">
@@ -9618,17 +10358,17 @@
                 </a:solidFill>
                 <a:latin typeface="Microsoft YaHei"/>
               </a:rPr>
-              <a:t>03</a:t>
-            </a:r>
-          </a:p>
-        </p:txBody>
-      </p:sp>
-      <p:sp>
-        <p:nvSpPr>
-          <p:cNvPr id="68" name="TextBox 59">
-            <a:extLst>
-              <a:ext uri="{FF2B5EF4-FFF2-40B4-BE49-F238E27FC236}">
-                <a16:creationId xmlns:a16="http://schemas.microsoft.com/office/drawing/2014/main" id="{A17E72E4-6C43-4F6A-B247-2F5FE14D958C}"/>
+              <a:t>04</a:t>
+            </a:r>
+          </a:p>
+        </p:txBody>
+      </p:sp>
+      <p:sp>
+        <p:nvSpPr>
+          <p:cNvPr id="81" name="TextBox 72">
+            <a:extLst>
+              <a:ext uri="{FF2B5EF4-FFF2-40B4-BE49-F238E27FC236}">
+                <a16:creationId xmlns:a16="http://schemas.microsoft.com/office/drawing/2014/main" id="{185E8DBD-30BA-4DF5-8A20-1A45FB1BD964}"/>
               </a:ext>
             </a:extLst>
           </p:cNvPr>
@@ -9637,7 +10377,7 @@
         </p:nvSpPr>
         <p:spPr>
           <a:xfrm>
-            <a:off x="1033271" y="4773168"/>
+            <a:off x="6519672" y="4773168"/>
             <a:ext cx="1097280" cy="219456"/>
           </a:xfrm>
           <a:prstGeom prst="rect">
@@ -9659,17 +10399,17 @@
                 </a:solidFill>
                 <a:latin typeface="Microsoft YaHei"/>
               </a:rPr>
-              <a:t>用户运营</a:t>
-            </a:r>
-          </a:p>
-        </p:txBody>
-      </p:sp>
-      <p:sp>
-        <p:nvSpPr>
-          <p:cNvPr id="69" name="TextBox 60">
-            <a:extLst>
-              <a:ext uri="{FF2B5EF4-FFF2-40B4-BE49-F238E27FC236}">
-                <a16:creationId xmlns:a16="http://schemas.microsoft.com/office/drawing/2014/main" id="{4E62C11B-8C28-4028-869A-3229B5101554}"/>
+              <a:t>风险管理</a:t>
+            </a:r>
+          </a:p>
+        </p:txBody>
+      </p:sp>
+      <p:sp>
+        <p:nvSpPr>
+          <p:cNvPr id="82" name="TextBox 73">
+            <a:extLst>
+              <a:ext uri="{FF2B5EF4-FFF2-40B4-BE49-F238E27FC236}">
+                <a16:creationId xmlns:a16="http://schemas.microsoft.com/office/drawing/2014/main" id="{0C4B3467-80C6-4948-A90E-C79185642C11}"/>
               </a:ext>
             </a:extLst>
           </p:cNvPr>
@@ -9678,7 +10418,7 @@
         </p:nvSpPr>
         <p:spPr>
           <a:xfrm>
-            <a:off x="1033271" y="5020056"/>
+            <a:off x="6519672" y="5020056"/>
             <a:ext cx="4572000" cy="201168"/>
           </a:xfrm>
           <a:prstGeom prst="rect">
@@ -9694,23 +10434,29 @@
           <a:p>
             <a:pPr algn="l"/>
             <a:r>
-              <a:rPr sz="770" b="0">
+              <a:rPr sz="770" b="0" dirty="0" err="1">
                 <a:solidFill>
                   <a:srgbClr val="606976"/>
                 </a:solidFill>
                 <a:latin typeface="Microsoft YaHei"/>
               </a:rPr>
-              <a:t>目标：围绕客户价值、定价和触达，提升复贷与经营效率</a:t>
-            </a:r>
-          </a:p>
-        </p:txBody>
-      </p:sp>
-      <p:sp>
-        <p:nvSpPr>
-          <p:cNvPr id="70" name="Rectangle 61">
-            <a:extLst>
-              <a:ext uri="{FF2B5EF4-FFF2-40B4-BE49-F238E27FC236}">
-                <a16:creationId xmlns:a16="http://schemas.microsoft.com/office/drawing/2014/main" id="{609306D9-9DCA-4A53-B78A-72D88079A5E9}"/>
+              <a:t>目标：在风险可控前提下，平衡通过率、额度与承接</a:t>
+            </a:r>
+            <a:endParaRPr sz="770" b="0" dirty="0">
+              <a:solidFill>
+                <a:srgbClr val="606976"/>
+              </a:solidFill>
+              <a:latin typeface="Microsoft YaHei"/>
+            </a:endParaRPr>
+          </a:p>
+        </p:txBody>
+      </p:sp>
+      <p:sp>
+        <p:nvSpPr>
+          <p:cNvPr id="83" name="Rectangle 74">
+            <a:extLst>
+              <a:ext uri="{FF2B5EF4-FFF2-40B4-BE49-F238E27FC236}">
+                <a16:creationId xmlns:a16="http://schemas.microsoft.com/office/drawing/2014/main" id="{5922F1E9-9B72-47EE-A585-8A4DFE5FA1FD}"/>
               </a:ext>
             </a:extLst>
           </p:cNvPr>
@@ -9719,7 +10465,7 @@
         </p:nvSpPr>
         <p:spPr>
           <a:xfrm>
-            <a:off x="676656" y="5257800"/>
+            <a:off x="6163056" y="5257800"/>
             <a:ext cx="5029200" cy="9144"/>
           </a:xfrm>
           <a:prstGeom prst="rect">
@@ -9757,10 +10503,10 @@
       </p:sp>
       <p:sp>
         <p:nvSpPr>
-          <p:cNvPr id="71" name="Rectangle 62">
-            <a:extLst>
-              <a:ext uri="{FF2B5EF4-FFF2-40B4-BE49-F238E27FC236}">
-                <a16:creationId xmlns:a16="http://schemas.microsoft.com/office/drawing/2014/main" id="{B0D5F27D-3224-417E-BA49-6E10971B5A9B}"/>
+          <p:cNvPr id="84" name="Rectangle 75">
+            <a:extLst>
+              <a:ext uri="{FF2B5EF4-FFF2-40B4-BE49-F238E27FC236}">
+                <a16:creationId xmlns:a16="http://schemas.microsoft.com/office/drawing/2014/main" id="{C0E99B71-2A6B-42DF-B94B-88A94F1634AF}"/>
               </a:ext>
             </a:extLst>
           </p:cNvPr>
@@ -9769,7 +10515,7 @@
         </p:nvSpPr>
         <p:spPr>
           <a:xfrm>
-            <a:off x="676656" y="5376672"/>
+            <a:off x="6163056" y="5376672"/>
             <a:ext cx="54864" cy="118872"/>
           </a:xfrm>
           <a:prstGeom prst="rect">
@@ -9807,10 +10553,10 @@
       </p:sp>
       <p:sp>
         <p:nvSpPr>
-          <p:cNvPr id="72" name="TextBox 63">
-            <a:extLst>
-              <a:ext uri="{FF2B5EF4-FFF2-40B4-BE49-F238E27FC236}">
-                <a16:creationId xmlns:a16="http://schemas.microsoft.com/office/drawing/2014/main" id="{BC781291-CC61-426B-B326-71039F24415F}"/>
+          <p:cNvPr id="85" name="TextBox 76">
+            <a:extLst>
+              <a:ext uri="{FF2B5EF4-FFF2-40B4-BE49-F238E27FC236}">
+                <a16:creationId xmlns:a16="http://schemas.microsoft.com/office/drawing/2014/main" id="{965B33CF-A6C0-4DA4-83A5-87E3B51E79C1}"/>
               </a:ext>
             </a:extLst>
           </p:cNvPr>
@@ -9819,8 +10565,8 @@
         </p:nvSpPr>
         <p:spPr>
           <a:xfrm>
-            <a:off x="758952" y="5358384"/>
-            <a:ext cx="760844" cy="116955"/>
+            <a:off x="6257964" y="5377302"/>
+            <a:ext cx="548640" cy="116955"/>
           </a:xfrm>
           <a:prstGeom prst="rect">
             <a:avLst/>
@@ -9835,13 +10581,13 @@
           <a:p>
             <a:pPr algn="l"/>
             <a:r>
-              <a:rPr sz="760" b="1" dirty="0" err="1">
+              <a:rPr lang="zh-CN" altLang="en-US" sz="760" b="1" dirty="0">
                 <a:solidFill>
                   <a:srgbClr val="144970"/>
                 </a:solidFill>
                 <a:latin typeface="Microsoft YaHei"/>
               </a:rPr>
-              <a:t>客户价值与定价</a:t>
+              <a:t>模型迭代</a:t>
             </a:r>
             <a:endParaRPr sz="760" b="1" dirty="0">
               <a:solidFill>
@@ -9854,10 +10600,10 @@
       </p:sp>
       <p:sp>
         <p:nvSpPr>
-          <p:cNvPr id="73" name="Rectangle 64">
-            <a:extLst>
-              <a:ext uri="{FF2B5EF4-FFF2-40B4-BE49-F238E27FC236}">
-                <a16:creationId xmlns:a16="http://schemas.microsoft.com/office/drawing/2014/main" id="{B2DC9C04-4EDD-4ACA-8B3E-651D4C8B8E3F}"/>
+          <p:cNvPr id="86" name="Rectangle 77">
+            <a:extLst>
+              <a:ext uri="{FF2B5EF4-FFF2-40B4-BE49-F238E27FC236}">
+                <a16:creationId xmlns:a16="http://schemas.microsoft.com/office/drawing/2014/main" id="{A5BDB989-A8A4-439F-98E7-9A07394974C5}"/>
               </a:ext>
             </a:extLst>
           </p:cNvPr>
@@ -9866,7 +10612,7 @@
         </p:nvSpPr>
         <p:spPr>
           <a:xfrm>
-            <a:off x="3255264" y="5376672"/>
+            <a:off x="8741664" y="5376672"/>
             <a:ext cx="54864" cy="118872"/>
           </a:xfrm>
           <a:prstGeom prst="rect">
@@ -9904,10 +10650,10 @@
       </p:sp>
       <p:sp>
         <p:nvSpPr>
-          <p:cNvPr id="74" name="TextBox 65">
-            <a:extLst>
-              <a:ext uri="{FF2B5EF4-FFF2-40B4-BE49-F238E27FC236}">
-                <a16:creationId xmlns:a16="http://schemas.microsoft.com/office/drawing/2014/main" id="{5E7E4289-2147-435B-A952-F1819463B8E8}"/>
+          <p:cNvPr id="87" name="TextBox 78">
+            <a:extLst>
+              <a:ext uri="{FF2B5EF4-FFF2-40B4-BE49-F238E27FC236}">
+                <a16:creationId xmlns:a16="http://schemas.microsoft.com/office/drawing/2014/main" id="{2C89A044-A3A1-417D-BEF4-D2ABF4F4F524}"/>
               </a:ext>
             </a:extLst>
           </p:cNvPr>
@@ -9916,8 +10662,8 @@
         </p:nvSpPr>
         <p:spPr>
           <a:xfrm>
-            <a:off x="3337560" y="5358384"/>
-            <a:ext cx="795528" cy="116955"/>
+            <a:off x="8823960" y="5358384"/>
+            <a:ext cx="548640" cy="164592"/>
           </a:xfrm>
           <a:prstGeom prst="rect">
             <a:avLst/>
@@ -9932,29 +10678,23 @@
           <a:p>
             <a:pPr algn="l"/>
             <a:r>
-              <a:rPr sz="760" b="1" dirty="0" err="1">
+              <a:rPr sz="760" b="1">
                 <a:solidFill>
                   <a:srgbClr val="144970"/>
                 </a:solidFill>
                 <a:latin typeface="Microsoft YaHei"/>
               </a:rPr>
-              <a:t>触达与智能经营</a:t>
-            </a:r>
-            <a:endParaRPr sz="760" b="1" dirty="0">
-              <a:solidFill>
-                <a:srgbClr val="144970"/>
-              </a:solidFill>
-              <a:latin typeface="Microsoft YaHei"/>
-            </a:endParaRPr>
-          </a:p>
-        </p:txBody>
-      </p:sp>
-      <p:sp>
-        <p:nvSpPr>
-          <p:cNvPr id="75" name="TextBox 66">
-            <a:extLst>
-              <a:ext uri="{FF2B5EF4-FFF2-40B4-BE49-F238E27FC236}">
-                <a16:creationId xmlns:a16="http://schemas.microsoft.com/office/drawing/2014/main" id="{4E32CBA2-DA28-48E4-B3AD-318F0533089E}"/>
+              <a:t>输出形态</a:t>
+            </a:r>
+          </a:p>
+        </p:txBody>
+      </p:sp>
+      <p:sp>
+        <p:nvSpPr>
+          <p:cNvPr id="88" name="TextBox 79">
+            <a:extLst>
+              <a:ext uri="{FF2B5EF4-FFF2-40B4-BE49-F238E27FC236}">
+                <a16:creationId xmlns:a16="http://schemas.microsoft.com/office/drawing/2014/main" id="{8BE92C97-D1FA-4C98-AA7F-B0C8CFDE232A}"/>
               </a:ext>
             </a:extLst>
           </p:cNvPr>
@@ -9963,8 +10703,8 @@
         </p:nvSpPr>
         <p:spPr>
           <a:xfrm>
-            <a:off x="676656" y="5577840"/>
-            <a:ext cx="2359152" cy="576072"/>
+            <a:off x="6163056" y="5577840"/>
+            <a:ext cx="2359152" cy="115416"/>
           </a:xfrm>
           <a:prstGeom prst="rect">
             <a:avLst/>
@@ -9992,14 +10732,54 @@
               </a:defRPr>
             </a:pPr>
             <a:r>
-              <a:t>盈利性评估</a:t>
-            </a:r>
-          </a:p>
+              <a:rPr dirty="0"/>
+              <a:t>★ </a:t>
+            </a:r>
+            <a:r>
+              <a:rPr dirty="0" err="1"/>
+              <a:t>新老客</a:t>
+            </a:r>
+            <a:r>
+              <a:rPr dirty="0"/>
+              <a:t> PD </a:t>
+            </a:r>
+            <a:r>
+              <a:rPr dirty="0" err="1"/>
+              <a:t>模型迭代：增强头尾区分</a:t>
+            </a:r>
+            <a:endParaRPr dirty="0"/>
+          </a:p>
+        </p:txBody>
+      </p:sp>
+      <p:sp>
+        <p:nvSpPr>
+          <p:cNvPr id="90" name="文本框 89">
+            <a:extLst>
+              <a:ext uri="{FF2B5EF4-FFF2-40B4-BE49-F238E27FC236}">
+                <a16:creationId xmlns:a16="http://schemas.microsoft.com/office/drawing/2014/main" id="{D4C264D2-47E5-43BE-9318-54C1B3783D95}"/>
+              </a:ext>
+            </a:extLst>
+          </p:cNvPr>
+          <p:cNvSpPr txBox="1"/>
+          <p:nvPr/>
+        </p:nvSpPr>
+        <p:spPr>
+          <a:xfrm>
+            <a:off x="8677656" y="5534348"/>
+            <a:ext cx="2514600" cy="207749"/>
+          </a:xfrm>
+          <a:prstGeom prst="rect">
+            <a:avLst/>
+          </a:prstGeom>
+          <a:noFill/>
+        </p:spPr>
+        <p:txBody>
+          <a:bodyPr wrap="square">
+            <a:spAutoFit/>
+          </a:bodyPr>
+          <a:lstStyle/>
           <a:p>
             <a:pPr>
-              <a:lnSpc>
-                <a:spcPct val="100000"/>
-              </a:lnSpc>
               <a:spcAft>
                 <a:spcPts val="100"/>
               </a:spcAft>
@@ -10011,791 +10791,31 @@
               </a:defRPr>
             </a:pPr>
             <a:r>
-              <a:t>自动寻优定价</a:t>
-            </a:r>
-          </a:p>
-          <a:p>
-            <a:pPr>
-              <a:lnSpc>
-                <a:spcPct val="100000"/>
-              </a:lnSpc>
-              <a:spcAft>
-                <a:spcPts val="100"/>
-              </a:spcAft>
-              <a:defRPr sz="750">
-                <a:solidFill>
-                  <a:srgbClr val="222C38"/>
-                </a:solidFill>
-                <a:latin typeface="Microsoft YaHei"/>
-              </a:defRPr>
-            </a:pPr>
-            <a:r>
-              <a:t>Fundo Score</a:t>
-            </a:r>
-          </a:p>
-        </p:txBody>
-      </p:sp>
-      <p:sp>
-        <p:nvSpPr>
-          <p:cNvPr id="76" name="TextBox 67">
-            <a:extLst>
-              <a:ext uri="{FF2B5EF4-FFF2-40B4-BE49-F238E27FC236}">
-                <a16:creationId xmlns:a16="http://schemas.microsoft.com/office/drawing/2014/main" id="{E053EBE7-76F4-40CF-899E-97891E5DC652}"/>
-              </a:ext>
-            </a:extLst>
-          </p:cNvPr>
-          <p:cNvSpPr txBox="1"/>
-          <p:nvPr/>
-        </p:nvSpPr>
-        <p:spPr>
-          <a:xfrm>
-            <a:off x="3255264" y="5577840"/>
-            <a:ext cx="2359152" cy="576072"/>
-          </a:xfrm>
-          <a:prstGeom prst="rect">
-            <a:avLst/>
-          </a:prstGeom>
-          <a:noFill/>
-        </p:spPr>
-        <p:txBody>
-          <a:bodyPr wrap="square" lIns="0" tIns="0" rIns="0" bIns="0">
-            <a:spAutoFit/>
-          </a:bodyPr>
-          <a:lstStyle/>
-          <a:p>
-            <a:pPr>
-              <a:lnSpc>
-                <a:spcPct val="100000"/>
-              </a:lnSpc>
-              <a:spcAft>
-                <a:spcPts val="100"/>
-              </a:spcAft>
-              <a:defRPr sz="750">
-                <a:solidFill>
-                  <a:srgbClr val="222C38"/>
-                </a:solidFill>
-                <a:latin typeface="Microsoft YaHei"/>
-              </a:defRPr>
-            </a:pPr>
-            <a:r>
-              <a:t>★ 触达策略与人群编排</a:t>
-            </a:r>
-          </a:p>
-          <a:p>
-            <a:pPr>
-              <a:lnSpc>
-                <a:spcPct val="100000"/>
-              </a:lnSpc>
-              <a:spcAft>
-                <a:spcPts val="100"/>
-              </a:spcAft>
-              <a:defRPr sz="750">
-                <a:solidFill>
-                  <a:srgbClr val="222C38"/>
-                </a:solidFill>
-                <a:latin typeface="Microsoft YaHei"/>
-              </a:defRPr>
-            </a:pPr>
-            <a:r>
-              <a:t>★ 结清客户复贷召回</a:t>
-            </a:r>
-          </a:p>
-          <a:p>
-            <a:pPr>
-              <a:lnSpc>
-                <a:spcPct val="100000"/>
-              </a:lnSpc>
-              <a:spcAft>
-                <a:spcPts val="100"/>
-              </a:spcAft>
-              <a:defRPr sz="750">
-                <a:solidFill>
-                  <a:srgbClr val="222C38"/>
-                </a:solidFill>
-                <a:latin typeface="Microsoft YaHei"/>
-              </a:defRPr>
-            </a:pPr>
-            <a:r>
-              <a:t>运营监控 / 竞品洞察 AI 智能体</a:t>
-            </a:r>
-          </a:p>
-        </p:txBody>
-      </p:sp>
-      <p:sp>
-        <p:nvSpPr>
-          <p:cNvPr id="77" name="Rectangle 68">
-            <a:extLst>
-              <a:ext uri="{FF2B5EF4-FFF2-40B4-BE49-F238E27FC236}">
-                <a16:creationId xmlns:a16="http://schemas.microsoft.com/office/drawing/2014/main" id="{E2749237-B8E9-4D1E-98EC-1D745132F593}"/>
-              </a:ext>
-            </a:extLst>
-          </p:cNvPr>
-          <p:cNvSpPr/>
-          <p:nvPr/>
-        </p:nvSpPr>
-        <p:spPr>
-          <a:xfrm>
-            <a:off x="6016752" y="4636008"/>
-            <a:ext cx="5321808" cy="1609344"/>
-          </a:xfrm>
-          <a:prstGeom prst="rect">
-            <a:avLst/>
-          </a:prstGeom>
-          <a:solidFill>
-            <a:srgbClr val="FFFFFF"/>
-          </a:solidFill>
-          <a:ln w="7620">
-            <a:solidFill>
-              <a:srgbClr val="D6DBE1"/>
-            </a:solidFill>
-          </a:ln>
-        </p:spPr>
-        <p:style>
-          <a:lnRef idx="1">
-            <a:schemeClr val="accent1"/>
-          </a:lnRef>
-          <a:fillRef idx="3">
-            <a:schemeClr val="accent1"/>
-          </a:fillRef>
-          <a:effectRef idx="2">
-            <a:schemeClr val="accent1"/>
-          </a:effectRef>
-          <a:fontRef idx="minor">
-            <a:schemeClr val="lt1"/>
-          </a:fontRef>
-        </p:style>
-        <p:txBody>
-          <a:bodyPr rtlCol="0" anchor="ctr"/>
-          <a:lstStyle/>
-          <a:p>
-            <a:pPr algn="ctr"/>
-            <a:endParaRPr/>
-          </a:p>
-        </p:txBody>
-      </p:sp>
-      <p:sp>
-        <p:nvSpPr>
-          <p:cNvPr id="78" name="Rectangle 69">
-            <a:extLst>
-              <a:ext uri="{FF2B5EF4-FFF2-40B4-BE49-F238E27FC236}">
-                <a16:creationId xmlns:a16="http://schemas.microsoft.com/office/drawing/2014/main" id="{B8F06AE8-B3B0-4F05-9FE8-2ADE4CB5A382}"/>
-              </a:ext>
-            </a:extLst>
-          </p:cNvPr>
-          <p:cNvSpPr/>
-          <p:nvPr/>
-        </p:nvSpPr>
-        <p:spPr>
-          <a:xfrm>
-            <a:off x="6016752" y="4636008"/>
-            <a:ext cx="5321808" cy="50292"/>
-          </a:xfrm>
-          <a:prstGeom prst="rect">
-            <a:avLst/>
-          </a:prstGeom>
-          <a:solidFill>
-            <a:srgbClr val="0C3658"/>
-          </a:solidFill>
-          <a:ln>
-            <a:noFill/>
-          </a:ln>
-        </p:spPr>
-        <p:style>
-          <a:lnRef idx="1">
-            <a:schemeClr val="accent1"/>
-          </a:lnRef>
-          <a:fillRef idx="3">
-            <a:schemeClr val="accent1"/>
-          </a:fillRef>
-          <a:effectRef idx="2">
-            <a:schemeClr val="accent1"/>
-          </a:effectRef>
-          <a:fontRef idx="minor">
-            <a:schemeClr val="lt1"/>
-          </a:fontRef>
-        </p:style>
-        <p:txBody>
-          <a:bodyPr rtlCol="0" anchor="ctr"/>
-          <a:lstStyle/>
-          <a:p>
-            <a:pPr algn="ctr"/>
-            <a:endParaRPr/>
-          </a:p>
-        </p:txBody>
-      </p:sp>
-      <p:sp>
-        <p:nvSpPr>
-          <p:cNvPr id="79" name="Rectangle 70">
-            <a:extLst>
-              <a:ext uri="{FF2B5EF4-FFF2-40B4-BE49-F238E27FC236}">
-                <a16:creationId xmlns:a16="http://schemas.microsoft.com/office/drawing/2014/main" id="{144AFD4A-47E9-4F8E-9878-0AADEB5B4BF6}"/>
-              </a:ext>
-            </a:extLst>
-          </p:cNvPr>
-          <p:cNvSpPr/>
-          <p:nvPr/>
-        </p:nvSpPr>
-        <p:spPr>
-          <a:xfrm>
-            <a:off x="6163056" y="4791456"/>
-            <a:ext cx="292608" cy="228600"/>
-          </a:xfrm>
-          <a:prstGeom prst="rect">
-            <a:avLst/>
-          </a:prstGeom>
-          <a:solidFill>
-            <a:srgbClr val="EFF5FB"/>
-          </a:solidFill>
-          <a:ln>
-            <a:noFill/>
-          </a:ln>
-        </p:spPr>
-        <p:style>
-          <a:lnRef idx="1">
-            <a:schemeClr val="accent1"/>
-          </a:lnRef>
-          <a:fillRef idx="3">
-            <a:schemeClr val="accent1"/>
-          </a:fillRef>
-          <a:effectRef idx="2">
-            <a:schemeClr val="accent1"/>
-          </a:effectRef>
-          <a:fontRef idx="minor">
-            <a:schemeClr val="lt1"/>
-          </a:fontRef>
-        </p:style>
-        <p:txBody>
-          <a:bodyPr rtlCol="0" anchor="ctr"/>
-          <a:lstStyle/>
-          <a:p>
-            <a:pPr algn="ctr"/>
-            <a:endParaRPr/>
-          </a:p>
-        </p:txBody>
-      </p:sp>
-      <p:sp>
-        <p:nvSpPr>
-          <p:cNvPr id="80" name="TextBox 71">
-            <a:extLst>
-              <a:ext uri="{FF2B5EF4-FFF2-40B4-BE49-F238E27FC236}">
-                <a16:creationId xmlns:a16="http://schemas.microsoft.com/office/drawing/2014/main" id="{214EBC0E-DC9A-484E-8333-A48A1115DCF0}"/>
-              </a:ext>
-            </a:extLst>
-          </p:cNvPr>
-          <p:cNvSpPr txBox="1"/>
-          <p:nvPr/>
-        </p:nvSpPr>
-        <p:spPr>
-          <a:xfrm>
-            <a:off x="6190488" y="4823460"/>
-            <a:ext cx="237744" cy="146304"/>
-          </a:xfrm>
-          <a:prstGeom prst="rect">
-            <a:avLst/>
-          </a:prstGeom>
-          <a:noFill/>
-        </p:spPr>
-        <p:txBody>
-          <a:bodyPr wrap="square" lIns="0" tIns="0" rIns="0" bIns="0">
-            <a:spAutoFit/>
-          </a:bodyPr>
-          <a:lstStyle/>
-          <a:p>
-            <a:pPr algn="ctr"/>
-            <a:r>
-              <a:rPr sz="740" b="1">
-                <a:solidFill>
-                  <a:srgbClr val="144970"/>
-                </a:solidFill>
-                <a:latin typeface="Microsoft YaHei"/>
-              </a:rPr>
-              <a:t>04</a:t>
-            </a:r>
-          </a:p>
-        </p:txBody>
-      </p:sp>
-      <p:sp>
-        <p:nvSpPr>
-          <p:cNvPr id="81" name="TextBox 72">
-            <a:extLst>
-              <a:ext uri="{FF2B5EF4-FFF2-40B4-BE49-F238E27FC236}">
-                <a16:creationId xmlns:a16="http://schemas.microsoft.com/office/drawing/2014/main" id="{185E8DBD-30BA-4DF5-8A20-1A45FB1BD964}"/>
-              </a:ext>
-            </a:extLst>
-          </p:cNvPr>
-          <p:cNvSpPr txBox="1"/>
-          <p:nvPr/>
-        </p:nvSpPr>
-        <p:spPr>
-          <a:xfrm>
-            <a:off x="6519672" y="4773168"/>
-            <a:ext cx="1097280" cy="219456"/>
-          </a:xfrm>
-          <a:prstGeom prst="rect">
-            <a:avLst/>
-          </a:prstGeom>
-          <a:noFill/>
-        </p:spPr>
-        <p:txBody>
-          <a:bodyPr wrap="square" lIns="0" tIns="0" rIns="0" bIns="0">
-            <a:spAutoFit/>
-          </a:bodyPr>
-          <a:lstStyle/>
-          <a:p>
-            <a:pPr algn="l"/>
-            <a:r>
-              <a:rPr sz="1320" b="1">
+              <a:rPr lang="zh-CN" altLang="en-US" sz="750" dirty="0">
                 <a:solidFill>
                   <a:srgbClr val="222C38"/>
                 </a:solidFill>
                 <a:latin typeface="Microsoft YaHei"/>
               </a:rPr>
-              <a:t>风险管理</a:t>
-            </a:r>
-          </a:p>
-        </p:txBody>
-      </p:sp>
-      <p:sp>
-        <p:nvSpPr>
-          <p:cNvPr id="82" name="TextBox 73">
-            <a:extLst>
-              <a:ext uri="{FF2B5EF4-FFF2-40B4-BE49-F238E27FC236}">
-                <a16:creationId xmlns:a16="http://schemas.microsoft.com/office/drawing/2014/main" id="{0C4B3467-80C6-4948-A90E-C79185642C11}"/>
-              </a:ext>
-            </a:extLst>
-          </p:cNvPr>
-          <p:cNvSpPr txBox="1"/>
-          <p:nvPr/>
-        </p:nvSpPr>
-        <p:spPr>
-          <a:xfrm>
-            <a:off x="6519672" y="5020056"/>
-            <a:ext cx="4572000" cy="201168"/>
-          </a:xfrm>
-          <a:prstGeom prst="rect">
-            <a:avLst/>
-          </a:prstGeom>
-          <a:noFill/>
-        </p:spPr>
-        <p:txBody>
-          <a:bodyPr wrap="square" lIns="0" tIns="0" rIns="0" bIns="0">
-            <a:spAutoFit/>
-          </a:bodyPr>
-          <a:lstStyle/>
-          <a:p>
-            <a:pPr algn="l"/>
-            <a:r>
-              <a:rPr sz="770" b="0">
-                <a:solidFill>
-                  <a:srgbClr val="606976"/>
-                </a:solidFill>
-                <a:latin typeface="Microsoft YaHei"/>
-              </a:rPr>
-              <a:t>目标：在风险可控前提下，平衡通过率、额度与承接</a:t>
-            </a:r>
-          </a:p>
-        </p:txBody>
-      </p:sp>
-      <p:sp>
-        <p:nvSpPr>
-          <p:cNvPr id="83" name="Rectangle 74">
-            <a:extLst>
-              <a:ext uri="{FF2B5EF4-FFF2-40B4-BE49-F238E27FC236}">
-                <a16:creationId xmlns:a16="http://schemas.microsoft.com/office/drawing/2014/main" id="{5922F1E9-9B72-47EE-A585-8A4DFE5FA1FD}"/>
-              </a:ext>
-            </a:extLst>
-          </p:cNvPr>
-          <p:cNvSpPr/>
-          <p:nvPr/>
-        </p:nvSpPr>
-        <p:spPr>
-          <a:xfrm>
-            <a:off x="6163056" y="5257800"/>
-            <a:ext cx="5029200" cy="9144"/>
-          </a:xfrm>
-          <a:prstGeom prst="rect">
-            <a:avLst/>
-          </a:prstGeom>
-          <a:solidFill>
-            <a:srgbClr val="D6DBE1"/>
-          </a:solidFill>
-          <a:ln>
-            <a:noFill/>
-          </a:ln>
-        </p:spPr>
-        <p:style>
-          <a:lnRef idx="1">
-            <a:schemeClr val="accent1"/>
-          </a:lnRef>
-          <a:fillRef idx="3">
-            <a:schemeClr val="accent1"/>
-          </a:fillRef>
-          <a:effectRef idx="2">
-            <a:schemeClr val="accent1"/>
-          </a:effectRef>
-          <a:fontRef idx="minor">
-            <a:schemeClr val="lt1"/>
-          </a:fontRef>
-        </p:style>
-        <p:txBody>
-          <a:bodyPr rtlCol="0" anchor="ctr"/>
-          <a:lstStyle/>
-          <a:p>
-            <a:pPr algn="ctr"/>
-            <a:endParaRPr/>
-          </a:p>
-        </p:txBody>
-      </p:sp>
-      <p:sp>
-        <p:nvSpPr>
-          <p:cNvPr id="84" name="Rectangle 75">
-            <a:extLst>
-              <a:ext uri="{FF2B5EF4-FFF2-40B4-BE49-F238E27FC236}">
-                <a16:creationId xmlns:a16="http://schemas.microsoft.com/office/drawing/2014/main" id="{C0E99B71-2A6B-42DF-B94B-88A94F1634AF}"/>
-              </a:ext>
-            </a:extLst>
-          </p:cNvPr>
-          <p:cNvSpPr/>
-          <p:nvPr/>
-        </p:nvSpPr>
-        <p:spPr>
-          <a:xfrm>
-            <a:off x="6163056" y="5376672"/>
-            <a:ext cx="54864" cy="118872"/>
-          </a:xfrm>
-          <a:prstGeom prst="rect">
-            <a:avLst/>
-          </a:prstGeom>
-          <a:solidFill>
-            <a:srgbClr val="E2A600"/>
-          </a:solidFill>
-          <a:ln>
-            <a:noFill/>
-          </a:ln>
-        </p:spPr>
-        <p:style>
-          <a:lnRef idx="1">
-            <a:schemeClr val="accent1"/>
-          </a:lnRef>
-          <a:fillRef idx="3">
-            <a:schemeClr val="accent1"/>
-          </a:fillRef>
-          <a:effectRef idx="2">
-            <a:schemeClr val="accent1"/>
-          </a:effectRef>
-          <a:fontRef idx="minor">
-            <a:schemeClr val="lt1"/>
-          </a:fontRef>
-        </p:style>
-        <p:txBody>
-          <a:bodyPr rtlCol="0" anchor="ctr"/>
-          <a:lstStyle/>
-          <a:p>
-            <a:pPr algn="ctr"/>
-            <a:endParaRPr/>
-          </a:p>
-        </p:txBody>
-      </p:sp>
-      <p:sp>
-        <p:nvSpPr>
-          <p:cNvPr id="85" name="TextBox 76">
-            <a:extLst>
-              <a:ext uri="{FF2B5EF4-FFF2-40B4-BE49-F238E27FC236}">
-                <a16:creationId xmlns:a16="http://schemas.microsoft.com/office/drawing/2014/main" id="{965B33CF-A6C0-4DA4-83A5-87E3B51E79C1}"/>
-              </a:ext>
-            </a:extLst>
-          </p:cNvPr>
-          <p:cNvSpPr txBox="1"/>
-          <p:nvPr/>
-        </p:nvSpPr>
-        <p:spPr>
-          <a:xfrm>
-            <a:off x="6245352" y="5358384"/>
-            <a:ext cx="548640" cy="164592"/>
-          </a:xfrm>
-          <a:prstGeom prst="rect">
-            <a:avLst/>
-          </a:prstGeom>
-          <a:noFill/>
-        </p:spPr>
-        <p:txBody>
-          <a:bodyPr wrap="square" lIns="0" tIns="0" rIns="0" bIns="0">
-            <a:spAutoFit/>
-          </a:bodyPr>
-          <a:lstStyle/>
-          <a:p>
-            <a:pPr algn="l"/>
-            <a:r>
-              <a:rPr sz="760" b="1">
-                <a:solidFill>
-                  <a:srgbClr val="144970"/>
-                </a:solidFill>
-                <a:latin typeface="Microsoft YaHei"/>
-              </a:rPr>
-              <a:t>重点项目</a:t>
-            </a:r>
-          </a:p>
-        </p:txBody>
-      </p:sp>
-      <p:sp>
-        <p:nvSpPr>
-          <p:cNvPr id="86" name="Rectangle 77">
-            <a:extLst>
-              <a:ext uri="{FF2B5EF4-FFF2-40B4-BE49-F238E27FC236}">
-                <a16:creationId xmlns:a16="http://schemas.microsoft.com/office/drawing/2014/main" id="{A5BDB989-A8A4-439F-98E7-9A07394974C5}"/>
-              </a:ext>
-            </a:extLst>
-          </p:cNvPr>
-          <p:cNvSpPr/>
-          <p:nvPr/>
-        </p:nvSpPr>
-        <p:spPr>
-          <a:xfrm>
-            <a:off x="8741664" y="5376672"/>
-            <a:ext cx="54864" cy="118872"/>
-          </a:xfrm>
-          <a:prstGeom prst="rect">
-            <a:avLst/>
-          </a:prstGeom>
-          <a:solidFill>
-            <a:srgbClr val="E2A600"/>
-          </a:solidFill>
-          <a:ln>
-            <a:noFill/>
-          </a:ln>
-        </p:spPr>
-        <p:style>
-          <a:lnRef idx="1">
-            <a:schemeClr val="accent1"/>
-          </a:lnRef>
-          <a:fillRef idx="3">
-            <a:schemeClr val="accent1"/>
-          </a:fillRef>
-          <a:effectRef idx="2">
-            <a:schemeClr val="accent1"/>
-          </a:effectRef>
-          <a:fontRef idx="minor">
-            <a:schemeClr val="lt1"/>
-          </a:fontRef>
-        </p:style>
-        <p:txBody>
-          <a:bodyPr rtlCol="0" anchor="ctr"/>
-          <a:lstStyle/>
-          <a:p>
-            <a:pPr algn="ctr"/>
-            <a:endParaRPr/>
-          </a:p>
-        </p:txBody>
-      </p:sp>
-      <p:sp>
-        <p:nvSpPr>
-          <p:cNvPr id="87" name="TextBox 78">
-            <a:extLst>
-              <a:ext uri="{FF2B5EF4-FFF2-40B4-BE49-F238E27FC236}">
-                <a16:creationId xmlns:a16="http://schemas.microsoft.com/office/drawing/2014/main" id="{2C89A044-A3A1-417D-BEF4-D2ABF4F4F524}"/>
-              </a:ext>
-            </a:extLst>
-          </p:cNvPr>
-          <p:cNvSpPr txBox="1"/>
-          <p:nvPr/>
-        </p:nvSpPr>
-        <p:spPr>
-          <a:xfrm>
-            <a:off x="8823960" y="5358384"/>
-            <a:ext cx="548640" cy="164592"/>
-          </a:xfrm>
-          <a:prstGeom prst="rect">
-            <a:avLst/>
-          </a:prstGeom>
-          <a:noFill/>
-        </p:spPr>
-        <p:txBody>
-          <a:bodyPr wrap="square" lIns="0" tIns="0" rIns="0" bIns="0">
-            <a:spAutoFit/>
-          </a:bodyPr>
-          <a:lstStyle/>
-          <a:p>
-            <a:pPr algn="l"/>
-            <a:r>
-              <a:rPr sz="760" b="1">
-                <a:solidFill>
-                  <a:srgbClr val="144970"/>
-                </a:solidFill>
-                <a:latin typeface="Microsoft YaHei"/>
-              </a:rPr>
-              <a:t>输出形态</a:t>
-            </a:r>
-          </a:p>
-        </p:txBody>
-      </p:sp>
-      <p:sp>
-        <p:nvSpPr>
-          <p:cNvPr id="88" name="TextBox 79">
-            <a:extLst>
-              <a:ext uri="{FF2B5EF4-FFF2-40B4-BE49-F238E27FC236}">
-                <a16:creationId xmlns:a16="http://schemas.microsoft.com/office/drawing/2014/main" id="{8BE92C97-D1FA-4C98-AA7F-B0C8CFDE232A}"/>
-              </a:ext>
-            </a:extLst>
-          </p:cNvPr>
-          <p:cNvSpPr txBox="1"/>
-          <p:nvPr/>
-        </p:nvSpPr>
-        <p:spPr>
-          <a:xfrm>
-            <a:off x="6163056" y="5577840"/>
-            <a:ext cx="2359152" cy="576072"/>
-          </a:xfrm>
-          <a:prstGeom prst="rect">
-            <a:avLst/>
-          </a:prstGeom>
-          <a:noFill/>
-        </p:spPr>
-        <p:txBody>
-          <a:bodyPr wrap="square" lIns="0" tIns="0" rIns="0" bIns="0">
-            <a:spAutoFit/>
-          </a:bodyPr>
-          <a:lstStyle/>
-          <a:p>
-            <a:pPr>
-              <a:lnSpc>
-                <a:spcPct val="100000"/>
-              </a:lnSpc>
-              <a:spcAft>
-                <a:spcPts val="100"/>
-              </a:spcAft>
-              <a:defRPr sz="750">
+              <a:t>★ 风险 </a:t>
+            </a:r>
+            <a:r>
+              <a:rPr lang="en-US" altLang="zh-CN" sz="750" dirty="0">
                 <a:solidFill>
                   <a:srgbClr val="222C38"/>
                 </a:solidFill>
                 <a:latin typeface="Microsoft YaHei"/>
-              </a:defRPr>
-            </a:pPr>
-            <a:r>
-              <a:t>★ 新老客 PD 模型迭代：增强头尾区分</a:t>
-            </a:r>
-          </a:p>
-          <a:p>
-            <a:pPr>
-              <a:lnSpc>
-                <a:spcPct val="100000"/>
-              </a:lnSpc>
-              <a:spcAft>
-                <a:spcPts val="100"/>
-              </a:spcAft>
-              <a:defRPr sz="750">
+              </a:rPr>
+              <a:t>× </a:t>
+            </a:r>
+            <a:r>
+              <a:rPr lang="zh-CN" altLang="en-US" sz="750" dirty="0">
                 <a:solidFill>
                   <a:srgbClr val="222C38"/>
                 </a:solidFill>
                 <a:latin typeface="Microsoft YaHei"/>
-              </a:defRPr>
-            </a:pPr>
-            <a:r>
-              <a:t>★ 风险 × 价值联合额度策略</a:t>
-            </a:r>
-          </a:p>
-          <a:p>
-            <a:pPr>
-              <a:lnSpc>
-                <a:spcPct val="100000"/>
-              </a:lnSpc>
-              <a:spcAft>
-                <a:spcPts val="100"/>
-              </a:spcAft>
-              <a:defRPr sz="750">
-                <a:solidFill>
-                  <a:srgbClr val="222C38"/>
-                </a:solidFill>
-                <a:latin typeface="Microsoft YaHei"/>
-              </a:defRPr>
-            </a:pPr>
-            <a:r>
-              <a:t>交叉分箱自动寻优</a:t>
-            </a:r>
-          </a:p>
-        </p:txBody>
-      </p:sp>
-      <p:sp>
-        <p:nvSpPr>
-          <p:cNvPr id="89" name="TextBox 80">
-            <a:extLst>
-              <a:ext uri="{FF2B5EF4-FFF2-40B4-BE49-F238E27FC236}">
-                <a16:creationId xmlns:a16="http://schemas.microsoft.com/office/drawing/2014/main" id="{30D2F0BF-545E-4AFF-B36E-8468CD21A0CE}"/>
-              </a:ext>
-            </a:extLst>
-          </p:cNvPr>
-          <p:cNvSpPr txBox="1"/>
-          <p:nvPr/>
-        </p:nvSpPr>
-        <p:spPr>
-          <a:xfrm>
-            <a:off x="8741664" y="5577840"/>
-            <a:ext cx="2359152" cy="576072"/>
-          </a:xfrm>
-          <a:prstGeom prst="rect">
-            <a:avLst/>
-          </a:prstGeom>
-          <a:noFill/>
-        </p:spPr>
-        <p:txBody>
-          <a:bodyPr wrap="square" lIns="0" tIns="0" rIns="0" bIns="0">
-            <a:spAutoFit/>
-          </a:bodyPr>
-          <a:lstStyle/>
-          <a:p>
-            <a:pPr>
-              <a:lnSpc>
-                <a:spcPct val="100000"/>
-              </a:lnSpc>
-              <a:spcAft>
-                <a:spcPts val="100"/>
-              </a:spcAft>
-              <a:defRPr sz="750">
-                <a:solidFill>
-                  <a:srgbClr val="222C38"/>
-                </a:solidFill>
-                <a:latin typeface="Microsoft YaHei"/>
-              </a:defRPr>
-            </a:pPr>
-            <a:r>
-              <a:t>最优额度建议</a:t>
-            </a:r>
-          </a:p>
-          <a:p>
-            <a:pPr>
-              <a:lnSpc>
-                <a:spcPct val="100000"/>
-              </a:lnSpc>
-              <a:spcAft>
-                <a:spcPts val="100"/>
-              </a:spcAft>
-              <a:defRPr sz="750">
-                <a:solidFill>
-                  <a:srgbClr val="222C38"/>
-                </a:solidFill>
-                <a:latin typeface="Microsoft YaHei"/>
-              </a:defRPr>
-            </a:pPr>
-            <a:r>
-              <a:t>承接标签</a:t>
-            </a:r>
-          </a:p>
-          <a:p>
-            <a:pPr>
-              <a:lnSpc>
-                <a:spcPct val="100000"/>
-              </a:lnSpc>
-              <a:spcAft>
-                <a:spcPts val="100"/>
-              </a:spcAft>
-              <a:defRPr sz="750">
-                <a:solidFill>
-                  <a:srgbClr val="222C38"/>
-                </a:solidFill>
-                <a:latin typeface="Microsoft YaHei"/>
-              </a:defRPr>
-            </a:pPr>
-            <a:r>
-              <a:t>通过率 / 风险表现监控</a:t>
+              </a:rPr>
+              <a:t>价值联合额度策略：交叉分箱自动寻优算法</a:t>
             </a:r>
           </a:p>
         </p:txBody>

--- a/模型规划.pptx
+++ b/模型规划.pptx
@@ -6,7 +6,7 @@
     <p:sldMasterId id="2147483660" r:id="rId2"/>
   </p:sldMasterIdLst>
   <p:sldIdLst>
-    <p:sldId id="269" r:id="rId3"/>
+    <p:sldId id="270" r:id="rId3"/>
   </p:sldIdLst>
   <p:sldSz cx="12192000" cy="6858000"/>
   <p:notesSz cx="6858000" cy="9144000"/>
@@ -6833,7 +6833,7 @@
                 <a:ea typeface="微软雅黑"/>
                 <a:cs typeface="+mn-cs"/>
               </a:rPr>
-              <a:t>澳大利亚模型</a:t>
+              <a:t>澳大利亚现状、</a:t>
             </a:r>
             <a:r>
               <a:rPr kumimoji="0" sz="2000" b="1" i="0" u="none" strike="noStrike" kern="1200" cap="none" spc="0" normalizeH="0" baseline="0" noProof="0" dirty="0" err="1">
@@ -6921,9 +6921,46 @@
                 <a:ea typeface="微软雅黑"/>
                 <a:cs typeface="+mn-cs"/>
               </a:rPr>
-              <a:t>规模增长是澳大利亚主要攻坚方向</a:t>
-            </a:r>
-            <a:endParaRPr kumimoji="0" sz="1800" b="0" i="0" u="none" strike="noStrike" kern="1200" cap="none" spc="0" normalizeH="0" baseline="0" noProof="0" dirty="0">
+              <a:t>规模增长</a:t>
+            </a:r>
+            <a:r>
+              <a:rPr kumimoji="0" lang="en-US" altLang="zh-CN" sz="1800" b="0" i="0" u="none" strike="noStrike" kern="1200" cap="none" spc="0" normalizeH="0" baseline="0" noProof="0" dirty="0">
+                <a:ln>
+                  <a:noFill/>
+                </a:ln>
+                <a:solidFill>
+                  <a:srgbClr val="606060"/>
+                </a:solidFill>
+                <a:effectLst/>
+                <a:uLnTx/>
+                <a:uFillTx/>
+                <a:latin typeface="微软雅黑"/>
+                <a:ea typeface="微软雅黑"/>
+                <a:cs typeface="+mn-cs"/>
+              </a:rPr>
+              <a:t>+NON SACC</a:t>
+            </a:r>
+            <a:r>
+              <a:rPr lang="en-US" altLang="zh-CN" dirty="0">
+                <a:solidFill>
+                  <a:srgbClr val="606060"/>
+                </a:solidFill>
+                <a:latin typeface="微软雅黑"/>
+                <a:ea typeface="微软雅黑"/>
+              </a:rPr>
+              <a:t> </a:t>
+            </a:r>
+            <a:r>
+              <a:rPr lang="zh-CN" altLang="en-US" dirty="0">
+                <a:solidFill>
+                  <a:srgbClr val="606060"/>
+                </a:solidFill>
+                <a:latin typeface="微软雅黑"/>
+                <a:ea typeface="微软雅黑"/>
+              </a:rPr>
+              <a:t>占比 风险维稳</a:t>
+            </a:r>
+            <a:endParaRPr kumimoji="0" lang="en-US" altLang="zh-CN" sz="1800" b="0" i="0" u="none" strike="noStrike" kern="1200" cap="none" spc="0" normalizeH="0" baseline="0" noProof="0" dirty="0">
               <a:ln>
                 <a:noFill/>
               </a:ln>
@@ -7022,1016 +7059,20 @@
       </p:sp>
       <p:sp>
         <p:nvSpPr>
-          <p:cNvPr id="30" name="Rectangle 6">
-            <a:extLst>
-              <a:ext uri="{FF2B5EF4-FFF2-40B4-BE49-F238E27FC236}">
-                <a16:creationId xmlns:a16="http://schemas.microsoft.com/office/drawing/2014/main" id="{510EBFBB-1B1C-4F99-BF47-26025A7F4ECB}"/>
-              </a:ext>
-            </a:extLst>
-          </p:cNvPr>
+          <p:cNvPr id="40" name="Rectangle 39"/>
           <p:cNvSpPr/>
           <p:nvPr/>
         </p:nvSpPr>
         <p:spPr>
           <a:xfrm>
-            <a:off x="536448" y="1318568"/>
-            <a:ext cx="2606040" cy="797355"/>
+            <a:off x="539496" y="3008376"/>
+            <a:ext cx="3456432" cy="640080"/>
           </a:xfrm>
           <a:prstGeom prst="rect">
             <a:avLst/>
           </a:prstGeom>
           <a:solidFill>
-            <a:srgbClr val="E3EBF4"/>
-          </a:solidFill>
-          <a:ln>
-            <a:noFill/>
-          </a:ln>
-          <a:effectLst/>
-        </p:spPr>
-        <p:style>
-          <a:lnRef idx="1">
-            <a:schemeClr val="accent1"/>
-          </a:lnRef>
-          <a:fillRef idx="3">
-            <a:schemeClr val="accent1"/>
-          </a:fillRef>
-          <a:effectRef idx="2">
-            <a:schemeClr val="accent1"/>
-          </a:effectRef>
-          <a:fontRef idx="minor">
-            <a:schemeClr val="lt1"/>
-          </a:fontRef>
-        </p:style>
-        <p:txBody>
-          <a:bodyPr wrap="square" lIns="164592" tIns="146304" rIns="128016" bIns="73152" rtlCol="0" anchor="t"/>
-          <a:lstStyle/>
-          <a:p>
-            <a:pPr marL="0" marR="0" lvl="0" indent="0" algn="l" defTabSz="914400" rtl="0" eaLnBrk="1" fontAlgn="auto" latinLnBrk="0" hangingPunct="1">
-              <a:lnSpc>
-                <a:spcPct val="100000"/>
-              </a:lnSpc>
-              <a:spcBef>
-                <a:spcPts val="0"/>
-              </a:spcBef>
-              <a:spcAft>
-                <a:spcPts val="400"/>
-              </a:spcAft>
-              <a:buClrTx/>
-              <a:buSzTx/>
-              <a:buFontTx/>
-              <a:buNone/>
-              <a:tabLst/>
-              <a:defRPr/>
-            </a:pPr>
-            <a:r>
-              <a:rPr kumimoji="0" sz="1050" b="1" i="0" u="none" strike="noStrike" kern="1200" cap="none" spc="0" normalizeH="0" baseline="0" noProof="0" dirty="0" err="1">
-                <a:ln>
-                  <a:noFill/>
-                </a:ln>
-                <a:solidFill>
-                  <a:srgbClr val="0A0A0A"/>
-                </a:solidFill>
-                <a:effectLst/>
-                <a:uLnTx/>
-                <a:uFillTx/>
-                <a:latin typeface="微软雅黑"/>
-                <a:ea typeface="微软雅黑"/>
-                <a:cs typeface="+mn-cs"/>
-              </a:rPr>
-              <a:t>规模</a:t>
-            </a:r>
-            <a:endParaRPr kumimoji="0" sz="1050" b="1" i="0" u="none" strike="noStrike" kern="1200" cap="none" spc="0" normalizeH="0" baseline="0" noProof="0" dirty="0">
-              <a:ln>
-                <a:noFill/>
-              </a:ln>
-              <a:solidFill>
-                <a:srgbClr val="0A0A0A"/>
-              </a:solidFill>
-              <a:effectLst/>
-              <a:uLnTx/>
-              <a:uFillTx/>
-              <a:latin typeface="微软雅黑"/>
-              <a:ea typeface="微软雅黑"/>
-              <a:cs typeface="+mn-cs"/>
-            </a:endParaRPr>
-          </a:p>
-          <a:p>
-            <a:pPr marL="0" marR="0" lvl="0" indent="0" algn="l" defTabSz="914400" rtl="0" eaLnBrk="1" fontAlgn="auto" latinLnBrk="0" hangingPunct="1">
-              <a:lnSpc>
-                <a:spcPct val="100000"/>
-              </a:lnSpc>
-              <a:spcBef>
-                <a:spcPts val="0"/>
-              </a:spcBef>
-              <a:spcAft>
-                <a:spcPts val="400"/>
-              </a:spcAft>
-              <a:buClrTx/>
-              <a:buSzTx/>
-              <a:buFontTx/>
-              <a:buNone/>
-              <a:tabLst/>
-              <a:defRPr/>
-            </a:pPr>
-            <a:r>
-              <a:rPr kumimoji="0" sz="1300" b="1" i="0" u="none" strike="noStrike" kern="1200" cap="none" spc="0" normalizeH="0" baseline="0" noProof="0" dirty="0" err="1">
-                <a:ln>
-                  <a:noFill/>
-                </a:ln>
-                <a:solidFill>
-                  <a:srgbClr val="1F4E79"/>
-                </a:solidFill>
-                <a:effectLst/>
-                <a:uLnTx/>
-                <a:uFillTx/>
-                <a:latin typeface="微软雅黑"/>
-                <a:ea typeface="微软雅黑"/>
-                <a:cs typeface="+mn-cs"/>
-              </a:rPr>
-              <a:t>支撑放款增长</a:t>
-            </a:r>
-            <a:endParaRPr kumimoji="0" sz="1300" b="1" i="0" u="none" strike="noStrike" kern="1200" cap="none" spc="0" normalizeH="0" baseline="0" noProof="0" dirty="0">
-              <a:ln>
-                <a:noFill/>
-              </a:ln>
-              <a:solidFill>
-                <a:srgbClr val="1F4E79"/>
-              </a:solidFill>
-              <a:effectLst/>
-              <a:uLnTx/>
-              <a:uFillTx/>
-              <a:latin typeface="微软雅黑"/>
-              <a:ea typeface="微软雅黑"/>
-              <a:cs typeface="+mn-cs"/>
-            </a:endParaRPr>
-          </a:p>
-          <a:p>
-            <a:pPr marL="0" marR="0" lvl="0" indent="0" algn="l" defTabSz="914400" rtl="0" eaLnBrk="1" fontAlgn="auto" latinLnBrk="0" hangingPunct="1">
-              <a:lnSpc>
-                <a:spcPct val="100000"/>
-              </a:lnSpc>
-              <a:spcBef>
-                <a:spcPts val="0"/>
-              </a:spcBef>
-              <a:spcAft>
-                <a:spcPts val="0"/>
-              </a:spcAft>
-              <a:buClrTx/>
-              <a:buSzTx/>
-              <a:buFontTx/>
-              <a:buNone/>
-              <a:tabLst/>
-              <a:defRPr/>
-            </a:pPr>
-            <a:r>
-              <a:rPr kumimoji="0" sz="850" b="0" i="0" u="none" strike="noStrike" kern="1200" cap="none" spc="0" normalizeH="0" baseline="0" noProof="0" dirty="0" err="1">
-                <a:ln>
-                  <a:noFill/>
-                </a:ln>
-                <a:solidFill>
-                  <a:srgbClr val="3D3C3A"/>
-                </a:solidFill>
-                <a:effectLst/>
-                <a:uLnTx/>
-                <a:uFillTx/>
-                <a:latin typeface="微软雅黑"/>
-                <a:ea typeface="微软雅黑"/>
-                <a:cs typeface="+mn-cs"/>
-              </a:rPr>
-              <a:t>拓展</a:t>
-            </a:r>
-            <a:r>
-              <a:rPr kumimoji="0" sz="850" b="0" i="0" u="none" strike="noStrike" kern="1200" cap="none" spc="0" normalizeH="0" baseline="0" noProof="0" dirty="0">
-                <a:ln>
-                  <a:noFill/>
-                </a:ln>
-                <a:solidFill>
-                  <a:srgbClr val="3D3C3A"/>
-                </a:solidFill>
-                <a:effectLst/>
-                <a:uLnTx/>
-                <a:uFillTx/>
-                <a:latin typeface="微软雅黑"/>
-                <a:ea typeface="微软雅黑"/>
-                <a:cs typeface="+mn-cs"/>
-              </a:rPr>
-              <a:t> </a:t>
-            </a:r>
-            <a:r>
-              <a:rPr kumimoji="0" sz="850" b="0" i="0" u="none" strike="noStrike" kern="1200" cap="none" spc="0" normalizeH="0" baseline="0" noProof="0" dirty="0" err="1">
-                <a:ln>
-                  <a:noFill/>
-                </a:ln>
-                <a:solidFill>
-                  <a:srgbClr val="3D3C3A"/>
-                </a:solidFill>
-                <a:effectLst/>
-                <a:uLnTx/>
-                <a:uFillTx/>
-                <a:latin typeface="微软雅黑"/>
-                <a:ea typeface="微软雅黑"/>
-                <a:cs typeface="+mn-cs"/>
-              </a:rPr>
-              <a:t>APP、新渠道与复贷</a:t>
-            </a:r>
-            <a:endParaRPr kumimoji="0" sz="850" b="0" i="0" u="none" strike="noStrike" kern="1200" cap="none" spc="0" normalizeH="0" baseline="0" noProof="0" dirty="0">
-              <a:ln>
-                <a:noFill/>
-              </a:ln>
-              <a:solidFill>
-                <a:srgbClr val="3D3C3A"/>
-              </a:solidFill>
-              <a:effectLst/>
-              <a:uLnTx/>
-              <a:uFillTx/>
-              <a:latin typeface="微软雅黑"/>
-              <a:ea typeface="微软雅黑"/>
-              <a:cs typeface="+mn-cs"/>
-            </a:endParaRPr>
-          </a:p>
-        </p:txBody>
-      </p:sp>
-      <p:sp>
-        <p:nvSpPr>
-          <p:cNvPr id="31" name="Rectangle 7">
-            <a:extLst>
-              <a:ext uri="{FF2B5EF4-FFF2-40B4-BE49-F238E27FC236}">
-                <a16:creationId xmlns:a16="http://schemas.microsoft.com/office/drawing/2014/main" id="{F0BA8FA2-9E35-45A6-97D7-B0D6911D26FA}"/>
-              </a:ext>
-            </a:extLst>
-          </p:cNvPr>
-          <p:cNvSpPr/>
-          <p:nvPr/>
-        </p:nvSpPr>
-        <p:spPr>
-          <a:xfrm>
-            <a:off x="536448" y="1318568"/>
-            <a:ext cx="2606040" cy="54864"/>
-          </a:xfrm>
-          <a:prstGeom prst="rect">
-            <a:avLst/>
-          </a:prstGeom>
-          <a:solidFill>
-            <a:srgbClr val="1F4E79"/>
-          </a:solidFill>
-          <a:ln>
-            <a:noFill/>
-          </a:ln>
-          <a:effectLst/>
-        </p:spPr>
-        <p:style>
-          <a:lnRef idx="1">
-            <a:schemeClr val="accent1"/>
-          </a:lnRef>
-          <a:fillRef idx="3">
-            <a:schemeClr val="accent1"/>
-          </a:fillRef>
-          <a:effectRef idx="2">
-            <a:schemeClr val="accent1"/>
-          </a:effectRef>
-          <a:fontRef idx="minor">
-            <a:schemeClr val="lt1"/>
-          </a:fontRef>
-        </p:style>
-        <p:txBody>
-          <a:bodyPr rtlCol="0" anchor="ctr"/>
-          <a:lstStyle/>
-          <a:p>
-            <a:pPr marL="0" marR="0" lvl="0" indent="0" algn="ctr" defTabSz="914400" rtl="0" eaLnBrk="1" fontAlgn="auto" latinLnBrk="0" hangingPunct="1">
-              <a:lnSpc>
-                <a:spcPct val="100000"/>
-              </a:lnSpc>
-              <a:spcBef>
-                <a:spcPts val="0"/>
-              </a:spcBef>
-              <a:spcAft>
-                <a:spcPts val="0"/>
-              </a:spcAft>
-              <a:buClrTx/>
-              <a:buSzTx/>
-              <a:buFontTx/>
-              <a:buNone/>
-              <a:tabLst/>
-              <a:defRPr/>
-            </a:pPr>
-            <a:endParaRPr kumimoji="0" sz="1800" b="0" i="0" u="none" strike="noStrike" kern="1200" cap="none" spc="0" normalizeH="0" baseline="0" noProof="0">
-              <a:ln>
-                <a:noFill/>
-              </a:ln>
-              <a:solidFill>
-                <a:prstClr val="white"/>
-              </a:solidFill>
-              <a:effectLst/>
-              <a:uLnTx/>
-              <a:uFillTx/>
-              <a:latin typeface="等线" panose="020F0502020204030204"/>
-              <a:ea typeface="+mn-ea"/>
-              <a:cs typeface="+mn-cs"/>
-            </a:endParaRPr>
-          </a:p>
-        </p:txBody>
-      </p:sp>
-      <p:sp>
-        <p:nvSpPr>
-          <p:cNvPr id="32" name="Rectangle 8">
-            <a:extLst>
-              <a:ext uri="{FF2B5EF4-FFF2-40B4-BE49-F238E27FC236}">
-                <a16:creationId xmlns:a16="http://schemas.microsoft.com/office/drawing/2014/main" id="{F8EDA392-21A4-4601-83BD-7648A8867E9C}"/>
-              </a:ext>
-            </a:extLst>
-          </p:cNvPr>
-          <p:cNvSpPr/>
-          <p:nvPr/>
-        </p:nvSpPr>
-        <p:spPr>
-          <a:xfrm>
-            <a:off x="3316224" y="1318568"/>
-            <a:ext cx="2606040" cy="797355"/>
-          </a:xfrm>
-          <a:prstGeom prst="rect">
-            <a:avLst/>
-          </a:prstGeom>
-          <a:solidFill>
-            <a:srgbClr val="E3EBF4"/>
-          </a:solidFill>
-          <a:ln>
-            <a:noFill/>
-          </a:ln>
-          <a:effectLst/>
-        </p:spPr>
-        <p:style>
-          <a:lnRef idx="1">
-            <a:schemeClr val="accent1"/>
-          </a:lnRef>
-          <a:fillRef idx="3">
-            <a:schemeClr val="accent1"/>
-          </a:fillRef>
-          <a:effectRef idx="2">
-            <a:schemeClr val="accent1"/>
-          </a:effectRef>
-          <a:fontRef idx="minor">
-            <a:schemeClr val="lt1"/>
-          </a:fontRef>
-        </p:style>
-        <p:txBody>
-          <a:bodyPr wrap="square" lIns="164592" tIns="146304" rIns="128016" bIns="73152" rtlCol="0" anchor="t"/>
-          <a:lstStyle/>
-          <a:p>
-            <a:pPr marL="0" marR="0" lvl="0" indent="0" algn="l" defTabSz="914400" rtl="0" eaLnBrk="1" fontAlgn="auto" latinLnBrk="0" hangingPunct="1">
-              <a:lnSpc>
-                <a:spcPct val="100000"/>
-              </a:lnSpc>
-              <a:spcBef>
-                <a:spcPts val="0"/>
-              </a:spcBef>
-              <a:spcAft>
-                <a:spcPts val="400"/>
-              </a:spcAft>
-              <a:buClrTx/>
-              <a:buSzTx/>
-              <a:buFontTx/>
-              <a:buNone/>
-              <a:tabLst/>
-              <a:defRPr/>
-            </a:pPr>
-            <a:r>
-              <a:rPr kumimoji="0" sz="1050" b="1" i="0" u="none" strike="noStrike" kern="1200" cap="none" spc="0" normalizeH="0" baseline="0" noProof="0">
-                <a:ln>
-                  <a:noFill/>
-                </a:ln>
-                <a:solidFill>
-                  <a:srgbClr val="0A0A0A"/>
-                </a:solidFill>
-                <a:effectLst/>
-                <a:uLnTx/>
-                <a:uFillTx/>
-                <a:latin typeface="微软雅黑"/>
-                <a:ea typeface="微软雅黑"/>
-                <a:cs typeface="+mn-cs"/>
-              </a:rPr>
-              <a:t>结构</a:t>
-            </a:r>
-          </a:p>
-          <a:p>
-            <a:pPr marL="0" marR="0" lvl="0" indent="0" algn="l" defTabSz="914400" rtl="0" eaLnBrk="1" fontAlgn="auto" latinLnBrk="0" hangingPunct="1">
-              <a:lnSpc>
-                <a:spcPct val="100000"/>
-              </a:lnSpc>
-              <a:spcBef>
-                <a:spcPts val="0"/>
-              </a:spcBef>
-              <a:spcAft>
-                <a:spcPts val="400"/>
-              </a:spcAft>
-              <a:buClrTx/>
-              <a:buSzTx/>
-              <a:buFontTx/>
-              <a:buNone/>
-              <a:tabLst/>
-              <a:defRPr/>
-            </a:pPr>
-            <a:r>
-              <a:rPr kumimoji="0" sz="1300" b="1" i="0" u="none" strike="noStrike" kern="1200" cap="none" spc="0" normalizeH="0" baseline="0" noProof="0">
-                <a:ln>
-                  <a:noFill/>
-                </a:ln>
-                <a:solidFill>
-                  <a:srgbClr val="1F4E79"/>
-                </a:solidFill>
-                <a:effectLst/>
-                <a:uLnTx/>
-                <a:uFillTx/>
-                <a:latin typeface="微软雅黑"/>
-                <a:ea typeface="微软雅黑"/>
-                <a:cs typeface="+mn-cs"/>
-              </a:rPr>
-              <a:t>NON SAAC 全年 ≥ 40%</a:t>
-            </a:r>
-          </a:p>
-          <a:p>
-            <a:pPr marL="0" marR="0" lvl="0" indent="0" algn="l" defTabSz="914400" rtl="0" eaLnBrk="1" fontAlgn="auto" latinLnBrk="0" hangingPunct="1">
-              <a:lnSpc>
-                <a:spcPct val="100000"/>
-              </a:lnSpc>
-              <a:spcBef>
-                <a:spcPts val="0"/>
-              </a:spcBef>
-              <a:spcAft>
-                <a:spcPts val="0"/>
-              </a:spcAft>
-              <a:buClrTx/>
-              <a:buSzTx/>
-              <a:buFontTx/>
-              <a:buNone/>
-              <a:tabLst/>
-              <a:defRPr/>
-            </a:pPr>
-            <a:r>
-              <a:rPr kumimoji="0" sz="850" b="0" i="0" u="none" strike="noStrike" kern="1200" cap="none" spc="0" normalizeH="0" baseline="0" noProof="0">
-                <a:ln>
-                  <a:noFill/>
-                </a:ln>
-                <a:solidFill>
-                  <a:srgbClr val="3D3C3A"/>
-                </a:solidFill>
-                <a:effectLst/>
-                <a:uLnTx/>
-                <a:uFillTx/>
-                <a:latin typeface="微软雅黑"/>
-                <a:ea typeface="微软雅黑"/>
-                <a:cs typeface="+mn-cs"/>
-              </a:rPr>
-              <a:t>非 SACC 产品占比目标</a:t>
-            </a:r>
-          </a:p>
-        </p:txBody>
-      </p:sp>
-      <p:sp>
-        <p:nvSpPr>
-          <p:cNvPr id="33" name="Rectangle 9">
-            <a:extLst>
-              <a:ext uri="{FF2B5EF4-FFF2-40B4-BE49-F238E27FC236}">
-                <a16:creationId xmlns:a16="http://schemas.microsoft.com/office/drawing/2014/main" id="{91C721E9-9525-4837-80AC-EE951D015B5F}"/>
-              </a:ext>
-            </a:extLst>
-          </p:cNvPr>
-          <p:cNvSpPr/>
-          <p:nvPr/>
-        </p:nvSpPr>
-        <p:spPr>
-          <a:xfrm>
-            <a:off x="3316224" y="1318568"/>
-            <a:ext cx="2606040" cy="54864"/>
-          </a:xfrm>
-          <a:prstGeom prst="rect">
-            <a:avLst/>
-          </a:prstGeom>
-          <a:solidFill>
-            <a:srgbClr val="1F4E79"/>
-          </a:solidFill>
-          <a:ln>
-            <a:noFill/>
-          </a:ln>
-          <a:effectLst/>
-        </p:spPr>
-        <p:style>
-          <a:lnRef idx="1">
-            <a:schemeClr val="accent1"/>
-          </a:lnRef>
-          <a:fillRef idx="3">
-            <a:schemeClr val="accent1"/>
-          </a:fillRef>
-          <a:effectRef idx="2">
-            <a:schemeClr val="accent1"/>
-          </a:effectRef>
-          <a:fontRef idx="minor">
-            <a:schemeClr val="lt1"/>
-          </a:fontRef>
-        </p:style>
-        <p:txBody>
-          <a:bodyPr rtlCol="0" anchor="ctr"/>
-          <a:lstStyle/>
-          <a:p>
-            <a:pPr marL="0" marR="0" lvl="0" indent="0" algn="ctr" defTabSz="914400" rtl="0" eaLnBrk="1" fontAlgn="auto" latinLnBrk="0" hangingPunct="1">
-              <a:lnSpc>
-                <a:spcPct val="100000"/>
-              </a:lnSpc>
-              <a:spcBef>
-                <a:spcPts val="0"/>
-              </a:spcBef>
-              <a:spcAft>
-                <a:spcPts val="0"/>
-              </a:spcAft>
-              <a:buClrTx/>
-              <a:buSzTx/>
-              <a:buFontTx/>
-              <a:buNone/>
-              <a:tabLst/>
-              <a:defRPr/>
-            </a:pPr>
-            <a:endParaRPr kumimoji="0" sz="1800" b="0" i="0" u="none" strike="noStrike" kern="1200" cap="none" spc="0" normalizeH="0" baseline="0" noProof="0">
-              <a:ln>
-                <a:noFill/>
-              </a:ln>
-              <a:solidFill>
-                <a:prstClr val="white"/>
-              </a:solidFill>
-              <a:effectLst/>
-              <a:uLnTx/>
-              <a:uFillTx/>
-              <a:latin typeface="等线" panose="020F0502020204030204"/>
-              <a:ea typeface="+mn-ea"/>
-              <a:cs typeface="+mn-cs"/>
-            </a:endParaRPr>
-          </a:p>
-        </p:txBody>
-      </p:sp>
-      <p:sp>
-        <p:nvSpPr>
-          <p:cNvPr id="34" name="Rectangle 10">
-            <a:extLst>
-              <a:ext uri="{FF2B5EF4-FFF2-40B4-BE49-F238E27FC236}">
-                <a16:creationId xmlns:a16="http://schemas.microsoft.com/office/drawing/2014/main" id="{F9C4BBD0-D667-41FB-9E38-00FF6E3B9A39}"/>
-              </a:ext>
-            </a:extLst>
-          </p:cNvPr>
-          <p:cNvSpPr/>
-          <p:nvPr/>
-        </p:nvSpPr>
-        <p:spPr>
-          <a:xfrm>
-            <a:off x="6096000" y="1318568"/>
-            <a:ext cx="2606040" cy="797355"/>
-          </a:xfrm>
-          <a:prstGeom prst="rect">
-            <a:avLst/>
-          </a:prstGeom>
-          <a:solidFill>
-            <a:srgbClr val="E3EBF4"/>
-          </a:solidFill>
-          <a:ln>
-            <a:noFill/>
-          </a:ln>
-          <a:effectLst/>
-        </p:spPr>
-        <p:style>
-          <a:lnRef idx="1">
-            <a:schemeClr val="accent1"/>
-          </a:lnRef>
-          <a:fillRef idx="3">
-            <a:schemeClr val="accent1"/>
-          </a:fillRef>
-          <a:effectRef idx="2">
-            <a:schemeClr val="accent1"/>
-          </a:effectRef>
-          <a:fontRef idx="minor">
-            <a:schemeClr val="lt1"/>
-          </a:fontRef>
-        </p:style>
-        <p:txBody>
-          <a:bodyPr wrap="square" lIns="164592" tIns="146304" rIns="128016" bIns="73152" rtlCol="0" anchor="t"/>
-          <a:lstStyle/>
-          <a:p>
-            <a:pPr marL="0" marR="0" lvl="0" indent="0" algn="l" defTabSz="914400" rtl="0" eaLnBrk="1" fontAlgn="auto" latinLnBrk="0" hangingPunct="1">
-              <a:lnSpc>
-                <a:spcPct val="100000"/>
-              </a:lnSpc>
-              <a:spcBef>
-                <a:spcPts val="0"/>
-              </a:spcBef>
-              <a:spcAft>
-                <a:spcPts val="400"/>
-              </a:spcAft>
-              <a:buClrTx/>
-              <a:buSzTx/>
-              <a:buFontTx/>
-              <a:buNone/>
-              <a:tabLst/>
-              <a:defRPr/>
-            </a:pPr>
-            <a:r>
-              <a:rPr kumimoji="0" sz="1050" b="1" i="0" u="none" strike="noStrike" kern="1200" cap="none" spc="0" normalizeH="0" baseline="0" noProof="0">
-                <a:ln>
-                  <a:noFill/>
-                </a:ln>
-                <a:solidFill>
-                  <a:srgbClr val="0A0A0A"/>
-                </a:solidFill>
-                <a:effectLst/>
-                <a:uLnTx/>
-                <a:uFillTx/>
-                <a:latin typeface="微软雅黑"/>
-                <a:ea typeface="微软雅黑"/>
-                <a:cs typeface="+mn-cs"/>
-              </a:rPr>
-              <a:t>质量</a:t>
-            </a:r>
-          </a:p>
-          <a:p>
-            <a:pPr marL="0" marR="0" lvl="0" indent="0" algn="l" defTabSz="914400" rtl="0" eaLnBrk="1" fontAlgn="auto" latinLnBrk="0" hangingPunct="1">
-              <a:lnSpc>
-                <a:spcPct val="100000"/>
-              </a:lnSpc>
-              <a:spcBef>
-                <a:spcPts val="0"/>
-              </a:spcBef>
-              <a:spcAft>
-                <a:spcPts val="400"/>
-              </a:spcAft>
-              <a:buClrTx/>
-              <a:buSzTx/>
-              <a:buFontTx/>
-              <a:buNone/>
-              <a:tabLst/>
-              <a:defRPr/>
-            </a:pPr>
-            <a:r>
-              <a:rPr kumimoji="0" sz="1300" b="1" i="0" u="none" strike="noStrike" kern="1200" cap="none" spc="0" normalizeH="0" baseline="0" noProof="0">
-                <a:ln>
-                  <a:noFill/>
-                </a:ln>
-                <a:solidFill>
-                  <a:srgbClr val="1F4E79"/>
-                </a:solidFill>
-                <a:effectLst/>
-                <a:uLnTx/>
-                <a:uFillTx/>
-                <a:latin typeface="微软雅黑"/>
-                <a:ea typeface="微软雅黑"/>
-                <a:cs typeface="+mn-cs"/>
-              </a:rPr>
-              <a:t>风险表现控制在 7.1%</a:t>
-            </a:r>
-          </a:p>
-          <a:p>
-            <a:pPr marL="0" marR="0" lvl="0" indent="0" algn="l" defTabSz="914400" rtl="0" eaLnBrk="1" fontAlgn="auto" latinLnBrk="0" hangingPunct="1">
-              <a:lnSpc>
-                <a:spcPct val="100000"/>
-              </a:lnSpc>
-              <a:spcBef>
-                <a:spcPts val="0"/>
-              </a:spcBef>
-              <a:spcAft>
-                <a:spcPts val="0"/>
-              </a:spcAft>
-              <a:buClrTx/>
-              <a:buSzTx/>
-              <a:buFontTx/>
-              <a:buNone/>
-              <a:tabLst/>
-              <a:defRPr/>
-            </a:pPr>
-            <a:r>
-              <a:rPr kumimoji="0" sz="850" b="0" i="0" u="none" strike="noStrike" kern="1200" cap="none" spc="0" normalizeH="0" baseline="0" noProof="0">
-                <a:ln>
-                  <a:noFill/>
-                </a:ln>
-                <a:solidFill>
-                  <a:srgbClr val="3D3C3A"/>
-                </a:solidFill>
-                <a:effectLst/>
-                <a:uLnTx/>
-                <a:uFillTx/>
-                <a:latin typeface="微软雅黑"/>
-                <a:ea typeface="微软雅黑"/>
-                <a:cs typeface="+mn-cs"/>
-              </a:rPr>
-              <a:t>整体风险水平控制</a:t>
-            </a:r>
-          </a:p>
-        </p:txBody>
-      </p:sp>
-      <p:sp>
-        <p:nvSpPr>
-          <p:cNvPr id="35" name="Rectangle 11">
-            <a:extLst>
-              <a:ext uri="{FF2B5EF4-FFF2-40B4-BE49-F238E27FC236}">
-                <a16:creationId xmlns:a16="http://schemas.microsoft.com/office/drawing/2014/main" id="{EAD6DDF1-0916-4EEF-8442-C17638240FCC}"/>
-              </a:ext>
-            </a:extLst>
-          </p:cNvPr>
-          <p:cNvSpPr/>
-          <p:nvPr/>
-        </p:nvSpPr>
-        <p:spPr>
-          <a:xfrm>
-            <a:off x="6096000" y="1318568"/>
-            <a:ext cx="2606040" cy="54864"/>
-          </a:xfrm>
-          <a:prstGeom prst="rect">
-            <a:avLst/>
-          </a:prstGeom>
-          <a:solidFill>
-            <a:srgbClr val="1F4E79"/>
-          </a:solidFill>
-          <a:ln>
-            <a:noFill/>
-          </a:ln>
-          <a:effectLst/>
-        </p:spPr>
-        <p:style>
-          <a:lnRef idx="1">
-            <a:schemeClr val="accent1"/>
-          </a:lnRef>
-          <a:fillRef idx="3">
-            <a:schemeClr val="accent1"/>
-          </a:fillRef>
-          <a:effectRef idx="2">
-            <a:schemeClr val="accent1"/>
-          </a:effectRef>
-          <a:fontRef idx="minor">
-            <a:schemeClr val="lt1"/>
-          </a:fontRef>
-        </p:style>
-        <p:txBody>
-          <a:bodyPr rtlCol="0" anchor="ctr"/>
-          <a:lstStyle/>
-          <a:p>
-            <a:pPr marL="0" marR="0" lvl="0" indent="0" algn="ctr" defTabSz="914400" rtl="0" eaLnBrk="1" fontAlgn="auto" latinLnBrk="0" hangingPunct="1">
-              <a:lnSpc>
-                <a:spcPct val="100000"/>
-              </a:lnSpc>
-              <a:spcBef>
-                <a:spcPts val="0"/>
-              </a:spcBef>
-              <a:spcAft>
-                <a:spcPts val="0"/>
-              </a:spcAft>
-              <a:buClrTx/>
-              <a:buSzTx/>
-              <a:buFontTx/>
-              <a:buNone/>
-              <a:tabLst/>
-              <a:defRPr/>
-            </a:pPr>
-            <a:endParaRPr kumimoji="0" sz="1800" b="0" i="0" u="none" strike="noStrike" kern="1200" cap="none" spc="0" normalizeH="0" baseline="0" noProof="0">
-              <a:ln>
-                <a:noFill/>
-              </a:ln>
-              <a:solidFill>
-                <a:prstClr val="white"/>
-              </a:solidFill>
-              <a:effectLst/>
-              <a:uLnTx/>
-              <a:uFillTx/>
-              <a:latin typeface="等线" panose="020F0502020204030204"/>
-              <a:ea typeface="+mn-ea"/>
-              <a:cs typeface="+mn-cs"/>
-            </a:endParaRPr>
-          </a:p>
-        </p:txBody>
-      </p:sp>
-      <p:sp>
-        <p:nvSpPr>
-          <p:cNvPr id="36" name="Rectangle 14">
-            <a:extLst>
-              <a:ext uri="{FF2B5EF4-FFF2-40B4-BE49-F238E27FC236}">
-                <a16:creationId xmlns:a16="http://schemas.microsoft.com/office/drawing/2014/main" id="{B822F64B-3C9E-4E3F-A42D-9F1BB3937C1D}"/>
-              </a:ext>
-            </a:extLst>
-          </p:cNvPr>
-          <p:cNvSpPr/>
-          <p:nvPr/>
-        </p:nvSpPr>
-        <p:spPr>
-          <a:xfrm>
-            <a:off x="536448" y="2277868"/>
-            <a:ext cx="64008" cy="201168"/>
-          </a:xfrm>
-          <a:prstGeom prst="rect">
-            <a:avLst/>
-          </a:prstGeom>
-          <a:solidFill>
-            <a:srgbClr val="D6A000"/>
-          </a:solidFill>
-          <a:ln>
-            <a:noFill/>
-          </a:ln>
-          <a:effectLst/>
-        </p:spPr>
-        <p:style>
-          <a:lnRef idx="1">
-            <a:schemeClr val="accent1"/>
-          </a:lnRef>
-          <a:fillRef idx="3">
-            <a:schemeClr val="accent1"/>
-          </a:fillRef>
-          <a:effectRef idx="2">
-            <a:schemeClr val="accent1"/>
-          </a:effectRef>
-          <a:fontRef idx="minor">
-            <a:schemeClr val="lt1"/>
-          </a:fontRef>
-        </p:style>
-        <p:txBody>
-          <a:bodyPr rtlCol="0" anchor="ctr"/>
-          <a:lstStyle/>
-          <a:p>
-            <a:pPr marL="0" marR="0" lvl="0" indent="0" algn="ctr" defTabSz="914400" rtl="0" eaLnBrk="1" fontAlgn="auto" latinLnBrk="0" hangingPunct="1">
-              <a:lnSpc>
-                <a:spcPct val="100000"/>
-              </a:lnSpc>
-              <a:spcBef>
-                <a:spcPts val="0"/>
-              </a:spcBef>
-              <a:spcAft>
-                <a:spcPts val="0"/>
-              </a:spcAft>
-              <a:buClrTx/>
-              <a:buSzTx/>
-              <a:buFontTx/>
-              <a:buNone/>
-              <a:tabLst/>
-              <a:defRPr/>
-            </a:pPr>
-            <a:endParaRPr kumimoji="0" sz="1800" b="0" i="0" u="none" strike="noStrike" kern="1200" cap="none" spc="0" normalizeH="0" baseline="0" noProof="0">
-              <a:ln>
-                <a:noFill/>
-              </a:ln>
-              <a:solidFill>
-                <a:prstClr val="white"/>
-              </a:solidFill>
-              <a:effectLst/>
-              <a:uLnTx/>
-              <a:uFillTx/>
-              <a:latin typeface="等线" panose="020F0502020204030204"/>
-              <a:ea typeface="+mn-ea"/>
-              <a:cs typeface="+mn-cs"/>
-            </a:endParaRPr>
-          </a:p>
-        </p:txBody>
-      </p:sp>
-      <p:sp>
-        <p:nvSpPr>
-          <p:cNvPr id="37" name="TextBox 15">
-            <a:extLst>
-              <a:ext uri="{FF2B5EF4-FFF2-40B4-BE49-F238E27FC236}">
-                <a16:creationId xmlns:a16="http://schemas.microsoft.com/office/drawing/2014/main" id="{213463EE-99E6-43B7-B888-E8C4692F59C9}"/>
-              </a:ext>
-            </a:extLst>
-          </p:cNvPr>
-          <p:cNvSpPr txBox="1"/>
-          <p:nvPr/>
-        </p:nvSpPr>
-        <p:spPr>
-          <a:xfrm>
-            <a:off x="664464" y="2278498"/>
-            <a:ext cx="8229600" cy="274320"/>
-          </a:xfrm>
-          <a:prstGeom prst="rect">
-            <a:avLst/>
-          </a:prstGeom>
-          <a:noFill/>
-        </p:spPr>
-        <p:txBody>
-          <a:bodyPr wrap="square" lIns="0" tIns="0" rIns="0" bIns="0" anchor="t"/>
-          <a:lstStyle/>
-          <a:p>
-            <a:pPr marL="0" marR="0" lvl="0" indent="0" algn="l" defTabSz="914400" rtl="0" eaLnBrk="1" fontAlgn="auto" latinLnBrk="0" hangingPunct="1">
-              <a:lnSpc>
-                <a:spcPct val="100000"/>
-              </a:lnSpc>
-              <a:spcBef>
-                <a:spcPts val="0"/>
-              </a:spcBef>
-              <a:spcAft>
-                <a:spcPts val="0"/>
-              </a:spcAft>
-              <a:buClrTx/>
-              <a:buSzTx/>
-              <a:buFontTx/>
-              <a:buNone/>
-              <a:tabLst/>
-              <a:defRPr/>
-            </a:pPr>
-            <a:r>
-              <a:rPr kumimoji="0" sz="1200" b="1" i="0" u="none" strike="noStrike" kern="1200" cap="none" spc="0" normalizeH="0" baseline="0" noProof="0" dirty="0" err="1">
-                <a:ln>
-                  <a:noFill/>
-                </a:ln>
-                <a:solidFill>
-                  <a:srgbClr val="0A0A0A"/>
-                </a:solidFill>
-                <a:effectLst/>
-                <a:uLnTx/>
-                <a:uFillTx/>
-                <a:latin typeface="微软雅黑"/>
-                <a:ea typeface="微软雅黑"/>
-                <a:cs typeface="+mn-cs"/>
-              </a:rPr>
-              <a:t>四大领域:共享同一分层体系</a:t>
-            </a:r>
-            <a:endParaRPr kumimoji="0" sz="1200" b="1" i="0" u="none" strike="noStrike" kern="1200" cap="none" spc="0" normalizeH="0" baseline="0" noProof="0" dirty="0">
-              <a:ln>
-                <a:noFill/>
-              </a:ln>
-              <a:solidFill>
-                <a:srgbClr val="0A0A0A"/>
-              </a:solidFill>
-              <a:effectLst/>
-              <a:uLnTx/>
-              <a:uFillTx/>
-              <a:latin typeface="微软雅黑"/>
-              <a:ea typeface="微软雅黑"/>
-              <a:cs typeface="+mn-cs"/>
-            </a:endParaRPr>
-          </a:p>
-        </p:txBody>
-      </p:sp>
-      <p:sp>
-        <p:nvSpPr>
-          <p:cNvPr id="38" name="Rectangle 29">
-            <a:extLst>
-              <a:ext uri="{FF2B5EF4-FFF2-40B4-BE49-F238E27FC236}">
-                <a16:creationId xmlns:a16="http://schemas.microsoft.com/office/drawing/2014/main" id="{A7D0FAC6-5336-4DCD-BB21-14B6C0D5DDC3}"/>
-              </a:ext>
-            </a:extLst>
-          </p:cNvPr>
-          <p:cNvSpPr/>
-          <p:nvPr/>
-        </p:nvSpPr>
-        <p:spPr>
-          <a:xfrm>
-            <a:off x="530352" y="2697480"/>
-            <a:ext cx="5321808" cy="1609344"/>
-          </a:xfrm>
-          <a:prstGeom prst="rect">
-            <a:avLst/>
-          </a:prstGeom>
-          <a:solidFill>
-            <a:srgbClr val="FFFFFF"/>
-          </a:solidFill>
-          <a:ln w="7620">
-            <a:solidFill>
-              <a:srgbClr val="D6DBE1"/>
-            </a:solidFill>
-          </a:ln>
-        </p:spPr>
-        <p:style>
-          <a:lnRef idx="1">
-            <a:schemeClr val="accent1"/>
-          </a:lnRef>
-          <a:fillRef idx="3">
-            <a:schemeClr val="accent1"/>
-          </a:fillRef>
-          <a:effectRef idx="2">
-            <a:schemeClr val="accent1"/>
-          </a:effectRef>
-          <a:fontRef idx="minor">
-            <a:schemeClr val="lt1"/>
-          </a:fontRef>
-        </p:style>
-        <p:txBody>
-          <a:bodyPr rtlCol="0" anchor="ctr"/>
-          <a:lstStyle/>
-          <a:p>
-            <a:pPr algn="ctr"/>
-            <a:endParaRPr/>
-          </a:p>
-        </p:txBody>
-      </p:sp>
-      <p:sp>
-        <p:nvSpPr>
-          <p:cNvPr id="39" name="Rectangle 30">
-            <a:extLst>
-              <a:ext uri="{FF2B5EF4-FFF2-40B4-BE49-F238E27FC236}">
-                <a16:creationId xmlns:a16="http://schemas.microsoft.com/office/drawing/2014/main" id="{9CC17D52-E32F-405C-8710-1AFA7E4D069B}"/>
-              </a:ext>
-            </a:extLst>
-          </p:cNvPr>
-          <p:cNvSpPr/>
-          <p:nvPr/>
-        </p:nvSpPr>
-        <p:spPr>
-          <a:xfrm>
-            <a:off x="530352" y="2697480"/>
-            <a:ext cx="5321808" cy="50292"/>
-          </a:xfrm>
-          <a:prstGeom prst="rect">
-            <a:avLst/>
-          </a:prstGeom>
-          <a:solidFill>
-            <a:srgbClr val="0C3658"/>
+            <a:srgbClr val="FBFCFE"/>
           </a:solidFill>
           <a:ln>
             <a:noFill/>
@@ -8055,77 +7096,50 @@
           <a:bodyPr rtlCol="0" anchor="ctr"/>
           <a:lstStyle/>
           <a:p>
-            <a:pPr algn="ctr"/>
-            <a:endParaRPr/>
-          </a:p>
-        </p:txBody>
-      </p:sp>
-      <p:sp>
-        <p:nvSpPr>
-          <p:cNvPr id="40" name="Rectangle 31">
-            <a:extLst>
-              <a:ext uri="{FF2B5EF4-FFF2-40B4-BE49-F238E27FC236}">
-                <a16:creationId xmlns:a16="http://schemas.microsoft.com/office/drawing/2014/main" id="{5EC7364D-30D5-4698-8D79-197391F6DD78}"/>
-              </a:ext>
-            </a:extLst>
-          </p:cNvPr>
-          <p:cNvSpPr/>
+            <a:pPr marL="0" marR="0" lvl="0" indent="0" algn="ctr" defTabSz="914400" rtl="0" eaLnBrk="1" fontAlgn="auto" latinLnBrk="0" hangingPunct="1">
+              <a:lnSpc>
+                <a:spcPct val="100000"/>
+              </a:lnSpc>
+              <a:spcBef>
+                <a:spcPts val="0"/>
+              </a:spcBef>
+              <a:spcAft>
+                <a:spcPts val="0"/>
+              </a:spcAft>
+              <a:buClrTx/>
+              <a:buSzTx/>
+              <a:buFontTx/>
+              <a:buNone/>
+              <a:tabLst/>
+              <a:defRPr/>
+            </a:pPr>
+            <a:endParaRPr kumimoji="0" sz="1800" b="0" i="0" u="none" strike="noStrike" kern="1200" cap="none" spc="0" normalizeH="0" baseline="0" noProof="0">
+              <a:ln>
+                <a:noFill/>
+              </a:ln>
+              <a:solidFill>
+                <a:prstClr val="white"/>
+              </a:solidFill>
+              <a:effectLst/>
+              <a:uLnTx/>
+              <a:uFillTx/>
+              <a:latin typeface="等线" panose="020F0502020204030204"/>
+              <a:ea typeface="+mn-ea"/>
+              <a:cs typeface="+mn-cs"/>
+            </a:endParaRPr>
+          </a:p>
+        </p:txBody>
+      </p:sp>
+      <p:sp>
+        <p:nvSpPr>
+          <p:cNvPr id="42" name="TextBox 41"/>
+          <p:cNvSpPr txBox="1"/>
           <p:nvPr/>
         </p:nvSpPr>
         <p:spPr>
           <a:xfrm>
-            <a:off x="676656" y="2852928"/>
-            <a:ext cx="292608" cy="228600"/>
-          </a:xfrm>
-          <a:prstGeom prst="rect">
-            <a:avLst/>
-          </a:prstGeom>
-          <a:solidFill>
-            <a:srgbClr val="EFF5FB"/>
-          </a:solidFill>
-          <a:ln>
-            <a:noFill/>
-          </a:ln>
-        </p:spPr>
-        <p:style>
-          <a:lnRef idx="1">
-            <a:schemeClr val="accent1"/>
-          </a:lnRef>
-          <a:fillRef idx="3">
-            <a:schemeClr val="accent1"/>
-          </a:fillRef>
-          <a:effectRef idx="2">
-            <a:schemeClr val="accent1"/>
-          </a:effectRef>
-          <a:fontRef idx="minor">
-            <a:schemeClr val="lt1"/>
-          </a:fontRef>
-        </p:style>
-        <p:txBody>
-          <a:bodyPr rtlCol="0" anchor="ctr"/>
-          <a:lstStyle/>
-          <a:p>
-            <a:pPr algn="ctr"/>
-            <a:endParaRPr/>
-          </a:p>
-        </p:txBody>
-      </p:sp>
-      <p:sp>
-        <p:nvSpPr>
-          <p:cNvPr id="41" name="TextBox 32">
-            <a:extLst>
-              <a:ext uri="{FF2B5EF4-FFF2-40B4-BE49-F238E27FC236}">
-                <a16:creationId xmlns:a16="http://schemas.microsoft.com/office/drawing/2014/main" id="{48B7AC4E-A5E1-4037-B866-0C277155D0D8}"/>
-              </a:ext>
-            </a:extLst>
-          </p:cNvPr>
-          <p:cNvSpPr txBox="1"/>
-          <p:nvPr/>
-        </p:nvSpPr>
-        <p:spPr>
-          <a:xfrm>
-            <a:off x="704088" y="2884932"/>
-            <a:ext cx="237744" cy="146304"/>
+            <a:off x="9232104" y="1458609"/>
+            <a:ext cx="2834639" cy="256032"/>
           </a:xfrm>
           <a:prstGeom prst="rect">
             <a:avLst/>
@@ -8133,40 +7147,64 @@
           <a:noFill/>
         </p:spPr>
         <p:txBody>
-          <a:bodyPr wrap="square" lIns="0" tIns="0" rIns="0" bIns="0">
-            <a:spAutoFit/>
+          <a:bodyPr wrap="square" lIns="0" tIns="0" rIns="0" bIns="0" anchor="t">
+            <a:noAutofit/>
           </a:bodyPr>
           <a:lstStyle/>
           <a:p>
-            <a:pPr algn="ctr"/>
-            <a:r>
-              <a:rPr sz="740" b="1">
+            <a:pPr marL="0" marR="0" lvl="0" indent="0" algn="l" defTabSz="914400" rtl="0" eaLnBrk="1" fontAlgn="auto" latinLnBrk="0" hangingPunct="1">
+              <a:lnSpc>
+                <a:spcPct val="100000"/>
+              </a:lnSpc>
+              <a:spcBef>
+                <a:spcPts val="0"/>
+              </a:spcBef>
+              <a:spcAft>
+                <a:spcPts val="0"/>
+              </a:spcAft>
+              <a:buClrTx/>
+              <a:buSzTx/>
+              <a:buFontTx/>
+              <a:buNone/>
+              <a:tabLst/>
+              <a:defRPr/>
+            </a:pPr>
+            <a:r>
+              <a:rPr lang="zh-CN" altLang="en-US" sz="1500" b="1" dirty="0">
                 <a:solidFill>
-                  <a:srgbClr val="144970"/>
+                  <a:srgbClr val="1A232D"/>
                 </a:solidFill>
                 <a:latin typeface="Microsoft YaHei"/>
               </a:rPr>
-              <a:t>01</a:t>
-            </a:r>
-          </a:p>
-        </p:txBody>
-      </p:sp>
-      <p:sp>
-        <p:nvSpPr>
-          <p:cNvPr id="42" name="TextBox 33">
-            <a:extLst>
-              <a:ext uri="{FF2B5EF4-FFF2-40B4-BE49-F238E27FC236}">
-                <a16:creationId xmlns:a16="http://schemas.microsoft.com/office/drawing/2014/main" id="{6C2120C2-52E0-418D-B7F8-9125C4DF35BA}"/>
-              </a:ext>
-            </a:extLst>
-          </p:cNvPr>
+              <a:t>模型基建</a:t>
+            </a:r>
+            <a:endParaRPr kumimoji="0" sz="1500" b="1" i="0" u="none" strike="noStrike" kern="1200" cap="none" spc="0" normalizeH="0" baseline="0" noProof="0" dirty="0">
+              <a:ln>
+                <a:noFill/>
+              </a:ln>
+              <a:solidFill>
+                <a:srgbClr val="1A232D"/>
+              </a:solidFill>
+              <a:effectLst/>
+              <a:uLnTx/>
+              <a:uFillTx/>
+              <a:latin typeface="Microsoft YaHei"/>
+              <a:ea typeface="+mn-ea"/>
+              <a:cs typeface="+mn-cs"/>
+            </a:endParaRPr>
+          </a:p>
+        </p:txBody>
+      </p:sp>
+      <p:sp>
+        <p:nvSpPr>
+          <p:cNvPr id="47" name="TextBox 46"/>
           <p:cNvSpPr txBox="1"/>
           <p:nvPr/>
         </p:nvSpPr>
         <p:spPr>
           <a:xfrm>
-            <a:off x="1033271" y="2834640"/>
-            <a:ext cx="1097280" cy="219456"/>
+            <a:off x="9184398" y="1868912"/>
+            <a:ext cx="1476755" cy="395493"/>
           </a:xfrm>
           <a:prstGeom prst="rect">
             <a:avLst/>
@@ -8174,40 +7212,165 @@
           <a:noFill/>
         </p:spPr>
         <p:txBody>
-          <a:bodyPr wrap="square" lIns="0" tIns="0" rIns="0" bIns="0">
+          <a:bodyPr wrap="square" lIns="18288" tIns="18288" rIns="18288" bIns="18288">
             <a:spAutoFit/>
           </a:bodyPr>
           <a:lstStyle/>
           <a:p>
-            <a:pPr algn="l"/>
-            <a:r>
-              <a:rPr sz="1320" b="1">
+            <a:pPr marL="0" marR="0" lvl="0" indent="0" algn="l" defTabSz="914400" rtl="0" eaLnBrk="1" fontAlgn="auto" latinLnBrk="0" hangingPunct="1">
+              <a:lnSpc>
+                <a:spcPct val="100000"/>
+              </a:lnSpc>
+              <a:spcBef>
+                <a:spcPts val="0"/>
+              </a:spcBef>
+              <a:spcAft>
+                <a:spcPts val="300"/>
+              </a:spcAft>
+              <a:buClrTx/>
+              <a:buSzTx/>
+              <a:buFontTx/>
+              <a:buNone/>
+              <a:tabLst/>
+              <a:defRPr/>
+            </a:pPr>
+            <a:r>
+              <a:rPr kumimoji="0" lang="zh-CN" altLang="en-US" sz="1040" b="0" i="0" u="none" strike="noStrike" kern="1200" cap="none" spc="0" normalizeH="0" baseline="0" noProof="0" dirty="0">
+                <a:ln>
+                  <a:noFill/>
+                </a:ln>
                 <a:solidFill>
-                  <a:srgbClr val="222C38"/>
+                  <a:srgbClr val="1A232D"/>
                 </a:solidFill>
+                <a:effectLst/>
+                <a:uLnTx/>
+                <a:uFillTx/>
                 <a:latin typeface="Microsoft YaHei"/>
+                <a:ea typeface="+mn-ea"/>
+                <a:cs typeface="+mn-cs"/>
               </a:rPr>
-              <a:t>数据基建</a:t>
-            </a:r>
-          </a:p>
-        </p:txBody>
-      </p:sp>
-      <p:sp>
-        <p:nvSpPr>
-          <p:cNvPr id="43" name="TextBox 34">
-            <a:extLst>
-              <a:ext uri="{FF2B5EF4-FFF2-40B4-BE49-F238E27FC236}">
-                <a16:creationId xmlns:a16="http://schemas.microsoft.com/office/drawing/2014/main" id="{BDF3C074-40A8-4ABF-9131-52B64E3A0E8E}"/>
-              </a:ext>
-            </a:extLst>
-          </p:cNvPr>
+              <a:t>分类模型开发</a:t>
+            </a:r>
+            <a:endParaRPr lang="en-US" altLang="zh-CN" sz="1040" dirty="0">
+              <a:solidFill>
+                <a:srgbClr val="1A232D"/>
+              </a:solidFill>
+              <a:latin typeface="Microsoft YaHei"/>
+            </a:endParaRPr>
+          </a:p>
+          <a:p>
+            <a:pPr marL="0" marR="0" lvl="0" indent="0" algn="l" defTabSz="914400" rtl="0" eaLnBrk="1" fontAlgn="auto" latinLnBrk="0" hangingPunct="1">
+              <a:lnSpc>
+                <a:spcPct val="100000"/>
+              </a:lnSpc>
+              <a:spcBef>
+                <a:spcPts val="0"/>
+              </a:spcBef>
+              <a:spcAft>
+                <a:spcPts val="300"/>
+              </a:spcAft>
+              <a:buClrTx/>
+              <a:buSzTx/>
+              <a:buFontTx/>
+              <a:buNone/>
+              <a:tabLst/>
+              <a:defRPr/>
+            </a:pPr>
+            <a:r>
+              <a:rPr kumimoji="0" sz="1040" b="0" i="0" u="none" strike="noStrike" kern="1200" cap="none" spc="0" normalizeH="0" baseline="0" noProof="0" dirty="0" err="1">
+                <a:ln>
+                  <a:noFill/>
+                </a:ln>
+                <a:solidFill>
+                  <a:srgbClr val="1A232D"/>
+                </a:solidFill>
+                <a:effectLst/>
+                <a:uLnTx/>
+                <a:uFillTx/>
+                <a:latin typeface="Microsoft YaHei"/>
+                <a:ea typeface="+mn-ea"/>
+                <a:cs typeface="+mn-cs"/>
+              </a:rPr>
+              <a:t>知识库</a:t>
+            </a:r>
+            <a:r>
+              <a:rPr kumimoji="0" lang="en-US" sz="1040" b="0" i="0" u="none" strike="noStrike" kern="1200" cap="none" spc="0" normalizeH="0" baseline="0" noProof="0" dirty="0" err="1">
+                <a:ln>
+                  <a:noFill/>
+                </a:ln>
+                <a:solidFill>
+                  <a:srgbClr val="1A232D"/>
+                </a:solidFill>
+                <a:effectLst/>
+                <a:uLnTx/>
+                <a:uFillTx/>
+                <a:latin typeface="Microsoft YaHei"/>
+                <a:ea typeface="+mn-ea"/>
+                <a:cs typeface="+mn-cs"/>
+              </a:rPr>
+              <a:t>AI</a:t>
+            </a:r>
+            <a:r>
+              <a:rPr kumimoji="0" sz="1040" b="0" i="0" u="none" strike="noStrike" kern="1200" cap="none" spc="0" normalizeH="0" baseline="0" noProof="0" dirty="0" err="1">
+                <a:ln>
+                  <a:noFill/>
+                </a:ln>
+                <a:solidFill>
+                  <a:srgbClr val="1A232D"/>
+                </a:solidFill>
+                <a:effectLst/>
+                <a:uLnTx/>
+                <a:uFillTx/>
+                <a:latin typeface="Microsoft YaHei"/>
+                <a:ea typeface="+mn-ea"/>
+                <a:cs typeface="+mn-cs"/>
+              </a:rPr>
+              <a:t>智能体</a:t>
+            </a:r>
+            <a:r>
+              <a:rPr kumimoji="0" lang="en-US" altLang="zh-CN" sz="1040" b="0" i="0" u="none" strike="noStrike" kern="1200" cap="none" spc="0" normalizeH="0" baseline="0" noProof="0" dirty="0">
+                <a:ln>
+                  <a:noFill/>
+                </a:ln>
+                <a:solidFill>
+                  <a:srgbClr val="1A232D"/>
+                </a:solidFill>
+                <a:effectLst/>
+                <a:uLnTx/>
+                <a:uFillTx/>
+                <a:latin typeface="Microsoft YaHei"/>
+                <a:ea typeface="+mn-ea"/>
+                <a:cs typeface="+mn-cs"/>
+              </a:rPr>
+              <a:t> </a:t>
+            </a:r>
+            <a:endParaRPr kumimoji="0" sz="1040" b="0" i="0" u="none" strike="noStrike" kern="1200" cap="none" spc="0" normalizeH="0" baseline="0" noProof="0" dirty="0">
+              <a:ln>
+                <a:noFill/>
+              </a:ln>
+              <a:solidFill>
+                <a:srgbClr val="1A232D"/>
+              </a:solidFill>
+              <a:effectLst/>
+              <a:uLnTx/>
+              <a:uFillTx/>
+              <a:latin typeface="Microsoft YaHei"/>
+              <a:ea typeface="+mn-ea"/>
+              <a:cs typeface="+mn-cs"/>
+            </a:endParaRPr>
+          </a:p>
+        </p:txBody>
+      </p:sp>
+      <p:sp>
+        <p:nvSpPr>
+          <p:cNvPr id="50" name="TextBox 49"/>
           <p:cNvSpPr txBox="1"/>
           <p:nvPr/>
         </p:nvSpPr>
         <p:spPr>
           <a:xfrm>
-            <a:off x="1033271" y="3081528"/>
-            <a:ext cx="4572000" cy="118494"/>
+            <a:off x="9184398" y="2287111"/>
+            <a:ext cx="1476755" cy="196977"/>
           </a:xfrm>
           <a:prstGeom prst="rect">
             <a:avLst/>
@@ -8215,164 +7378,106 @@
           <a:noFill/>
         </p:spPr>
         <p:txBody>
-          <a:bodyPr wrap="square" lIns="0" tIns="0" rIns="0" bIns="0">
+          <a:bodyPr wrap="square" lIns="18288" tIns="18288" rIns="18288" bIns="18288">
             <a:spAutoFit/>
           </a:bodyPr>
           <a:lstStyle/>
           <a:p>
-            <a:pPr algn="l"/>
-            <a:r>
-              <a:rPr sz="770" b="0" dirty="0">
+            <a:pPr marL="0" marR="0" lvl="0" indent="0" algn="l" defTabSz="914400" rtl="0" eaLnBrk="1" fontAlgn="auto" latinLnBrk="0" hangingPunct="1">
+              <a:lnSpc>
+                <a:spcPct val="100000"/>
+              </a:lnSpc>
+              <a:spcBef>
+                <a:spcPts val="0"/>
+              </a:spcBef>
+              <a:spcAft>
+                <a:spcPts val="300"/>
+              </a:spcAft>
+              <a:buClrTx/>
+              <a:buSzTx/>
+              <a:buFontTx/>
+              <a:buNone/>
+              <a:tabLst/>
+              <a:defRPr/>
+            </a:pPr>
+            <a:r>
+              <a:rPr kumimoji="0" sz="1040" b="0" i="0" u="none" strike="noStrike" kern="1200" cap="none" spc="0" normalizeH="0" baseline="0" noProof="0" dirty="0" err="1">
+                <a:ln>
+                  <a:noFill/>
+                </a:ln>
                 <a:solidFill>
-                  <a:srgbClr val="606976"/>
+                  <a:srgbClr val="1A232D"/>
                 </a:solidFill>
+                <a:effectLst/>
+                <a:uLnTx/>
+                <a:uFillTx/>
                 <a:latin typeface="Microsoft YaHei"/>
+                <a:ea typeface="+mn-ea"/>
+                <a:cs typeface="+mn-cs"/>
               </a:rPr>
-              <a:t>目标：统一流水识别、IDP2 </a:t>
-            </a:r>
-            <a:r>
-              <a:rPr sz="770" b="0" dirty="0" err="1">
+              <a:t>竞品追踪</a:t>
+            </a:r>
+            <a:r>
+              <a:rPr kumimoji="0" sz="1040" b="0" i="0" u="none" strike="noStrike" kern="1200" cap="none" spc="0" normalizeH="0" baseline="0" noProof="0" dirty="0">
+                <a:ln>
+                  <a:noFill/>
+                </a:ln>
                 <a:solidFill>
-                  <a:srgbClr val="606976"/>
+                  <a:srgbClr val="1A232D"/>
                 </a:solidFill>
+                <a:effectLst/>
+                <a:uLnTx/>
+                <a:uFillTx/>
                 <a:latin typeface="Microsoft YaHei"/>
+                <a:ea typeface="+mn-ea"/>
+                <a:cs typeface="+mn-cs"/>
               </a:rPr>
-              <a:t>链路与</a:t>
-            </a:r>
-            <a:r>
-              <a:rPr lang="zh-CN" altLang="en-US" sz="770" dirty="0">
+              <a:t> AI </a:t>
+            </a:r>
+            <a:r>
+              <a:rPr kumimoji="0" sz="1040" b="0" i="0" u="none" strike="noStrike" kern="1200" cap="none" spc="0" normalizeH="0" baseline="0" noProof="0" dirty="0" err="1">
+                <a:ln>
+                  <a:noFill/>
+                </a:ln>
                 <a:solidFill>
-                  <a:srgbClr val="606976"/>
+                  <a:srgbClr val="1A232D"/>
                 </a:solidFill>
+                <a:effectLst/>
+                <a:uLnTx/>
+                <a:uFillTx/>
                 <a:latin typeface="Microsoft YaHei"/>
+                <a:ea typeface="+mn-ea"/>
+                <a:cs typeface="+mn-cs"/>
               </a:rPr>
-              <a:t>涉及市场投放归因底座</a:t>
-            </a:r>
-            <a:endParaRPr sz="770" b="0" dirty="0">
+              <a:t>智能体</a:t>
+            </a:r>
+            <a:endParaRPr kumimoji="0" sz="1040" b="0" i="0" u="none" strike="noStrike" kern="1200" cap="none" spc="0" normalizeH="0" baseline="0" noProof="0" dirty="0">
+              <a:ln>
+                <a:noFill/>
+              </a:ln>
               <a:solidFill>
-                <a:srgbClr val="606976"/>
+                <a:srgbClr val="1A232D"/>
               </a:solidFill>
+              <a:effectLst/>
+              <a:uLnTx/>
+              <a:uFillTx/>
               <a:latin typeface="Microsoft YaHei"/>
+              <a:ea typeface="+mn-ea"/>
+              <a:cs typeface="+mn-cs"/>
             </a:endParaRPr>
           </a:p>
         </p:txBody>
       </p:sp>
       <p:sp>
         <p:nvSpPr>
-          <p:cNvPr id="44" name="Rectangle 35">
-            <a:extLst>
-              <a:ext uri="{FF2B5EF4-FFF2-40B4-BE49-F238E27FC236}">
-                <a16:creationId xmlns:a16="http://schemas.microsoft.com/office/drawing/2014/main" id="{A03800E2-3473-4A04-88B4-9DF8F86D45FE}"/>
-              </a:ext>
-            </a:extLst>
-          </p:cNvPr>
-          <p:cNvSpPr/>
+          <p:cNvPr id="56" name="TextBox 55"/>
+          <p:cNvSpPr txBox="1"/>
           <p:nvPr/>
         </p:nvSpPr>
         <p:spPr>
           <a:xfrm>
-            <a:off x="676656" y="3319272"/>
-            <a:ext cx="5029200" cy="9144"/>
-          </a:xfrm>
-          <a:prstGeom prst="rect">
-            <a:avLst/>
-          </a:prstGeom>
-          <a:solidFill>
-            <a:srgbClr val="D6DBE1"/>
-          </a:solidFill>
-          <a:ln>
-            <a:noFill/>
-          </a:ln>
-        </p:spPr>
-        <p:style>
-          <a:lnRef idx="1">
-            <a:schemeClr val="accent1"/>
-          </a:lnRef>
-          <a:fillRef idx="3">
-            <a:schemeClr val="accent1"/>
-          </a:fillRef>
-          <a:effectRef idx="2">
-            <a:schemeClr val="accent1"/>
-          </a:effectRef>
-          <a:fontRef idx="minor">
-            <a:schemeClr val="lt1"/>
-          </a:fontRef>
-        </p:style>
-        <p:txBody>
-          <a:bodyPr rtlCol="0" anchor="ctr"/>
-          <a:lstStyle/>
-          <a:p>
-            <a:pPr algn="ctr"/>
-            <a:endParaRPr/>
-          </a:p>
-        </p:txBody>
-      </p:sp>
-      <p:sp>
-        <p:nvSpPr>
-          <p:cNvPr id="45" name="Rectangle 36">
-            <a:extLst>
-              <a:ext uri="{FF2B5EF4-FFF2-40B4-BE49-F238E27FC236}">
-                <a16:creationId xmlns:a16="http://schemas.microsoft.com/office/drawing/2014/main" id="{18E02B63-CB74-4815-898D-84820A39E9D5}"/>
-              </a:ext>
-            </a:extLst>
-          </p:cNvPr>
-          <p:cNvSpPr/>
-          <p:nvPr/>
-        </p:nvSpPr>
-        <p:spPr>
-          <a:xfrm>
-            <a:off x="676656" y="3438144"/>
-            <a:ext cx="54864" cy="118872"/>
-          </a:xfrm>
-          <a:prstGeom prst="rect">
-            <a:avLst/>
-          </a:prstGeom>
-          <a:solidFill>
-            <a:srgbClr val="E2A600"/>
-          </a:solidFill>
-          <a:ln>
-            <a:noFill/>
-          </a:ln>
-        </p:spPr>
-        <p:style>
-          <a:lnRef idx="1">
-            <a:schemeClr val="accent1"/>
-          </a:lnRef>
-          <a:fillRef idx="3">
-            <a:schemeClr val="accent1"/>
-          </a:fillRef>
-          <a:effectRef idx="2">
-            <a:schemeClr val="accent1"/>
-          </a:effectRef>
-          <a:fontRef idx="minor">
-            <a:schemeClr val="lt1"/>
-          </a:fontRef>
-        </p:style>
-        <p:txBody>
-          <a:bodyPr rtlCol="0" anchor="ctr"/>
-          <a:lstStyle/>
-          <a:p>
-            <a:pPr algn="ctr"/>
-            <a:endParaRPr/>
-          </a:p>
-        </p:txBody>
-      </p:sp>
-      <p:sp>
-        <p:nvSpPr>
-          <p:cNvPr id="46" name="TextBox 37">
-            <a:extLst>
-              <a:ext uri="{FF2B5EF4-FFF2-40B4-BE49-F238E27FC236}">
-                <a16:creationId xmlns:a16="http://schemas.microsoft.com/office/drawing/2014/main" id="{CFE8516B-0FF5-48B0-9313-56BCD6FDC3CA}"/>
-              </a:ext>
-            </a:extLst>
-          </p:cNvPr>
-          <p:cNvSpPr txBox="1"/>
-          <p:nvPr/>
-        </p:nvSpPr>
-        <p:spPr>
-          <a:xfrm>
-            <a:off x="758952" y="3432468"/>
-            <a:ext cx="548640" cy="116955"/>
+            <a:off x="9232104" y="2863813"/>
+            <a:ext cx="2834639" cy="256032"/>
           </a:xfrm>
           <a:prstGeom prst="rect">
             <a:avLst/>
@@ -8380,96 +7485,72 @@
           <a:noFill/>
         </p:spPr>
         <p:txBody>
-          <a:bodyPr wrap="square" lIns="0" tIns="0" rIns="0" bIns="0">
-            <a:spAutoFit/>
+          <a:bodyPr wrap="square" lIns="0" tIns="0" rIns="0" bIns="0" anchor="t">
+            <a:noAutofit/>
           </a:bodyPr>
           <a:lstStyle/>
           <a:p>
-            <a:pPr algn="l"/>
-            <a:r>
-              <a:rPr lang="zh-CN" altLang="en-US" sz="760" b="1" dirty="0">
+            <a:pPr marL="0" marR="0" lvl="0" indent="0" algn="l" defTabSz="914400" rtl="0" eaLnBrk="1" fontAlgn="auto" latinLnBrk="0" hangingPunct="1">
+              <a:lnSpc>
+                <a:spcPct val="100000"/>
+              </a:lnSpc>
+              <a:spcBef>
+                <a:spcPts val="0"/>
+              </a:spcBef>
+              <a:spcAft>
+                <a:spcPts val="0"/>
+              </a:spcAft>
+              <a:buClrTx/>
+              <a:buSzTx/>
+              <a:buFontTx/>
+              <a:buNone/>
+              <a:tabLst/>
+              <a:defRPr/>
+            </a:pPr>
+            <a:r>
+              <a:rPr kumimoji="0" sz="1500" b="1" i="0" u="none" strike="noStrike" kern="1200" cap="none" spc="0" normalizeH="0" baseline="0" noProof="0" dirty="0" err="1">
+                <a:ln>
+                  <a:noFill/>
+                </a:ln>
                 <a:solidFill>
-                  <a:srgbClr val="144970"/>
+                  <a:srgbClr val="1A232D"/>
                 </a:solidFill>
+                <a:effectLst/>
+                <a:uLnTx/>
+                <a:uFillTx/>
                 <a:latin typeface="Microsoft YaHei"/>
+                <a:ea typeface="+mn-ea"/>
+                <a:cs typeface="+mn-cs"/>
               </a:rPr>
-              <a:t>信审合规</a:t>
-            </a:r>
-            <a:endParaRPr sz="760" b="1" dirty="0">
+              <a:t>投放市场</a:t>
+            </a:r>
+            <a:endParaRPr kumimoji="0" sz="1500" b="1" i="0" u="none" strike="noStrike" kern="1200" cap="none" spc="0" normalizeH="0" baseline="0" noProof="0" dirty="0">
+              <a:ln>
+                <a:noFill/>
+              </a:ln>
               <a:solidFill>
-                <a:srgbClr val="144970"/>
+                <a:srgbClr val="1A232D"/>
               </a:solidFill>
+              <a:effectLst/>
+              <a:uLnTx/>
+              <a:uFillTx/>
               <a:latin typeface="Microsoft YaHei"/>
+              <a:ea typeface="+mn-ea"/>
+              <a:cs typeface="+mn-cs"/>
             </a:endParaRPr>
           </a:p>
         </p:txBody>
       </p:sp>
       <p:sp>
         <p:nvSpPr>
-          <p:cNvPr id="47" name="Rectangle 38">
-            <a:extLst>
-              <a:ext uri="{FF2B5EF4-FFF2-40B4-BE49-F238E27FC236}">
-                <a16:creationId xmlns:a16="http://schemas.microsoft.com/office/drawing/2014/main" id="{A4405221-0A3D-419D-B384-75C1DC851F18}"/>
-              </a:ext>
-            </a:extLst>
-          </p:cNvPr>
-          <p:cNvSpPr/>
+          <p:cNvPr id="61" name="TextBox 60"/>
+          <p:cNvSpPr txBox="1"/>
           <p:nvPr/>
         </p:nvSpPr>
         <p:spPr>
           <a:xfrm>
-            <a:off x="3255264" y="3438144"/>
-            <a:ext cx="54864" cy="118872"/>
-          </a:xfrm>
-          <a:prstGeom prst="rect">
-            <a:avLst/>
-          </a:prstGeom>
-          <a:solidFill>
-            <a:srgbClr val="E2A600"/>
-          </a:solidFill>
-          <a:ln>
-            <a:noFill/>
-          </a:ln>
-        </p:spPr>
-        <p:style>
-          <a:lnRef idx="1">
-            <a:schemeClr val="accent1"/>
-          </a:lnRef>
-          <a:fillRef idx="3">
-            <a:schemeClr val="accent1"/>
-          </a:fillRef>
-          <a:effectRef idx="2">
-            <a:schemeClr val="accent1"/>
-          </a:effectRef>
-          <a:fontRef idx="minor">
-            <a:schemeClr val="lt1"/>
-          </a:fontRef>
-        </p:style>
-        <p:txBody>
-          <a:bodyPr rtlCol="0" anchor="ctr"/>
-          <a:lstStyle/>
-          <a:p>
-            <a:pPr algn="ctr"/>
-            <a:endParaRPr/>
-          </a:p>
-        </p:txBody>
-      </p:sp>
-      <p:sp>
-        <p:nvSpPr>
-          <p:cNvPr id="48" name="TextBox 39">
-            <a:extLst>
-              <a:ext uri="{FF2B5EF4-FFF2-40B4-BE49-F238E27FC236}">
-                <a16:creationId xmlns:a16="http://schemas.microsoft.com/office/drawing/2014/main" id="{A87EAD18-F199-4040-8640-DC6632359901}"/>
-              </a:ext>
-            </a:extLst>
-          </p:cNvPr>
-          <p:cNvSpPr txBox="1"/>
-          <p:nvPr/>
-        </p:nvSpPr>
-        <p:spPr>
-          <a:xfrm>
-            <a:off x="3337560" y="3419856"/>
-            <a:ext cx="548640" cy="116955"/>
+            <a:off x="9236202" y="3216600"/>
+            <a:ext cx="1476755" cy="395493"/>
           </a:xfrm>
           <a:prstGeom prst="rect">
             <a:avLst/>
@@ -8477,46 +7558,114 @@
           <a:noFill/>
         </p:spPr>
         <p:txBody>
-          <a:bodyPr wrap="square" lIns="0" tIns="0" rIns="0" bIns="0">
+          <a:bodyPr wrap="square" lIns="18288" tIns="18288" rIns="18288" bIns="18288">
             <a:spAutoFit/>
           </a:bodyPr>
           <a:lstStyle/>
           <a:p>
-            <a:pPr algn="l"/>
-            <a:r>
-              <a:rPr lang="zh-CN" altLang="en-US" sz="760" b="1" dirty="0">
+            <a:pPr marL="0" marR="0" lvl="0" indent="0" algn="l" defTabSz="914400" rtl="0" eaLnBrk="1" fontAlgn="auto" latinLnBrk="0" hangingPunct="1">
+              <a:lnSpc>
+                <a:spcPct val="100000"/>
+              </a:lnSpc>
+              <a:spcBef>
+                <a:spcPts val="0"/>
+              </a:spcBef>
+              <a:spcAft>
+                <a:spcPts val="300"/>
+              </a:spcAft>
+              <a:buClrTx/>
+              <a:buSzTx/>
+              <a:buFontTx/>
+              <a:buNone/>
+              <a:tabLst/>
+              <a:defRPr/>
+            </a:pPr>
+            <a:r>
+              <a:rPr lang="zh-CN" altLang="en-US" sz="1040" dirty="0">
                 <a:solidFill>
-                  <a:srgbClr val="144970"/>
+                  <a:srgbClr val="1A232D"/>
                 </a:solidFill>
                 <a:latin typeface="Microsoft YaHei"/>
               </a:rPr>
-              <a:t>投放运营</a:t>
-            </a:r>
-            <a:endParaRPr sz="760" b="1" dirty="0">
+              <a:t>高价值用户回传包</a:t>
+            </a:r>
+            <a:endParaRPr kumimoji="0" lang="en-US" sz="1040" b="0" i="0" u="none" strike="noStrike" kern="1200" cap="none" spc="0" normalizeH="0" baseline="0" noProof="0" dirty="0">
+              <a:ln>
+                <a:noFill/>
+              </a:ln>
               <a:solidFill>
-                <a:srgbClr val="144970"/>
+                <a:srgbClr val="1A232D"/>
               </a:solidFill>
+              <a:effectLst/>
+              <a:uLnTx/>
+              <a:uFillTx/>
               <a:latin typeface="Microsoft YaHei"/>
+              <a:ea typeface="+mn-ea"/>
+              <a:cs typeface="+mn-cs"/>
             </a:endParaRPr>
           </a:p>
-        </p:txBody>
-      </p:sp>
-      <p:sp>
-        <p:nvSpPr>
-          <p:cNvPr id="49" name="TextBox 40">
-            <a:extLst>
-              <a:ext uri="{FF2B5EF4-FFF2-40B4-BE49-F238E27FC236}">
-                <a16:creationId xmlns:a16="http://schemas.microsoft.com/office/drawing/2014/main" id="{101A6D5E-5B62-4C63-BF66-4BE55234106D}"/>
-              </a:ext>
-            </a:extLst>
-          </p:cNvPr>
+          <a:p>
+            <a:pPr marL="0" marR="0" lvl="0" indent="0" algn="l" defTabSz="914400" rtl="0" eaLnBrk="1" fontAlgn="auto" latinLnBrk="0" hangingPunct="1">
+              <a:lnSpc>
+                <a:spcPct val="100000"/>
+              </a:lnSpc>
+              <a:spcBef>
+                <a:spcPts val="0"/>
+              </a:spcBef>
+              <a:spcAft>
+                <a:spcPts val="300"/>
+              </a:spcAft>
+              <a:buClrTx/>
+              <a:buSzTx/>
+              <a:buFontTx/>
+              <a:buNone/>
+              <a:tabLst/>
+              <a:defRPr/>
+            </a:pPr>
+            <a:r>
+              <a:rPr kumimoji="0" sz="1040" b="0" i="0" u="none" strike="noStrike" kern="1200" cap="none" spc="0" normalizeH="0" baseline="0" noProof="0" dirty="0" err="1">
+                <a:ln>
+                  <a:noFill/>
+                </a:ln>
+                <a:solidFill>
+                  <a:srgbClr val="1A232D"/>
+                </a:solidFill>
+                <a:effectLst/>
+                <a:uLnTx/>
+                <a:uFillTx/>
+                <a:latin typeface="Microsoft YaHei"/>
+                <a:ea typeface="+mn-ea"/>
+                <a:cs typeface="+mn-cs"/>
+              </a:rPr>
+              <a:t>投放归因追踪监控</a:t>
+            </a:r>
+            <a:endParaRPr kumimoji="0" sz="1040" b="0" i="0" u="none" strike="noStrike" kern="1200" cap="none" spc="0" normalizeH="0" baseline="0" noProof="0" dirty="0">
+              <a:ln>
+                <a:noFill/>
+              </a:ln>
+              <a:solidFill>
+                <a:srgbClr val="1A232D"/>
+              </a:solidFill>
+              <a:effectLst/>
+              <a:uLnTx/>
+              <a:uFillTx/>
+              <a:latin typeface="Microsoft YaHei"/>
+              <a:ea typeface="+mn-ea"/>
+              <a:cs typeface="+mn-cs"/>
+            </a:endParaRPr>
+          </a:p>
+        </p:txBody>
+      </p:sp>
+      <p:sp>
+        <p:nvSpPr>
+          <p:cNvPr id="64" name="TextBox 63"/>
           <p:cNvSpPr txBox="1"/>
           <p:nvPr/>
         </p:nvSpPr>
         <p:spPr>
           <a:xfrm>
-            <a:off x="676656" y="3639312"/>
-            <a:ext cx="2578608" cy="484748"/>
+            <a:off x="9237195" y="3639667"/>
+            <a:ext cx="1476755" cy="196977"/>
           </a:xfrm>
           <a:prstGeom prst="rect">
             <a:avLst/>
@@ -8524,113 +7673,72 @@
           <a:noFill/>
         </p:spPr>
         <p:txBody>
-          <a:bodyPr wrap="square" lIns="0" tIns="0" rIns="0" bIns="0">
+          <a:bodyPr wrap="square" lIns="18288" tIns="18288" rIns="18288" bIns="18288">
             <a:spAutoFit/>
           </a:bodyPr>
           <a:lstStyle/>
           <a:p>
-            <a:pPr>
+            <a:pPr marL="0" marR="0" lvl="0" indent="0" algn="l" defTabSz="914400" rtl="0" eaLnBrk="1" fontAlgn="auto" latinLnBrk="0" hangingPunct="1">
               <a:lnSpc>
                 <a:spcPct val="100000"/>
               </a:lnSpc>
+              <a:spcBef>
+                <a:spcPts val="0"/>
+              </a:spcBef>
               <a:spcAft>
-                <a:spcPts val="100"/>
+                <a:spcPts val="300"/>
               </a:spcAft>
-              <a:defRPr sz="725">
+              <a:buClrTx/>
+              <a:buSzTx/>
+              <a:buFontTx/>
+              <a:buNone/>
+              <a:tabLst/>
+              <a:defRPr/>
+            </a:pPr>
+            <a:r>
+              <a:rPr kumimoji="0" sz="1040" b="0" i="0" u="none" strike="noStrike" kern="1200" cap="none" spc="0" normalizeH="0" baseline="0" noProof="0" dirty="0" err="1">
+                <a:ln>
+                  <a:noFill/>
+                </a:ln>
                 <a:solidFill>
-                  <a:srgbClr val="222C38"/>
+                  <a:srgbClr val="1A232D"/>
                 </a:solidFill>
+                <a:effectLst/>
+                <a:uLnTx/>
+                <a:uFillTx/>
                 <a:latin typeface="Microsoft YaHei"/>
-              </a:defRPr>
-            </a:pPr>
-            <a:r>
-              <a:rPr dirty="0"/>
-              <a:t>★ BS-CAT </a:t>
-            </a:r>
-            <a:r>
-              <a:rPr dirty="0" err="1"/>
-              <a:t>生产化与并行验证</a:t>
-            </a:r>
-            <a:endParaRPr lang="en-US" dirty="0"/>
-          </a:p>
-          <a:p>
-            <a:pPr>
-              <a:spcAft>
-                <a:spcPts val="100"/>
-              </a:spcAft>
-              <a:defRPr sz="725">
-                <a:solidFill>
-                  <a:srgbClr val="222C38"/>
-                </a:solidFill>
-                <a:latin typeface="Microsoft YaHei"/>
-              </a:defRPr>
-            </a:pPr>
-            <a:r>
-              <a:rPr lang="zh-CN" altLang="en-US" dirty="0"/>
-              <a:t>知识库运维智能体</a:t>
-            </a:r>
-            <a:endParaRPr dirty="0"/>
-          </a:p>
-          <a:p>
-            <a:pPr>
-              <a:lnSpc>
-                <a:spcPct val="100000"/>
-              </a:lnSpc>
-              <a:spcAft>
-                <a:spcPts val="100"/>
-              </a:spcAft>
-              <a:defRPr sz="725">
-                <a:solidFill>
-                  <a:srgbClr val="222C38"/>
-                </a:solidFill>
-                <a:latin typeface="Microsoft YaHei"/>
-              </a:defRPr>
-            </a:pPr>
-            <a:r>
-              <a:rPr dirty="0"/>
-              <a:t>IDP2 </a:t>
-            </a:r>
-            <a:r>
-              <a:rPr dirty="0" err="1"/>
-              <a:t>全链路跑通</a:t>
-            </a:r>
-            <a:endParaRPr lang="en-US" dirty="0"/>
-          </a:p>
-          <a:p>
-            <a:pPr>
-              <a:lnSpc>
-                <a:spcPct val="100000"/>
-              </a:lnSpc>
-              <a:spcAft>
-                <a:spcPts val="100"/>
-              </a:spcAft>
-              <a:defRPr sz="725">
-                <a:solidFill>
-                  <a:srgbClr val="222C38"/>
-                </a:solidFill>
-                <a:latin typeface="Microsoft YaHei"/>
-              </a:defRPr>
-            </a:pPr>
-            <a:endParaRPr dirty="0"/>
-          </a:p>
-        </p:txBody>
-      </p:sp>
-      <p:sp>
-        <p:nvSpPr>
-          <p:cNvPr id="50" name="TextBox 41">
-            <a:extLst>
-              <a:ext uri="{FF2B5EF4-FFF2-40B4-BE49-F238E27FC236}">
-                <a16:creationId xmlns:a16="http://schemas.microsoft.com/office/drawing/2014/main" id="{D7E84284-5097-4F60-BF5C-C9A8900C7DB4}"/>
-              </a:ext>
-            </a:extLst>
-          </p:cNvPr>
+                <a:ea typeface="+mn-ea"/>
+                <a:cs typeface="+mn-cs"/>
+              </a:rPr>
+              <a:t>预算分配决策工具</a:t>
+            </a:r>
+            <a:endParaRPr kumimoji="0" sz="1040" b="0" i="0" u="none" strike="noStrike" kern="1200" cap="none" spc="0" normalizeH="0" baseline="0" noProof="0" dirty="0">
+              <a:ln>
+                <a:noFill/>
+              </a:ln>
+              <a:solidFill>
+                <a:srgbClr val="1A232D"/>
+              </a:solidFill>
+              <a:effectLst/>
+              <a:uLnTx/>
+              <a:uFillTx/>
+              <a:latin typeface="Microsoft YaHei"/>
+              <a:ea typeface="+mn-ea"/>
+              <a:cs typeface="+mn-cs"/>
+            </a:endParaRPr>
+          </a:p>
+        </p:txBody>
+      </p:sp>
+      <p:sp>
+        <p:nvSpPr>
+          <p:cNvPr id="70" name="TextBox 69"/>
           <p:cNvSpPr txBox="1"/>
           <p:nvPr/>
         </p:nvSpPr>
         <p:spPr>
           <a:xfrm>
-            <a:off x="3255264" y="3620394"/>
-            <a:ext cx="2359152" cy="488595"/>
+            <a:off x="9232104" y="4424439"/>
+            <a:ext cx="2834639" cy="256032"/>
           </a:xfrm>
           <a:prstGeom prst="rect">
             <a:avLst/>
@@ -8638,276 +7746,72 @@
           <a:noFill/>
         </p:spPr>
         <p:txBody>
-          <a:bodyPr wrap="square" lIns="0" tIns="0" rIns="0" bIns="0">
-            <a:spAutoFit/>
+          <a:bodyPr wrap="square" lIns="0" tIns="0" rIns="0" bIns="0" anchor="t">
+            <a:noAutofit/>
           </a:bodyPr>
           <a:lstStyle/>
           <a:p>
-            <a:pPr>
-              <a:spcAft>
-                <a:spcPts val="100"/>
-              </a:spcAft>
-              <a:defRPr sz="725">
-                <a:solidFill>
-                  <a:srgbClr val="222C38"/>
-                </a:solidFill>
-                <a:latin typeface="Microsoft YaHei"/>
-              </a:defRPr>
-            </a:pPr>
-            <a:r>
-              <a:rPr lang="zh-CN" altLang="en-US" dirty="0"/>
-              <a:t>★回传归因追踪监控</a:t>
-            </a:r>
-            <a:endParaRPr lang="en-US" altLang="zh-CN" dirty="0"/>
-          </a:p>
-          <a:p>
-            <a:pPr>
-              <a:spcAft>
-                <a:spcPts val="100"/>
-              </a:spcAft>
-              <a:defRPr sz="725">
-                <a:solidFill>
-                  <a:srgbClr val="222C38"/>
-                </a:solidFill>
-                <a:latin typeface="Microsoft YaHei"/>
-              </a:defRPr>
-            </a:pPr>
-            <a:r>
-              <a:rPr lang="zh-CN" altLang="en-US" dirty="0"/>
-              <a:t>投放归因监控：渠道 </a:t>
-            </a:r>
-            <a:r>
-              <a:rPr lang="en-US" altLang="zh-CN" dirty="0"/>
-              <a:t>/ Campaign overlap </a:t>
-            </a:r>
-            <a:r>
-              <a:rPr lang="zh-CN" altLang="en-US" dirty="0"/>
-              <a:t>监控</a:t>
-            </a:r>
-          </a:p>
-          <a:p>
-            <a:pPr>
+            <a:pPr marL="0" marR="0" lvl="0" indent="0" algn="l" defTabSz="914400" rtl="0" eaLnBrk="1" fontAlgn="auto" latinLnBrk="0" hangingPunct="1">
               <a:lnSpc>
                 <a:spcPct val="100000"/>
               </a:lnSpc>
+              <a:spcBef>
+                <a:spcPts val="0"/>
+              </a:spcBef>
               <a:spcAft>
-                <a:spcPts val="100"/>
+                <a:spcPts val="0"/>
               </a:spcAft>
-              <a:defRPr sz="725">
+              <a:buClrTx/>
+              <a:buSzTx/>
+              <a:buFontTx/>
+              <a:buNone/>
+              <a:tabLst/>
+              <a:defRPr/>
+            </a:pPr>
+            <a:r>
+              <a:rPr kumimoji="0" sz="1500" b="1" i="0" u="none" strike="noStrike" kern="1200" cap="none" spc="0" normalizeH="0" baseline="0" noProof="0" dirty="0" err="1">
+                <a:ln>
+                  <a:noFill/>
+                </a:ln>
                 <a:solidFill>
-                  <a:srgbClr val="222C38"/>
+                  <a:srgbClr val="1A232D"/>
                 </a:solidFill>
+                <a:effectLst/>
+                <a:uLnTx/>
+                <a:uFillTx/>
                 <a:latin typeface="Microsoft YaHei"/>
-              </a:defRPr>
-            </a:pPr>
-            <a:r>
-              <a:rPr lang="zh-CN" altLang="en-US" dirty="0"/>
-              <a:t>触达归因回传：短信 </a:t>
-            </a:r>
-            <a:r>
-              <a:rPr lang="en-US" altLang="zh-CN" dirty="0"/>
-              <a:t>/ </a:t>
-            </a:r>
-            <a:r>
-              <a:rPr lang="zh-CN" altLang="en-US" dirty="0"/>
-              <a:t>邮件 </a:t>
-            </a:r>
-            <a:r>
-              <a:rPr lang="en-US" altLang="zh-CN" dirty="0"/>
-              <a:t>/ Push / APP </a:t>
-            </a:r>
-            <a:r>
-              <a:rPr lang="zh-CN" altLang="en-US" dirty="0"/>
-              <a:t>效果监控</a:t>
-            </a:r>
-          </a:p>
-          <a:p>
-            <a:pPr>
-              <a:lnSpc>
-                <a:spcPct val="100000"/>
-              </a:lnSpc>
-              <a:spcAft>
-                <a:spcPts val="100"/>
-              </a:spcAft>
-              <a:defRPr sz="750">
-                <a:solidFill>
-                  <a:srgbClr val="222C38"/>
-                </a:solidFill>
-                <a:latin typeface="Microsoft YaHei"/>
-              </a:defRPr>
-            </a:pPr>
-            <a:endParaRPr lang="zh-CN" altLang="en-US" dirty="0"/>
-          </a:p>
-        </p:txBody>
-      </p:sp>
-      <p:sp>
-        <p:nvSpPr>
-          <p:cNvPr id="51" name="Rectangle 42">
-            <a:extLst>
-              <a:ext uri="{FF2B5EF4-FFF2-40B4-BE49-F238E27FC236}">
-                <a16:creationId xmlns:a16="http://schemas.microsoft.com/office/drawing/2014/main" id="{4F9296D8-00BD-4ABE-8241-9D69B1651F85}"/>
-              </a:ext>
-            </a:extLst>
-          </p:cNvPr>
-          <p:cNvSpPr/>
+                <a:ea typeface="+mn-ea"/>
+                <a:cs typeface="+mn-cs"/>
+              </a:rPr>
+              <a:t>风险管理</a:t>
+            </a:r>
+            <a:endParaRPr kumimoji="0" sz="1500" b="1" i="0" u="none" strike="noStrike" kern="1200" cap="none" spc="0" normalizeH="0" baseline="0" noProof="0" dirty="0">
+              <a:ln>
+                <a:noFill/>
+              </a:ln>
+              <a:solidFill>
+                <a:srgbClr val="1A232D"/>
+              </a:solidFill>
+              <a:effectLst/>
+              <a:uLnTx/>
+              <a:uFillTx/>
+              <a:latin typeface="Microsoft YaHei"/>
+              <a:ea typeface="+mn-ea"/>
+              <a:cs typeface="+mn-cs"/>
+            </a:endParaRPr>
+          </a:p>
+        </p:txBody>
+      </p:sp>
+      <p:sp>
+        <p:nvSpPr>
+          <p:cNvPr id="75" name="TextBox 74"/>
+          <p:cNvSpPr txBox="1"/>
           <p:nvPr/>
         </p:nvSpPr>
         <p:spPr>
           <a:xfrm>
-            <a:off x="6016752" y="2697480"/>
-            <a:ext cx="5321808" cy="1609344"/>
-          </a:xfrm>
-          <a:prstGeom prst="rect">
-            <a:avLst/>
-          </a:prstGeom>
-          <a:solidFill>
-            <a:srgbClr val="FFFFFF"/>
-          </a:solidFill>
-          <a:ln w="7620">
-            <a:solidFill>
-              <a:srgbClr val="D6DBE1"/>
-            </a:solidFill>
-          </a:ln>
-        </p:spPr>
-        <p:style>
-          <a:lnRef idx="1">
-            <a:schemeClr val="accent1"/>
-          </a:lnRef>
-          <a:fillRef idx="3">
-            <a:schemeClr val="accent1"/>
-          </a:fillRef>
-          <a:effectRef idx="2">
-            <a:schemeClr val="accent1"/>
-          </a:effectRef>
-          <a:fontRef idx="minor">
-            <a:schemeClr val="lt1"/>
-          </a:fontRef>
-        </p:style>
-        <p:txBody>
-          <a:bodyPr rtlCol="0" anchor="ctr"/>
-          <a:lstStyle/>
-          <a:p>
-            <a:pPr algn="ctr"/>
-            <a:endParaRPr/>
-          </a:p>
-        </p:txBody>
-      </p:sp>
-      <p:sp>
-        <p:nvSpPr>
-          <p:cNvPr id="52" name="Rectangle 43">
-            <a:extLst>
-              <a:ext uri="{FF2B5EF4-FFF2-40B4-BE49-F238E27FC236}">
-                <a16:creationId xmlns:a16="http://schemas.microsoft.com/office/drawing/2014/main" id="{9572F32F-556C-4529-B1BB-BF51158AB8E8}"/>
-              </a:ext>
-            </a:extLst>
-          </p:cNvPr>
-          <p:cNvSpPr/>
-          <p:nvPr/>
-        </p:nvSpPr>
-        <p:spPr>
-          <a:xfrm>
-            <a:off x="6016752" y="2697480"/>
-            <a:ext cx="5321808" cy="50292"/>
-          </a:xfrm>
-          <a:prstGeom prst="rect">
-            <a:avLst/>
-          </a:prstGeom>
-          <a:solidFill>
-            <a:srgbClr val="0C3658"/>
-          </a:solidFill>
-          <a:ln>
-            <a:noFill/>
-          </a:ln>
-        </p:spPr>
-        <p:style>
-          <a:lnRef idx="1">
-            <a:schemeClr val="accent1"/>
-          </a:lnRef>
-          <a:fillRef idx="3">
-            <a:schemeClr val="accent1"/>
-          </a:fillRef>
-          <a:effectRef idx="2">
-            <a:schemeClr val="accent1"/>
-          </a:effectRef>
-          <a:fontRef idx="minor">
-            <a:schemeClr val="lt1"/>
-          </a:fontRef>
-        </p:style>
-        <p:txBody>
-          <a:bodyPr rtlCol="0" anchor="ctr"/>
-          <a:lstStyle/>
-          <a:p>
-            <a:pPr algn="ctr"/>
-            <a:endParaRPr/>
-          </a:p>
-        </p:txBody>
-      </p:sp>
-      <p:sp>
-        <p:nvSpPr>
-          <p:cNvPr id="53" name="Rectangle 44">
-            <a:extLst>
-              <a:ext uri="{FF2B5EF4-FFF2-40B4-BE49-F238E27FC236}">
-                <a16:creationId xmlns:a16="http://schemas.microsoft.com/office/drawing/2014/main" id="{BD65F768-81F5-4839-88D7-EC505D2FA345}"/>
-              </a:ext>
-            </a:extLst>
-          </p:cNvPr>
-          <p:cNvSpPr/>
-          <p:nvPr/>
-        </p:nvSpPr>
-        <p:spPr>
-          <a:xfrm>
-            <a:off x="6163056" y="2852928"/>
-            <a:ext cx="292608" cy="228600"/>
-          </a:xfrm>
-          <a:prstGeom prst="rect">
-            <a:avLst/>
-          </a:prstGeom>
-          <a:solidFill>
-            <a:srgbClr val="EFF5FB"/>
-          </a:solidFill>
-          <a:ln>
-            <a:noFill/>
-          </a:ln>
-        </p:spPr>
-        <p:style>
-          <a:lnRef idx="1">
-            <a:schemeClr val="accent1"/>
-          </a:lnRef>
-          <a:fillRef idx="3">
-            <a:schemeClr val="accent1"/>
-          </a:fillRef>
-          <a:effectRef idx="2">
-            <a:schemeClr val="accent1"/>
-          </a:effectRef>
-          <a:fontRef idx="minor">
-            <a:schemeClr val="lt1"/>
-          </a:fontRef>
-        </p:style>
-        <p:txBody>
-          <a:bodyPr rtlCol="0" anchor="ctr"/>
-          <a:lstStyle/>
-          <a:p>
-            <a:pPr algn="ctr"/>
-            <a:endParaRPr/>
-          </a:p>
-        </p:txBody>
-      </p:sp>
-      <p:sp>
-        <p:nvSpPr>
-          <p:cNvPr id="54" name="TextBox 45">
-            <a:extLst>
-              <a:ext uri="{FF2B5EF4-FFF2-40B4-BE49-F238E27FC236}">
-                <a16:creationId xmlns:a16="http://schemas.microsoft.com/office/drawing/2014/main" id="{99C344D2-D6DB-488A-B16C-3DC295E6429A}"/>
-              </a:ext>
-            </a:extLst>
-          </p:cNvPr>
-          <p:cNvSpPr txBox="1"/>
-          <p:nvPr/>
-        </p:nvSpPr>
-        <p:spPr>
-          <a:xfrm>
-            <a:off x="6190488" y="2884932"/>
-            <a:ext cx="237744" cy="146304"/>
+            <a:off x="9236202" y="4798287"/>
+            <a:ext cx="2175510" cy="395493"/>
           </a:xfrm>
           <a:prstGeom prst="rect">
             <a:avLst/>
@@ -8915,40 +7819,131 @@
           <a:noFill/>
         </p:spPr>
         <p:txBody>
-          <a:bodyPr wrap="square" lIns="0" tIns="0" rIns="0" bIns="0">
+          <a:bodyPr wrap="square" lIns="18288" tIns="18288" rIns="18288" bIns="18288">
             <a:spAutoFit/>
           </a:bodyPr>
           <a:lstStyle/>
           <a:p>
-            <a:pPr algn="ctr"/>
-            <a:r>
-              <a:rPr sz="740" b="1">
+            <a:pPr marL="0" marR="0" lvl="0" indent="0" algn="l" defTabSz="914400" rtl="0" eaLnBrk="1" fontAlgn="auto" latinLnBrk="0" hangingPunct="1">
+              <a:lnSpc>
+                <a:spcPct val="100000"/>
+              </a:lnSpc>
+              <a:spcBef>
+                <a:spcPts val="0"/>
+              </a:spcBef>
+              <a:spcAft>
+                <a:spcPts val="300"/>
+              </a:spcAft>
+              <a:buClrTx/>
+              <a:buSzTx/>
+              <a:buFontTx/>
+              <a:buNone/>
+              <a:tabLst/>
+              <a:defRPr/>
+            </a:pPr>
+            <a:r>
+              <a:rPr kumimoji="0" sz="1040" b="0" i="0" u="none" strike="noStrike" kern="1200" cap="none" spc="0" normalizeH="0" baseline="0" noProof="0" dirty="0">
+                <a:ln>
+                  <a:noFill/>
+                </a:ln>
                 <a:solidFill>
-                  <a:srgbClr val="144970"/>
+                  <a:srgbClr val="1A232D"/>
                 </a:solidFill>
+                <a:effectLst/>
+                <a:uLnTx/>
+                <a:uFillTx/>
                 <a:latin typeface="Microsoft YaHei"/>
+                <a:ea typeface="+mn-ea"/>
+                <a:cs typeface="+mn-cs"/>
               </a:rPr>
-              <a:t>02</a:t>
-            </a:r>
-          </a:p>
-        </p:txBody>
-      </p:sp>
-      <p:sp>
-        <p:nvSpPr>
-          <p:cNvPr id="55" name="TextBox 46">
-            <a:extLst>
-              <a:ext uri="{FF2B5EF4-FFF2-40B4-BE49-F238E27FC236}">
-                <a16:creationId xmlns:a16="http://schemas.microsoft.com/office/drawing/2014/main" id="{FBB73010-9F36-4BDF-9997-C2B7F1C23176}"/>
-              </a:ext>
-            </a:extLst>
-          </p:cNvPr>
+              <a:t>PD </a:t>
+            </a:r>
+            <a:r>
+              <a:rPr kumimoji="0" sz="1040" b="0" i="0" u="none" strike="noStrike" kern="1200" cap="none" spc="0" normalizeH="0" baseline="0" noProof="0" dirty="0" err="1">
+                <a:ln>
+                  <a:noFill/>
+                </a:ln>
+                <a:solidFill>
+                  <a:srgbClr val="1A232D"/>
+                </a:solidFill>
+                <a:effectLst/>
+                <a:uLnTx/>
+                <a:uFillTx/>
+                <a:latin typeface="Microsoft YaHei"/>
+                <a:ea typeface="+mn-ea"/>
+                <a:cs typeface="+mn-cs"/>
+              </a:rPr>
+              <a:t>模型迭代</a:t>
+            </a:r>
+            <a:endParaRPr lang="en-US" sz="1040" dirty="0">
+              <a:solidFill>
+                <a:srgbClr val="1A232D"/>
+              </a:solidFill>
+              <a:latin typeface="Microsoft YaHei"/>
+            </a:endParaRPr>
+          </a:p>
+          <a:p>
+            <a:pPr marL="0" marR="0" lvl="0" indent="0" algn="l" defTabSz="914400" rtl="0" eaLnBrk="1" fontAlgn="auto" latinLnBrk="0" hangingPunct="1">
+              <a:lnSpc>
+                <a:spcPct val="100000"/>
+              </a:lnSpc>
+              <a:spcBef>
+                <a:spcPts val="0"/>
+              </a:spcBef>
+              <a:spcAft>
+                <a:spcPts val="300"/>
+              </a:spcAft>
+              <a:buClrTx/>
+              <a:buSzTx/>
+              <a:buFontTx/>
+              <a:buNone/>
+              <a:tabLst/>
+              <a:defRPr/>
+            </a:pPr>
+            <a:r>
+              <a:rPr kumimoji="0" sz="1040" b="0" i="0" u="none" strike="noStrike" kern="1200" cap="none" spc="0" normalizeH="0" baseline="0" noProof="0" dirty="0" err="1">
+                <a:ln>
+                  <a:noFill/>
+                </a:ln>
+                <a:solidFill>
+                  <a:srgbClr val="1A232D"/>
+                </a:solidFill>
+                <a:effectLst/>
+                <a:uLnTx/>
+                <a:uFillTx/>
+                <a:latin typeface="Microsoft YaHei"/>
+                <a:ea typeface="+mn-ea"/>
+                <a:cs typeface="+mn-cs"/>
+              </a:rPr>
+              <a:t>贷中银行流水的查询</a:t>
+            </a:r>
+            <a:endParaRPr kumimoji="0" sz="1040" b="0" i="0" u="none" strike="noStrike" kern="1200" cap="none" spc="0" normalizeH="0" baseline="0" noProof="0" dirty="0">
+              <a:ln>
+                <a:noFill/>
+              </a:ln>
+              <a:solidFill>
+                <a:srgbClr val="1A232D"/>
+              </a:solidFill>
+              <a:effectLst/>
+              <a:uLnTx/>
+              <a:uFillTx/>
+              <a:latin typeface="Microsoft YaHei"/>
+              <a:ea typeface="+mn-ea"/>
+              <a:cs typeface="+mn-cs"/>
+            </a:endParaRPr>
+          </a:p>
+        </p:txBody>
+      </p:sp>
+      <p:sp>
+        <p:nvSpPr>
+          <p:cNvPr id="78" name="TextBox 77"/>
           <p:cNvSpPr txBox="1"/>
           <p:nvPr/>
         </p:nvSpPr>
         <p:spPr>
           <a:xfrm>
-            <a:off x="6519672" y="2834640"/>
-            <a:ext cx="1097280" cy="219456"/>
+            <a:off x="9236202" y="5495999"/>
+            <a:ext cx="2046699" cy="196977"/>
           </a:xfrm>
           <a:prstGeom prst="rect">
             <a:avLst/>
@@ -8956,30 +7951,102 @@
           <a:noFill/>
         </p:spPr>
         <p:txBody>
-          <a:bodyPr wrap="square" lIns="0" tIns="0" rIns="0" bIns="0">
+          <a:bodyPr wrap="square" lIns="18288" tIns="18288" rIns="18288" bIns="18288">
             <a:spAutoFit/>
           </a:bodyPr>
           <a:lstStyle/>
           <a:p>
-            <a:pPr algn="l"/>
-            <a:r>
-              <a:rPr sz="1320" b="1">
+            <a:pPr marL="0" marR="0" lvl="0" indent="0" algn="l" defTabSz="914400" rtl="0" eaLnBrk="1" fontAlgn="auto" latinLnBrk="0" hangingPunct="1">
+              <a:lnSpc>
+                <a:spcPct val="100000"/>
+              </a:lnSpc>
+              <a:spcBef>
+                <a:spcPts val="0"/>
+              </a:spcBef>
+              <a:spcAft>
+                <a:spcPts val="300"/>
+              </a:spcAft>
+              <a:buClrTx/>
+              <a:buSzTx/>
+              <a:buFontTx/>
+              <a:buNone/>
+              <a:tabLst/>
+              <a:defRPr/>
+            </a:pPr>
+            <a:r>
+              <a:rPr kumimoji="0" sz="1040" b="0" i="0" u="none" strike="noStrike" kern="1200" cap="none" spc="0" normalizeH="0" baseline="0" noProof="0" dirty="0" err="1">
+                <a:ln>
+                  <a:noFill/>
+                </a:ln>
                 <a:solidFill>
-                  <a:srgbClr val="222C38"/>
+                  <a:srgbClr val="1A232D"/>
                 </a:solidFill>
+                <a:effectLst/>
+                <a:uLnTx/>
+                <a:uFillTx/>
                 <a:latin typeface="Microsoft YaHei"/>
+                <a:ea typeface="+mn-ea"/>
+                <a:cs typeface="+mn-cs"/>
               </a:rPr>
-              <a:t>投放市场</a:t>
-            </a:r>
-          </a:p>
-        </p:txBody>
-      </p:sp>
-      <p:sp>
-        <p:nvSpPr>
-          <p:cNvPr id="56" name="TextBox 47">
-            <a:extLst>
-              <a:ext uri="{FF2B5EF4-FFF2-40B4-BE49-F238E27FC236}">
-                <a16:creationId xmlns:a16="http://schemas.microsoft.com/office/drawing/2014/main" id="{D2E0C7AA-8DCA-4F50-BF0D-FF7FB300D0F0}"/>
+              <a:t>风险</a:t>
+            </a:r>
+            <a:r>
+              <a:rPr kumimoji="0" sz="1040" b="0" i="0" u="none" strike="noStrike" kern="1200" cap="none" spc="0" normalizeH="0" baseline="0" noProof="0" dirty="0">
+                <a:ln>
+                  <a:noFill/>
+                </a:ln>
+                <a:solidFill>
+                  <a:srgbClr val="1A232D"/>
+                </a:solidFill>
+                <a:effectLst/>
+                <a:uLnTx/>
+                <a:uFillTx/>
+                <a:latin typeface="Microsoft YaHei"/>
+                <a:ea typeface="+mn-ea"/>
+                <a:cs typeface="+mn-cs"/>
+              </a:rPr>
+              <a:t> × </a:t>
+            </a:r>
+            <a:r>
+              <a:rPr kumimoji="0" sz="1040" b="0" i="0" u="none" strike="noStrike" kern="1200" cap="none" spc="0" normalizeH="0" baseline="0" noProof="0" dirty="0" err="1">
+                <a:ln>
+                  <a:noFill/>
+                </a:ln>
+                <a:solidFill>
+                  <a:srgbClr val="1A232D"/>
+                </a:solidFill>
+                <a:effectLst/>
+                <a:uLnTx/>
+                <a:uFillTx/>
+                <a:latin typeface="Microsoft YaHei"/>
+                <a:ea typeface="+mn-ea"/>
+                <a:cs typeface="+mn-cs"/>
+              </a:rPr>
+              <a:t>价值联合额度策略</a:t>
+            </a:r>
+            <a:endParaRPr kumimoji="0" sz="1040" b="0" i="0" u="none" strike="noStrike" kern="1200" cap="none" spc="0" normalizeH="0" baseline="0" noProof="0" dirty="0">
+              <a:ln>
+                <a:noFill/>
+              </a:ln>
+              <a:solidFill>
+                <a:srgbClr val="1A232D"/>
+              </a:solidFill>
+              <a:effectLst/>
+              <a:uLnTx/>
+              <a:uFillTx/>
+              <a:latin typeface="Microsoft YaHei"/>
+              <a:ea typeface="+mn-ea"/>
+              <a:cs typeface="+mn-cs"/>
+            </a:endParaRPr>
+          </a:p>
+        </p:txBody>
+      </p:sp>
+      <p:sp>
+        <p:nvSpPr>
+          <p:cNvPr id="80" name="文本框 79">
+            <a:extLst>
+              <a:ext uri="{FF2B5EF4-FFF2-40B4-BE49-F238E27FC236}">
+                <a16:creationId xmlns:a16="http://schemas.microsoft.com/office/drawing/2014/main" id="{5AB3E199-8D58-44FD-B9F3-8A2A282D786C}"/>
               </a:ext>
             </a:extLst>
           </p:cNvPr>
@@ -8988,8 +8055,8 @@
         </p:nvSpPr>
         <p:spPr>
           <a:xfrm>
-            <a:off x="6519672" y="3081528"/>
-            <a:ext cx="4572000" cy="118494"/>
+            <a:off x="9078204" y="2522828"/>
+            <a:ext cx="1492857" cy="252377"/>
           </a:xfrm>
           <a:prstGeom prst="rect">
             <a:avLst/>
@@ -8997,146 +8064,44 @@
           <a:noFill/>
         </p:spPr>
         <p:txBody>
-          <a:bodyPr wrap="square" lIns="0" tIns="0" rIns="0" bIns="0">
+          <a:bodyPr wrap="square">
             <a:spAutoFit/>
           </a:bodyPr>
           <a:lstStyle/>
           <a:p>
-            <a:pPr algn="l"/>
-            <a:r>
-              <a:rPr sz="770" b="0" dirty="0" err="1">
+            <a:pPr>
+              <a:spcAft>
+                <a:spcPts val="300"/>
+              </a:spcAft>
+            </a:pPr>
+            <a:r>
+              <a:rPr lang="zh-CN" altLang="en-US" sz="1040" dirty="0">
                 <a:solidFill>
-                  <a:srgbClr val="606976"/>
+                  <a:srgbClr val="1A232D"/>
                 </a:solidFill>
                 <a:latin typeface="Microsoft YaHei"/>
               </a:rPr>
-              <a:t>目标：优质增量获取</a:t>
-            </a:r>
-            <a:endParaRPr sz="770" b="0" dirty="0">
-              <a:solidFill>
-                <a:srgbClr val="606976"/>
-              </a:solidFill>
-              <a:latin typeface="Microsoft YaHei"/>
-            </a:endParaRPr>
-          </a:p>
-        </p:txBody>
-      </p:sp>
-      <p:sp>
-        <p:nvSpPr>
-          <p:cNvPr id="57" name="Rectangle 48">
-            <a:extLst>
-              <a:ext uri="{FF2B5EF4-FFF2-40B4-BE49-F238E27FC236}">
-                <a16:creationId xmlns:a16="http://schemas.microsoft.com/office/drawing/2014/main" id="{04CDC3B3-69FE-469C-B320-23C8BE88CA38}"/>
-              </a:ext>
-            </a:extLst>
-          </p:cNvPr>
-          <p:cNvSpPr/>
+              <a:t>贷中银行流水的查询</a:t>
+            </a:r>
+          </a:p>
+        </p:txBody>
+      </p:sp>
+      <p:sp>
+        <p:nvSpPr>
+          <p:cNvPr id="81" name="TextBox 41">
+            <a:extLst>
+              <a:ext uri="{FF2B5EF4-FFF2-40B4-BE49-F238E27FC236}">
+                <a16:creationId xmlns:a16="http://schemas.microsoft.com/office/drawing/2014/main" id="{ACDC85F0-58BB-4524-A88E-38108B1B486E}"/>
+              </a:ext>
+            </a:extLst>
+          </p:cNvPr>
+          <p:cNvSpPr txBox="1"/>
           <p:nvPr/>
         </p:nvSpPr>
         <p:spPr>
           <a:xfrm>
-            <a:off x="6163056" y="3319272"/>
-            <a:ext cx="5029200" cy="9144"/>
-          </a:xfrm>
-          <a:prstGeom prst="rect">
-            <a:avLst/>
-          </a:prstGeom>
-          <a:solidFill>
-            <a:srgbClr val="D6DBE1"/>
-          </a:solidFill>
-          <a:ln>
-            <a:noFill/>
-          </a:ln>
-        </p:spPr>
-        <p:style>
-          <a:lnRef idx="1">
-            <a:schemeClr val="accent1"/>
-          </a:lnRef>
-          <a:fillRef idx="3">
-            <a:schemeClr val="accent1"/>
-          </a:fillRef>
-          <a:effectRef idx="2">
-            <a:schemeClr val="accent1"/>
-          </a:effectRef>
-          <a:fontRef idx="minor">
-            <a:schemeClr val="lt1"/>
-          </a:fontRef>
-        </p:style>
-        <p:txBody>
-          <a:bodyPr rtlCol="0" anchor="ctr"/>
-          <a:lstStyle/>
-          <a:p>
-            <a:pPr algn="ctr"/>
-            <a:endParaRPr/>
-          </a:p>
-        </p:txBody>
-      </p:sp>
-      <p:sp>
-        <p:nvSpPr>
-          <p:cNvPr id="58" name="Rectangle 49">
-            <a:extLst>
-              <a:ext uri="{FF2B5EF4-FFF2-40B4-BE49-F238E27FC236}">
-                <a16:creationId xmlns:a16="http://schemas.microsoft.com/office/drawing/2014/main" id="{863605E9-FB91-40E6-B40A-6FC10594D030}"/>
-              </a:ext>
-            </a:extLst>
-          </p:cNvPr>
-          <p:cNvSpPr/>
-          <p:nvPr/>
-        </p:nvSpPr>
-        <p:spPr>
-          <a:xfrm>
-            <a:off x="6163056" y="3438144"/>
-            <a:ext cx="54864" cy="118872"/>
-          </a:xfrm>
-          <a:prstGeom prst="rect">
-            <a:avLst/>
-          </a:prstGeom>
-          <a:solidFill>
-            <a:srgbClr val="E2A600"/>
-          </a:solidFill>
-          <a:ln>
-            <a:noFill/>
-          </a:ln>
-        </p:spPr>
-        <p:style>
-          <a:lnRef idx="1">
-            <a:schemeClr val="accent1"/>
-          </a:lnRef>
-          <a:fillRef idx="3">
-            <a:schemeClr val="accent1"/>
-          </a:fillRef>
-          <a:effectRef idx="2">
-            <a:schemeClr val="accent1"/>
-          </a:effectRef>
-          <a:fontRef idx="minor">
-            <a:schemeClr val="lt1"/>
-          </a:fontRef>
-        </p:style>
-        <p:txBody>
-          <a:bodyPr rtlCol="0" anchor="ctr"/>
-          <a:lstStyle/>
-          <a:p>
-            <a:pPr algn="ctr"/>
-            <a:endParaRPr/>
-          </a:p>
-        </p:txBody>
-      </p:sp>
-      <p:sp>
-        <p:nvSpPr>
-          <p:cNvPr id="59" name="TextBox 50">
-            <a:extLst>
-              <a:ext uri="{FF2B5EF4-FFF2-40B4-BE49-F238E27FC236}">
-                <a16:creationId xmlns:a16="http://schemas.microsoft.com/office/drawing/2014/main" id="{0C04BD53-2A28-4814-A3A2-1479EF2DA9CA}"/>
-              </a:ext>
-            </a:extLst>
-          </p:cNvPr>
-          <p:cNvSpPr txBox="1"/>
-          <p:nvPr/>
-        </p:nvSpPr>
-        <p:spPr>
-          <a:xfrm>
-            <a:off x="6245352" y="3419856"/>
-            <a:ext cx="548640" cy="116955"/>
+            <a:off x="539497" y="1283435"/>
+            <a:ext cx="947398" cy="256032"/>
           </a:xfrm>
           <a:prstGeom prst="rect">
             <a:avLst/>
@@ -9144,96 +8109,78 @@
           <a:noFill/>
         </p:spPr>
         <p:txBody>
-          <a:bodyPr wrap="square" lIns="0" tIns="0" rIns="0" bIns="0">
-            <a:spAutoFit/>
+          <a:bodyPr wrap="square" lIns="0" tIns="0" rIns="0" bIns="0" anchor="t">
+            <a:noAutofit/>
           </a:bodyPr>
           <a:lstStyle/>
           <a:p>
-            <a:pPr algn="l"/>
-            <a:r>
-              <a:rPr lang="zh-CN" altLang="en-US" sz="760" b="1" dirty="0">
+            <a:pPr marL="0" marR="0" lvl="0" indent="0" algn="l" defTabSz="914400" rtl="0" eaLnBrk="1" fontAlgn="auto" latinLnBrk="0" hangingPunct="1">
+              <a:lnSpc>
+                <a:spcPct val="100000"/>
+              </a:lnSpc>
+              <a:spcBef>
+                <a:spcPts val="0"/>
+              </a:spcBef>
+              <a:spcAft>
+                <a:spcPts val="0"/>
+              </a:spcAft>
+              <a:buClrTx/>
+              <a:buSzTx/>
+              <a:buFontTx/>
+              <a:buNone/>
+              <a:tabLst/>
+              <a:defRPr/>
+            </a:pPr>
+            <a:r>
+              <a:rPr kumimoji="0" lang="zh-CN" altLang="en-US" sz="1500" b="1" i="0" u="none" strike="noStrike" kern="1200" cap="none" spc="0" normalizeH="0" baseline="0" noProof="0" dirty="0">
+                <a:ln>
+                  <a:noFill/>
+                </a:ln>
                 <a:solidFill>
-                  <a:srgbClr val="144970"/>
+                  <a:srgbClr val="1A232D"/>
                 </a:solidFill>
+                <a:effectLst/>
+                <a:uLnTx/>
+                <a:uFillTx/>
                 <a:latin typeface="Microsoft YaHei"/>
+                <a:ea typeface="+mn-ea"/>
+                <a:cs typeface="+mn-cs"/>
               </a:rPr>
-              <a:t>人群圈选</a:t>
-            </a:r>
-            <a:endParaRPr sz="760" b="1" dirty="0">
+              <a:t>模型现状</a:t>
+            </a:r>
+            <a:endParaRPr kumimoji="0" sz="1500" b="1" i="0" u="none" strike="noStrike" kern="1200" cap="none" spc="0" normalizeH="0" baseline="0" noProof="0" dirty="0">
+              <a:ln>
+                <a:noFill/>
+              </a:ln>
               <a:solidFill>
-                <a:srgbClr val="144970"/>
+                <a:srgbClr val="1A232D"/>
               </a:solidFill>
+              <a:effectLst/>
+              <a:uLnTx/>
+              <a:uFillTx/>
               <a:latin typeface="Microsoft YaHei"/>
+              <a:ea typeface="+mn-ea"/>
+              <a:cs typeface="+mn-cs"/>
             </a:endParaRPr>
           </a:p>
         </p:txBody>
       </p:sp>
       <p:sp>
         <p:nvSpPr>
-          <p:cNvPr id="60" name="Rectangle 51">
-            <a:extLst>
-              <a:ext uri="{FF2B5EF4-FFF2-40B4-BE49-F238E27FC236}">
-                <a16:creationId xmlns:a16="http://schemas.microsoft.com/office/drawing/2014/main" id="{00B7953A-7687-4E09-B3C8-E5694409BDCE}"/>
-              </a:ext>
-            </a:extLst>
-          </p:cNvPr>
-          <p:cNvSpPr/>
+          <p:cNvPr id="82" name="TextBox 41">
+            <a:extLst>
+              <a:ext uri="{FF2B5EF4-FFF2-40B4-BE49-F238E27FC236}">
+                <a16:creationId xmlns:a16="http://schemas.microsoft.com/office/drawing/2014/main" id="{65BE194D-B781-4E44-B84A-C7A4B86C2085}"/>
+              </a:ext>
+            </a:extLst>
+          </p:cNvPr>
+          <p:cNvSpPr txBox="1"/>
           <p:nvPr/>
         </p:nvSpPr>
         <p:spPr>
           <a:xfrm>
-            <a:off x="8741664" y="3438144"/>
-            <a:ext cx="54864" cy="118872"/>
-          </a:xfrm>
-          <a:prstGeom prst="rect">
-            <a:avLst/>
-          </a:prstGeom>
-          <a:solidFill>
-            <a:srgbClr val="E2A600"/>
-          </a:solidFill>
-          <a:ln>
-            <a:noFill/>
-          </a:ln>
-        </p:spPr>
-        <p:style>
-          <a:lnRef idx="1">
-            <a:schemeClr val="accent1"/>
-          </a:lnRef>
-          <a:fillRef idx="3">
-            <a:schemeClr val="accent1"/>
-          </a:fillRef>
-          <a:effectRef idx="2">
-            <a:schemeClr val="accent1"/>
-          </a:effectRef>
-          <a:fontRef idx="minor">
-            <a:schemeClr val="lt1"/>
-          </a:fontRef>
-        </p:style>
-        <p:txBody>
-          <a:bodyPr rtlCol="0" anchor="ctr"/>
-          <a:lstStyle/>
-          <a:p>
-            <a:pPr algn="ctr"/>
-            <a:endParaRPr/>
-          </a:p>
-        </p:txBody>
-      </p:sp>
-      <p:sp>
-        <p:nvSpPr>
-          <p:cNvPr id="61" name="TextBox 52">
-            <a:extLst>
-              <a:ext uri="{FF2B5EF4-FFF2-40B4-BE49-F238E27FC236}">
-                <a16:creationId xmlns:a16="http://schemas.microsoft.com/office/drawing/2014/main" id="{6D827F8D-4894-4232-B860-661A6BD2DB95}"/>
-              </a:ext>
-            </a:extLst>
-          </p:cNvPr>
-          <p:cNvSpPr txBox="1"/>
-          <p:nvPr/>
-        </p:nvSpPr>
-        <p:spPr>
-          <a:xfrm>
-            <a:off x="8823960" y="3438774"/>
-            <a:ext cx="548640" cy="116955"/>
+            <a:off x="8877234" y="1073366"/>
+            <a:ext cx="947398" cy="256032"/>
           </a:xfrm>
           <a:prstGeom prst="rect">
             <a:avLst/>
@@ -9241,1589 +8188,66 @@
           <a:noFill/>
         </p:spPr>
         <p:txBody>
-          <a:bodyPr wrap="square" lIns="0" tIns="0" rIns="0" bIns="0">
-            <a:spAutoFit/>
+          <a:bodyPr wrap="square" lIns="0" tIns="0" rIns="0" bIns="0" anchor="t">
+            <a:noAutofit/>
           </a:bodyPr>
           <a:lstStyle/>
           <a:p>
-            <a:pPr algn="l"/>
-            <a:r>
-              <a:rPr lang="zh-CN" altLang="en-US" sz="760" b="1" dirty="0">
-                <a:solidFill>
-                  <a:srgbClr val="144970"/>
-                </a:solidFill>
-                <a:latin typeface="Microsoft YaHei"/>
-              </a:rPr>
-              <a:t>出价优化</a:t>
-            </a:r>
-            <a:endParaRPr sz="760" b="1" dirty="0">
-              <a:solidFill>
-                <a:srgbClr val="144970"/>
-              </a:solidFill>
-              <a:latin typeface="Microsoft YaHei"/>
-            </a:endParaRPr>
-          </a:p>
-        </p:txBody>
-      </p:sp>
-      <p:sp>
-        <p:nvSpPr>
-          <p:cNvPr id="62" name="TextBox 53">
-            <a:extLst>
-              <a:ext uri="{FF2B5EF4-FFF2-40B4-BE49-F238E27FC236}">
-                <a16:creationId xmlns:a16="http://schemas.microsoft.com/office/drawing/2014/main" id="{054564E6-0789-45E2-8E1F-B2D53A33DF14}"/>
-              </a:ext>
-            </a:extLst>
-          </p:cNvPr>
-          <p:cNvSpPr txBox="1"/>
-          <p:nvPr/>
-        </p:nvSpPr>
-        <p:spPr>
-          <a:xfrm>
-            <a:off x="6163056" y="3639312"/>
-            <a:ext cx="2359152" cy="243656"/>
-          </a:xfrm>
-          <a:prstGeom prst="rect">
-            <a:avLst/>
-          </a:prstGeom>
-          <a:noFill/>
-        </p:spPr>
-        <p:txBody>
-          <a:bodyPr wrap="square" lIns="0" tIns="0" rIns="0" bIns="0">
-            <a:spAutoFit/>
-          </a:bodyPr>
-          <a:lstStyle/>
-          <a:p>
-            <a:pPr>
+            <a:pPr marL="0" marR="0" lvl="0" indent="0" algn="l" defTabSz="914400" rtl="0" eaLnBrk="1" fontAlgn="auto" latinLnBrk="0" hangingPunct="1">
               <a:lnSpc>
                 <a:spcPct val="100000"/>
               </a:lnSpc>
+              <a:spcBef>
+                <a:spcPts val="0"/>
+              </a:spcBef>
               <a:spcAft>
-                <a:spcPts val="100"/>
+                <a:spcPts val="0"/>
               </a:spcAft>
-              <a:defRPr sz="750">
+              <a:buClrTx/>
+              <a:buSzTx/>
+              <a:buFontTx/>
+              <a:buNone/>
+              <a:tabLst/>
+              <a:defRPr/>
+            </a:pPr>
+            <a:r>
+              <a:rPr kumimoji="0" lang="zh-CN" altLang="en-US" sz="1500" b="1" i="0" u="none" strike="noStrike" kern="1200" cap="none" spc="0" normalizeH="0" baseline="0" noProof="0" dirty="0">
+                <a:ln>
+                  <a:noFill/>
+                </a:ln>
                 <a:solidFill>
-                  <a:srgbClr val="222C38"/>
+                  <a:srgbClr val="1A232D"/>
                 </a:solidFill>
+                <a:effectLst/>
+                <a:uLnTx/>
+                <a:uFillTx/>
                 <a:latin typeface="Microsoft YaHei"/>
-              </a:defRPr>
-            </a:pPr>
-            <a:r>
-              <a:rPr dirty="0"/>
-              <a:t>★</a:t>
-            </a:r>
-            <a:r>
-              <a:rPr lang="en-US" dirty="0"/>
-              <a:t> </a:t>
-            </a:r>
-            <a:r>
-              <a:rPr lang="zh-CN" altLang="en-US" dirty="0"/>
-              <a:t>高价值人群圈选</a:t>
-            </a:r>
-            <a:r>
-              <a:rPr dirty="0"/>
-              <a:t>：</a:t>
-            </a:r>
-            <a:r>
-              <a:rPr dirty="0" err="1"/>
-              <a:t>输出可</a:t>
-            </a:r>
-            <a:r>
-              <a:rPr lang="zh-CN" altLang="en-US" dirty="0"/>
-              <a:t>回传</a:t>
-            </a:r>
-            <a:r>
-              <a:rPr dirty="0" err="1"/>
-              <a:t>人群包</a:t>
-            </a:r>
-            <a:endParaRPr lang="en-US" dirty="0"/>
-          </a:p>
-          <a:p>
-            <a:pPr>
-              <a:spcAft>
-                <a:spcPts val="100"/>
-              </a:spcAft>
-              <a:defRPr sz="750">
-                <a:solidFill>
-                  <a:srgbClr val="222C38"/>
-                </a:solidFill>
-                <a:latin typeface="Microsoft YaHei"/>
-              </a:defRPr>
-            </a:pPr>
-            <a:r>
-              <a:rPr lang="en-US" altLang="zh-CN" dirty="0"/>
-              <a:t>Lead Partner </a:t>
-            </a:r>
-            <a:r>
-              <a:rPr lang="zh-CN" altLang="en-US" dirty="0"/>
-              <a:t>模型</a:t>
-            </a:r>
-          </a:p>
-        </p:txBody>
-      </p:sp>
-      <p:sp>
-        <p:nvSpPr>
-          <p:cNvPr id="63" name="TextBox 54">
-            <a:extLst>
-              <a:ext uri="{FF2B5EF4-FFF2-40B4-BE49-F238E27FC236}">
-                <a16:creationId xmlns:a16="http://schemas.microsoft.com/office/drawing/2014/main" id="{9AC1C6D8-6D5B-4F91-82B5-A750BDAA5BE0}"/>
-              </a:ext>
-            </a:extLst>
-          </p:cNvPr>
-          <p:cNvSpPr txBox="1"/>
-          <p:nvPr/>
-        </p:nvSpPr>
-        <p:spPr>
-          <a:xfrm>
-            <a:off x="8741664" y="3639312"/>
-            <a:ext cx="2359152" cy="243656"/>
-          </a:xfrm>
-          <a:prstGeom prst="rect">
-            <a:avLst/>
-          </a:prstGeom>
-          <a:noFill/>
-        </p:spPr>
-        <p:txBody>
-          <a:bodyPr wrap="square" lIns="0" tIns="0" rIns="0" bIns="0">
-            <a:spAutoFit/>
-          </a:bodyPr>
-          <a:lstStyle/>
-          <a:p>
-            <a:pPr>
-              <a:lnSpc>
-                <a:spcPct val="100000"/>
-              </a:lnSpc>
-              <a:spcAft>
-                <a:spcPts val="100"/>
-              </a:spcAft>
-              <a:defRPr sz="750">
-                <a:solidFill>
-                  <a:srgbClr val="222C38"/>
-                </a:solidFill>
-                <a:latin typeface="Microsoft YaHei"/>
-              </a:defRPr>
-            </a:pPr>
-            <a:r>
-              <a:rPr lang="zh-CN" altLang="en-US" dirty="0"/>
-              <a:t>★ 边际 </a:t>
-            </a:r>
-            <a:r>
-              <a:rPr lang="en-US" altLang="zh-CN" dirty="0"/>
-              <a:t>CPS </a:t>
-            </a:r>
-            <a:r>
-              <a:rPr lang="zh-CN" altLang="en-US" dirty="0"/>
-              <a:t>与扩量阈值与预算分配决策工具</a:t>
-            </a:r>
-          </a:p>
-          <a:p>
-            <a:pPr>
-              <a:lnSpc>
-                <a:spcPct val="100000"/>
-              </a:lnSpc>
-              <a:spcAft>
-                <a:spcPts val="100"/>
-              </a:spcAft>
-              <a:defRPr sz="750">
-                <a:solidFill>
-                  <a:srgbClr val="222C38"/>
-                </a:solidFill>
-                <a:latin typeface="Microsoft YaHei"/>
-              </a:defRPr>
-            </a:pPr>
-            <a:r>
-              <a:rPr lang="en-US" altLang="zh-CN" dirty="0"/>
-              <a:t>Campaign </a:t>
-            </a:r>
-            <a:r>
-              <a:rPr lang="zh-CN" altLang="en-US" dirty="0"/>
-              <a:t>早期质量预测</a:t>
-            </a:r>
-            <a:endParaRPr lang="en-US" dirty="0"/>
-          </a:p>
-        </p:txBody>
-      </p:sp>
-      <p:sp>
-        <p:nvSpPr>
-          <p:cNvPr id="64" name="Rectangle 55">
-            <a:extLst>
-              <a:ext uri="{FF2B5EF4-FFF2-40B4-BE49-F238E27FC236}">
-                <a16:creationId xmlns:a16="http://schemas.microsoft.com/office/drawing/2014/main" id="{6727FC50-B3EB-44E0-B2D6-07352E2DACBD}"/>
-              </a:ext>
-            </a:extLst>
-          </p:cNvPr>
-          <p:cNvSpPr/>
-          <p:nvPr/>
-        </p:nvSpPr>
-        <p:spPr>
-          <a:xfrm>
-            <a:off x="530352" y="4636008"/>
-            <a:ext cx="5321808" cy="1609344"/>
-          </a:xfrm>
-          <a:prstGeom prst="rect">
-            <a:avLst/>
-          </a:prstGeom>
-          <a:solidFill>
-            <a:srgbClr val="FFFFFF"/>
-          </a:solidFill>
-          <a:ln w="7620">
-            <a:solidFill>
-              <a:srgbClr val="D6DBE1"/>
-            </a:solidFill>
-          </a:ln>
-        </p:spPr>
-        <p:style>
-          <a:lnRef idx="1">
-            <a:schemeClr val="accent1"/>
-          </a:lnRef>
-          <a:fillRef idx="3">
-            <a:schemeClr val="accent1"/>
-          </a:fillRef>
-          <a:effectRef idx="2">
-            <a:schemeClr val="accent1"/>
-          </a:effectRef>
-          <a:fontRef idx="minor">
-            <a:schemeClr val="lt1"/>
-          </a:fontRef>
-        </p:style>
-        <p:txBody>
-          <a:bodyPr rtlCol="0" anchor="ctr"/>
-          <a:lstStyle/>
-          <a:p>
-            <a:pPr algn="ctr"/>
-            <a:endParaRPr/>
-          </a:p>
-        </p:txBody>
-      </p:sp>
-      <p:sp>
-        <p:nvSpPr>
-          <p:cNvPr id="65" name="Rectangle 56">
-            <a:extLst>
-              <a:ext uri="{FF2B5EF4-FFF2-40B4-BE49-F238E27FC236}">
-                <a16:creationId xmlns:a16="http://schemas.microsoft.com/office/drawing/2014/main" id="{6991C922-BB10-43BB-A3C5-295524DD4AF1}"/>
-              </a:ext>
-            </a:extLst>
-          </p:cNvPr>
-          <p:cNvSpPr/>
-          <p:nvPr/>
-        </p:nvSpPr>
-        <p:spPr>
-          <a:xfrm>
-            <a:off x="530352" y="4636008"/>
-            <a:ext cx="5321808" cy="50292"/>
-          </a:xfrm>
-          <a:prstGeom prst="rect">
-            <a:avLst/>
-          </a:prstGeom>
-          <a:solidFill>
-            <a:srgbClr val="0C3658"/>
-          </a:solidFill>
-          <a:ln>
-            <a:noFill/>
-          </a:ln>
-        </p:spPr>
-        <p:style>
-          <a:lnRef idx="1">
-            <a:schemeClr val="accent1"/>
-          </a:lnRef>
-          <a:fillRef idx="3">
-            <a:schemeClr val="accent1"/>
-          </a:fillRef>
-          <a:effectRef idx="2">
-            <a:schemeClr val="accent1"/>
-          </a:effectRef>
-          <a:fontRef idx="minor">
-            <a:schemeClr val="lt1"/>
-          </a:fontRef>
-        </p:style>
-        <p:txBody>
-          <a:bodyPr rtlCol="0" anchor="ctr"/>
-          <a:lstStyle/>
-          <a:p>
-            <a:pPr algn="ctr"/>
-            <a:endParaRPr/>
-          </a:p>
-        </p:txBody>
-      </p:sp>
-      <p:sp>
-        <p:nvSpPr>
-          <p:cNvPr id="66" name="Rectangle 57">
-            <a:extLst>
-              <a:ext uri="{FF2B5EF4-FFF2-40B4-BE49-F238E27FC236}">
-                <a16:creationId xmlns:a16="http://schemas.microsoft.com/office/drawing/2014/main" id="{B0EFB840-6033-4E7A-8B06-5AF80D9ACE41}"/>
-              </a:ext>
-            </a:extLst>
-          </p:cNvPr>
-          <p:cNvSpPr/>
-          <p:nvPr/>
-        </p:nvSpPr>
-        <p:spPr>
-          <a:xfrm>
-            <a:off x="676656" y="4791456"/>
-            <a:ext cx="292608" cy="228600"/>
-          </a:xfrm>
-          <a:prstGeom prst="rect">
-            <a:avLst/>
-          </a:prstGeom>
-          <a:solidFill>
-            <a:srgbClr val="EFF5FB"/>
-          </a:solidFill>
-          <a:ln>
-            <a:noFill/>
-          </a:ln>
-        </p:spPr>
-        <p:style>
-          <a:lnRef idx="1">
-            <a:schemeClr val="accent1"/>
-          </a:lnRef>
-          <a:fillRef idx="3">
-            <a:schemeClr val="accent1"/>
-          </a:fillRef>
-          <a:effectRef idx="2">
-            <a:schemeClr val="accent1"/>
-          </a:effectRef>
-          <a:fontRef idx="minor">
-            <a:schemeClr val="lt1"/>
-          </a:fontRef>
-        </p:style>
-        <p:txBody>
-          <a:bodyPr rtlCol="0" anchor="ctr"/>
-          <a:lstStyle/>
-          <a:p>
-            <a:pPr algn="ctr"/>
-            <a:endParaRPr/>
-          </a:p>
-        </p:txBody>
-      </p:sp>
-      <p:sp>
-        <p:nvSpPr>
-          <p:cNvPr id="67" name="TextBox 58">
-            <a:extLst>
-              <a:ext uri="{FF2B5EF4-FFF2-40B4-BE49-F238E27FC236}">
-                <a16:creationId xmlns:a16="http://schemas.microsoft.com/office/drawing/2014/main" id="{FC6C61B2-3AC0-4FA2-BE63-82AEA6A287E2}"/>
-              </a:ext>
-            </a:extLst>
-          </p:cNvPr>
-          <p:cNvSpPr txBox="1"/>
-          <p:nvPr/>
-        </p:nvSpPr>
-        <p:spPr>
-          <a:xfrm>
-            <a:off x="704088" y="4823460"/>
-            <a:ext cx="237744" cy="146304"/>
-          </a:xfrm>
-          <a:prstGeom prst="rect">
-            <a:avLst/>
-          </a:prstGeom>
-          <a:noFill/>
-        </p:spPr>
-        <p:txBody>
-          <a:bodyPr wrap="square" lIns="0" tIns="0" rIns="0" bIns="0">
-            <a:spAutoFit/>
-          </a:bodyPr>
-          <a:lstStyle/>
-          <a:p>
-            <a:pPr algn="ctr"/>
-            <a:r>
-              <a:rPr sz="740" b="1">
-                <a:solidFill>
-                  <a:srgbClr val="144970"/>
-                </a:solidFill>
-                <a:latin typeface="Microsoft YaHei"/>
+                <a:ea typeface="+mn-ea"/>
+                <a:cs typeface="+mn-cs"/>
               </a:rPr>
-              <a:t>03</a:t>
-            </a:r>
-          </a:p>
-        </p:txBody>
-      </p:sp>
-      <p:sp>
-        <p:nvSpPr>
-          <p:cNvPr id="68" name="TextBox 59">
-            <a:extLst>
-              <a:ext uri="{FF2B5EF4-FFF2-40B4-BE49-F238E27FC236}">
-                <a16:creationId xmlns:a16="http://schemas.microsoft.com/office/drawing/2014/main" id="{A17E72E4-6C43-4F6A-B247-2F5FE14D958C}"/>
-              </a:ext>
-            </a:extLst>
-          </p:cNvPr>
-          <p:cNvSpPr txBox="1"/>
-          <p:nvPr/>
-        </p:nvSpPr>
-        <p:spPr>
-          <a:xfrm>
-            <a:off x="1033271" y="4773168"/>
-            <a:ext cx="1097280" cy="219456"/>
-          </a:xfrm>
-          <a:prstGeom prst="rect">
-            <a:avLst/>
-          </a:prstGeom>
-          <a:noFill/>
-        </p:spPr>
-        <p:txBody>
-          <a:bodyPr wrap="square" lIns="0" tIns="0" rIns="0" bIns="0">
-            <a:spAutoFit/>
-          </a:bodyPr>
-          <a:lstStyle/>
-          <a:p>
-            <a:pPr algn="l"/>
-            <a:r>
-              <a:rPr sz="1320" b="1">
-                <a:solidFill>
-                  <a:srgbClr val="222C38"/>
-                </a:solidFill>
-                <a:latin typeface="Microsoft YaHei"/>
-              </a:rPr>
-              <a:t>用户运营</a:t>
-            </a:r>
-          </a:p>
-        </p:txBody>
-      </p:sp>
-      <p:sp>
-        <p:nvSpPr>
-          <p:cNvPr id="69" name="TextBox 60">
-            <a:extLst>
-              <a:ext uri="{FF2B5EF4-FFF2-40B4-BE49-F238E27FC236}">
-                <a16:creationId xmlns:a16="http://schemas.microsoft.com/office/drawing/2014/main" id="{4E62C11B-8C28-4028-869A-3229B5101554}"/>
-              </a:ext>
-            </a:extLst>
-          </p:cNvPr>
-          <p:cNvSpPr txBox="1"/>
-          <p:nvPr/>
-        </p:nvSpPr>
-        <p:spPr>
-          <a:xfrm>
-            <a:off x="1033271" y="5020056"/>
-            <a:ext cx="4572000" cy="201168"/>
-          </a:xfrm>
-          <a:prstGeom prst="rect">
-            <a:avLst/>
-          </a:prstGeom>
-          <a:noFill/>
-        </p:spPr>
-        <p:txBody>
-          <a:bodyPr wrap="square" lIns="0" tIns="0" rIns="0" bIns="0">
-            <a:spAutoFit/>
-          </a:bodyPr>
-          <a:lstStyle/>
-          <a:p>
-            <a:pPr algn="l"/>
-            <a:r>
-              <a:rPr sz="770" b="0" dirty="0" err="1">
-                <a:solidFill>
-                  <a:srgbClr val="606976"/>
-                </a:solidFill>
-                <a:latin typeface="Microsoft YaHei"/>
-              </a:rPr>
-              <a:t>目标：围绕客户价值、定价和触达，提升复贷与经营效率</a:t>
-            </a:r>
-            <a:endParaRPr sz="770" b="0" dirty="0">
+              <a:t>模型规划</a:t>
+            </a:r>
+            <a:endParaRPr kumimoji="0" sz="1500" b="1" i="0" u="none" strike="noStrike" kern="1200" cap="none" spc="0" normalizeH="0" baseline="0" noProof="0" dirty="0">
+              <a:ln>
+                <a:noFill/>
+              </a:ln>
               <a:solidFill>
-                <a:srgbClr val="606976"/>
+                <a:srgbClr val="1A232D"/>
               </a:solidFill>
+              <a:effectLst/>
+              <a:uLnTx/>
+              <a:uFillTx/>
               <a:latin typeface="Microsoft YaHei"/>
+              <a:ea typeface="+mn-ea"/>
+              <a:cs typeface="+mn-cs"/>
             </a:endParaRPr>
-          </a:p>
-        </p:txBody>
-      </p:sp>
-      <p:sp>
-        <p:nvSpPr>
-          <p:cNvPr id="70" name="Rectangle 61">
-            <a:extLst>
-              <a:ext uri="{FF2B5EF4-FFF2-40B4-BE49-F238E27FC236}">
-                <a16:creationId xmlns:a16="http://schemas.microsoft.com/office/drawing/2014/main" id="{609306D9-9DCA-4A53-B78A-72D88079A5E9}"/>
-              </a:ext>
-            </a:extLst>
-          </p:cNvPr>
-          <p:cNvSpPr/>
-          <p:nvPr/>
-        </p:nvSpPr>
-        <p:spPr>
-          <a:xfrm>
-            <a:off x="676656" y="5257800"/>
-            <a:ext cx="5029200" cy="9144"/>
-          </a:xfrm>
-          <a:prstGeom prst="rect">
-            <a:avLst/>
-          </a:prstGeom>
-          <a:solidFill>
-            <a:srgbClr val="D6DBE1"/>
-          </a:solidFill>
-          <a:ln>
-            <a:noFill/>
-          </a:ln>
-        </p:spPr>
-        <p:style>
-          <a:lnRef idx="1">
-            <a:schemeClr val="accent1"/>
-          </a:lnRef>
-          <a:fillRef idx="3">
-            <a:schemeClr val="accent1"/>
-          </a:fillRef>
-          <a:effectRef idx="2">
-            <a:schemeClr val="accent1"/>
-          </a:effectRef>
-          <a:fontRef idx="minor">
-            <a:schemeClr val="lt1"/>
-          </a:fontRef>
-        </p:style>
-        <p:txBody>
-          <a:bodyPr rtlCol="0" anchor="ctr"/>
-          <a:lstStyle/>
-          <a:p>
-            <a:pPr algn="ctr"/>
-            <a:endParaRPr/>
-          </a:p>
-        </p:txBody>
-      </p:sp>
-      <p:sp>
-        <p:nvSpPr>
-          <p:cNvPr id="71" name="Rectangle 62">
-            <a:extLst>
-              <a:ext uri="{FF2B5EF4-FFF2-40B4-BE49-F238E27FC236}">
-                <a16:creationId xmlns:a16="http://schemas.microsoft.com/office/drawing/2014/main" id="{B0D5F27D-3224-417E-BA49-6E10971B5A9B}"/>
-              </a:ext>
-            </a:extLst>
-          </p:cNvPr>
-          <p:cNvSpPr/>
-          <p:nvPr/>
-        </p:nvSpPr>
-        <p:spPr>
-          <a:xfrm>
-            <a:off x="3255264" y="5491930"/>
-            <a:ext cx="54864" cy="118872"/>
-          </a:xfrm>
-          <a:prstGeom prst="rect">
-            <a:avLst/>
-          </a:prstGeom>
-          <a:solidFill>
-            <a:srgbClr val="E2A600"/>
-          </a:solidFill>
-          <a:ln>
-            <a:noFill/>
-          </a:ln>
-        </p:spPr>
-        <p:style>
-          <a:lnRef idx="1">
-            <a:schemeClr val="accent1"/>
-          </a:lnRef>
-          <a:fillRef idx="3">
-            <a:schemeClr val="accent1"/>
-          </a:fillRef>
-          <a:effectRef idx="2">
-            <a:schemeClr val="accent1"/>
-          </a:effectRef>
-          <a:fontRef idx="minor">
-            <a:schemeClr val="lt1"/>
-          </a:fontRef>
-        </p:style>
-        <p:txBody>
-          <a:bodyPr rtlCol="0" anchor="ctr"/>
-          <a:lstStyle/>
-          <a:p>
-            <a:pPr algn="ctr"/>
-            <a:endParaRPr/>
-          </a:p>
-        </p:txBody>
-      </p:sp>
-      <p:sp>
-        <p:nvSpPr>
-          <p:cNvPr id="72" name="TextBox 63">
-            <a:extLst>
-              <a:ext uri="{FF2B5EF4-FFF2-40B4-BE49-F238E27FC236}">
-                <a16:creationId xmlns:a16="http://schemas.microsoft.com/office/drawing/2014/main" id="{BC781291-CC61-426B-B326-71039F24415F}"/>
-              </a:ext>
-            </a:extLst>
-          </p:cNvPr>
-          <p:cNvSpPr txBox="1"/>
-          <p:nvPr/>
-        </p:nvSpPr>
-        <p:spPr>
-          <a:xfrm>
-            <a:off x="3337560" y="5473642"/>
-            <a:ext cx="760844" cy="116955"/>
-          </a:xfrm>
-          <a:prstGeom prst="rect">
-            <a:avLst/>
-          </a:prstGeom>
-          <a:noFill/>
-        </p:spPr>
-        <p:txBody>
-          <a:bodyPr wrap="square" lIns="0" tIns="0" rIns="0" bIns="0">
-            <a:spAutoFit/>
-          </a:bodyPr>
-          <a:lstStyle/>
-          <a:p>
-            <a:pPr algn="l"/>
-            <a:r>
-              <a:rPr sz="760" b="1" dirty="0" err="1">
-                <a:solidFill>
-                  <a:srgbClr val="144970"/>
-                </a:solidFill>
-                <a:latin typeface="Microsoft YaHei"/>
-              </a:rPr>
-              <a:t>客户价值与定价</a:t>
-            </a:r>
-            <a:endParaRPr sz="760" b="1" dirty="0">
-              <a:solidFill>
-                <a:srgbClr val="144970"/>
-              </a:solidFill>
-              <a:latin typeface="Microsoft YaHei"/>
-            </a:endParaRPr>
-          </a:p>
-        </p:txBody>
-      </p:sp>
-      <p:sp>
-        <p:nvSpPr>
-          <p:cNvPr id="73" name="Rectangle 64">
-            <a:extLst>
-              <a:ext uri="{FF2B5EF4-FFF2-40B4-BE49-F238E27FC236}">
-                <a16:creationId xmlns:a16="http://schemas.microsoft.com/office/drawing/2014/main" id="{B2DC9C04-4EDD-4ACA-8B3E-651D4C8B8E3F}"/>
-              </a:ext>
-            </a:extLst>
-          </p:cNvPr>
-          <p:cNvSpPr/>
-          <p:nvPr/>
-        </p:nvSpPr>
-        <p:spPr>
-          <a:xfrm>
-            <a:off x="699831" y="5475837"/>
-            <a:ext cx="54864" cy="118872"/>
-          </a:xfrm>
-          <a:prstGeom prst="rect">
-            <a:avLst/>
-          </a:prstGeom>
-          <a:solidFill>
-            <a:srgbClr val="E2A600"/>
-          </a:solidFill>
-          <a:ln>
-            <a:noFill/>
-          </a:ln>
-        </p:spPr>
-        <p:style>
-          <a:lnRef idx="1">
-            <a:schemeClr val="accent1"/>
-          </a:lnRef>
-          <a:fillRef idx="3">
-            <a:schemeClr val="accent1"/>
-          </a:fillRef>
-          <a:effectRef idx="2">
-            <a:schemeClr val="accent1"/>
-          </a:effectRef>
-          <a:fontRef idx="minor">
-            <a:schemeClr val="lt1"/>
-          </a:fontRef>
-        </p:style>
-        <p:txBody>
-          <a:bodyPr rtlCol="0" anchor="ctr"/>
-          <a:lstStyle/>
-          <a:p>
-            <a:pPr algn="ctr"/>
-            <a:endParaRPr/>
-          </a:p>
-        </p:txBody>
-      </p:sp>
-      <p:sp>
-        <p:nvSpPr>
-          <p:cNvPr id="74" name="TextBox 65">
-            <a:extLst>
-              <a:ext uri="{FF2B5EF4-FFF2-40B4-BE49-F238E27FC236}">
-                <a16:creationId xmlns:a16="http://schemas.microsoft.com/office/drawing/2014/main" id="{5E7E4289-2147-435B-A952-F1819463B8E8}"/>
-              </a:ext>
-            </a:extLst>
-          </p:cNvPr>
-          <p:cNvSpPr txBox="1"/>
-          <p:nvPr/>
-        </p:nvSpPr>
-        <p:spPr>
-          <a:xfrm>
-            <a:off x="782127" y="5457549"/>
-            <a:ext cx="795528" cy="116955"/>
-          </a:xfrm>
-          <a:prstGeom prst="rect">
-            <a:avLst/>
-          </a:prstGeom>
-          <a:noFill/>
-        </p:spPr>
-        <p:txBody>
-          <a:bodyPr wrap="square" lIns="0" tIns="0" rIns="0" bIns="0">
-            <a:spAutoFit/>
-          </a:bodyPr>
-          <a:lstStyle/>
-          <a:p>
-            <a:pPr algn="l"/>
-            <a:r>
-              <a:rPr sz="760" b="1" dirty="0" err="1">
-                <a:solidFill>
-                  <a:srgbClr val="144970"/>
-                </a:solidFill>
-                <a:latin typeface="Microsoft YaHei"/>
-              </a:rPr>
-              <a:t>触达与智能经营</a:t>
-            </a:r>
-            <a:endParaRPr sz="760" b="1" dirty="0">
-              <a:solidFill>
-                <a:srgbClr val="144970"/>
-              </a:solidFill>
-              <a:latin typeface="Microsoft YaHei"/>
-            </a:endParaRPr>
-          </a:p>
-        </p:txBody>
-      </p:sp>
-      <p:sp>
-        <p:nvSpPr>
-          <p:cNvPr id="75" name="TextBox 66">
-            <a:extLst>
-              <a:ext uri="{FF2B5EF4-FFF2-40B4-BE49-F238E27FC236}">
-                <a16:creationId xmlns:a16="http://schemas.microsoft.com/office/drawing/2014/main" id="{4E32CBA2-DA28-48E4-B3AD-318F0533089E}"/>
-              </a:ext>
-            </a:extLst>
-          </p:cNvPr>
-          <p:cNvSpPr txBox="1"/>
-          <p:nvPr/>
-        </p:nvSpPr>
-        <p:spPr>
-          <a:xfrm>
-            <a:off x="3255264" y="5693098"/>
-            <a:ext cx="2359152" cy="576072"/>
-          </a:xfrm>
-          <a:prstGeom prst="rect">
-            <a:avLst/>
-          </a:prstGeom>
-          <a:noFill/>
-        </p:spPr>
-        <p:txBody>
-          <a:bodyPr wrap="square" lIns="0" tIns="0" rIns="0" bIns="0">
-            <a:spAutoFit/>
-          </a:bodyPr>
-          <a:lstStyle/>
-          <a:p>
-            <a:pPr>
-              <a:lnSpc>
-                <a:spcPct val="100000"/>
-              </a:lnSpc>
-              <a:spcAft>
-                <a:spcPts val="100"/>
-              </a:spcAft>
-              <a:defRPr sz="750">
-                <a:solidFill>
-                  <a:srgbClr val="222C38"/>
-                </a:solidFill>
-                <a:latin typeface="Microsoft YaHei"/>
-              </a:defRPr>
-            </a:pPr>
-            <a:r>
-              <a:rPr dirty="0" err="1"/>
-              <a:t>盈利性评估</a:t>
-            </a:r>
-            <a:endParaRPr dirty="0"/>
-          </a:p>
-          <a:p>
-            <a:pPr>
-              <a:lnSpc>
-                <a:spcPct val="100000"/>
-              </a:lnSpc>
-              <a:spcAft>
-                <a:spcPts val="100"/>
-              </a:spcAft>
-              <a:defRPr sz="750">
-                <a:solidFill>
-                  <a:srgbClr val="222C38"/>
-                </a:solidFill>
-                <a:latin typeface="Microsoft YaHei"/>
-              </a:defRPr>
-            </a:pPr>
-            <a:r>
-              <a:rPr dirty="0" err="1"/>
-              <a:t>自动寻优定价</a:t>
-            </a:r>
-            <a:endParaRPr dirty="0"/>
-          </a:p>
-          <a:p>
-            <a:pPr>
-              <a:lnSpc>
-                <a:spcPct val="100000"/>
-              </a:lnSpc>
-              <a:spcAft>
-                <a:spcPts val="100"/>
-              </a:spcAft>
-              <a:defRPr sz="750">
-                <a:solidFill>
-                  <a:srgbClr val="222C38"/>
-                </a:solidFill>
-                <a:latin typeface="Microsoft YaHei"/>
-              </a:defRPr>
-            </a:pPr>
-            <a:r>
-              <a:rPr dirty="0"/>
-              <a:t>Fundo Score</a:t>
-            </a:r>
-          </a:p>
-        </p:txBody>
-      </p:sp>
-      <p:sp>
-        <p:nvSpPr>
-          <p:cNvPr id="76" name="TextBox 67">
-            <a:extLst>
-              <a:ext uri="{FF2B5EF4-FFF2-40B4-BE49-F238E27FC236}">
-                <a16:creationId xmlns:a16="http://schemas.microsoft.com/office/drawing/2014/main" id="{E053EBE7-76F4-40CF-899E-97891E5DC652}"/>
-              </a:ext>
-            </a:extLst>
-          </p:cNvPr>
-          <p:cNvSpPr txBox="1"/>
-          <p:nvPr/>
-        </p:nvSpPr>
-        <p:spPr>
-          <a:xfrm>
-            <a:off x="699831" y="5677005"/>
-            <a:ext cx="2359152" cy="371897"/>
-          </a:xfrm>
-          <a:prstGeom prst="rect">
-            <a:avLst/>
-          </a:prstGeom>
-          <a:noFill/>
-        </p:spPr>
-        <p:txBody>
-          <a:bodyPr wrap="square" lIns="0" tIns="0" rIns="0" bIns="0">
-            <a:spAutoFit/>
-          </a:bodyPr>
-          <a:lstStyle/>
-          <a:p>
-            <a:pPr>
-              <a:lnSpc>
-                <a:spcPct val="100000"/>
-              </a:lnSpc>
-              <a:spcAft>
-                <a:spcPts val="100"/>
-              </a:spcAft>
-              <a:defRPr sz="750">
-                <a:solidFill>
-                  <a:srgbClr val="222C38"/>
-                </a:solidFill>
-                <a:latin typeface="Microsoft YaHei"/>
-              </a:defRPr>
-            </a:pPr>
-            <a:r>
-              <a:rPr dirty="0"/>
-              <a:t> </a:t>
-            </a:r>
-            <a:r>
-              <a:rPr dirty="0" err="1"/>
-              <a:t>触达策略与人群编排</a:t>
-            </a:r>
-            <a:endParaRPr dirty="0"/>
-          </a:p>
-          <a:p>
-            <a:pPr>
-              <a:lnSpc>
-                <a:spcPct val="100000"/>
-              </a:lnSpc>
-              <a:spcAft>
-                <a:spcPts val="100"/>
-              </a:spcAft>
-              <a:defRPr sz="750">
-                <a:solidFill>
-                  <a:srgbClr val="222C38"/>
-                </a:solidFill>
-                <a:latin typeface="Microsoft YaHei"/>
-              </a:defRPr>
-            </a:pPr>
-            <a:r>
-              <a:rPr dirty="0"/>
-              <a:t>★ </a:t>
-            </a:r>
-            <a:r>
-              <a:rPr dirty="0" err="1"/>
-              <a:t>结清客户复贷召回</a:t>
-            </a:r>
-            <a:endParaRPr dirty="0"/>
-          </a:p>
-          <a:p>
-            <a:pPr>
-              <a:lnSpc>
-                <a:spcPct val="100000"/>
-              </a:lnSpc>
-              <a:spcAft>
-                <a:spcPts val="100"/>
-              </a:spcAft>
-              <a:defRPr sz="750">
-                <a:solidFill>
-                  <a:srgbClr val="222C38"/>
-                </a:solidFill>
-                <a:latin typeface="Microsoft YaHei"/>
-              </a:defRPr>
-            </a:pPr>
-            <a:r>
-              <a:rPr lang="zh-CN" altLang="en-US" dirty="0"/>
-              <a:t>★</a:t>
-            </a:r>
-            <a:r>
-              <a:rPr dirty="0" err="1"/>
-              <a:t>竞品洞察</a:t>
-            </a:r>
-            <a:r>
-              <a:rPr dirty="0"/>
-              <a:t> AI </a:t>
-            </a:r>
-            <a:r>
-              <a:rPr dirty="0" err="1"/>
-              <a:t>智能体</a:t>
-            </a:r>
-            <a:endParaRPr dirty="0"/>
-          </a:p>
-        </p:txBody>
-      </p:sp>
-      <p:sp>
-        <p:nvSpPr>
-          <p:cNvPr id="77" name="Rectangle 68">
-            <a:extLst>
-              <a:ext uri="{FF2B5EF4-FFF2-40B4-BE49-F238E27FC236}">
-                <a16:creationId xmlns:a16="http://schemas.microsoft.com/office/drawing/2014/main" id="{E2749237-B8E9-4D1E-98EC-1D745132F593}"/>
-              </a:ext>
-            </a:extLst>
-          </p:cNvPr>
-          <p:cNvSpPr/>
-          <p:nvPr/>
-        </p:nvSpPr>
-        <p:spPr>
-          <a:xfrm>
-            <a:off x="6016752" y="4636008"/>
-            <a:ext cx="5321808" cy="1609344"/>
-          </a:xfrm>
-          <a:prstGeom prst="rect">
-            <a:avLst/>
-          </a:prstGeom>
-          <a:solidFill>
-            <a:srgbClr val="FFFFFF"/>
-          </a:solidFill>
-          <a:ln w="7620">
-            <a:solidFill>
-              <a:srgbClr val="D6DBE1"/>
-            </a:solidFill>
-          </a:ln>
-        </p:spPr>
-        <p:style>
-          <a:lnRef idx="1">
-            <a:schemeClr val="accent1"/>
-          </a:lnRef>
-          <a:fillRef idx="3">
-            <a:schemeClr val="accent1"/>
-          </a:fillRef>
-          <a:effectRef idx="2">
-            <a:schemeClr val="accent1"/>
-          </a:effectRef>
-          <a:fontRef idx="minor">
-            <a:schemeClr val="lt1"/>
-          </a:fontRef>
-        </p:style>
-        <p:txBody>
-          <a:bodyPr rtlCol="0" anchor="ctr"/>
-          <a:lstStyle/>
-          <a:p>
-            <a:pPr algn="ctr"/>
-            <a:endParaRPr lang="zh-CN" altLang="en-US" dirty="0"/>
-          </a:p>
-        </p:txBody>
-      </p:sp>
-      <p:sp>
-        <p:nvSpPr>
-          <p:cNvPr id="78" name="Rectangle 69">
-            <a:extLst>
-              <a:ext uri="{FF2B5EF4-FFF2-40B4-BE49-F238E27FC236}">
-                <a16:creationId xmlns:a16="http://schemas.microsoft.com/office/drawing/2014/main" id="{B8F06AE8-B3B0-4F05-9FE8-2ADE4CB5A382}"/>
-              </a:ext>
-            </a:extLst>
-          </p:cNvPr>
-          <p:cNvSpPr/>
-          <p:nvPr/>
-        </p:nvSpPr>
-        <p:spPr>
-          <a:xfrm>
-            <a:off x="6016752" y="4636008"/>
-            <a:ext cx="5321808" cy="50292"/>
-          </a:xfrm>
-          <a:prstGeom prst="rect">
-            <a:avLst/>
-          </a:prstGeom>
-          <a:solidFill>
-            <a:srgbClr val="0C3658"/>
-          </a:solidFill>
-          <a:ln>
-            <a:noFill/>
-          </a:ln>
-        </p:spPr>
-        <p:style>
-          <a:lnRef idx="1">
-            <a:schemeClr val="accent1"/>
-          </a:lnRef>
-          <a:fillRef idx="3">
-            <a:schemeClr val="accent1"/>
-          </a:fillRef>
-          <a:effectRef idx="2">
-            <a:schemeClr val="accent1"/>
-          </a:effectRef>
-          <a:fontRef idx="minor">
-            <a:schemeClr val="lt1"/>
-          </a:fontRef>
-        </p:style>
-        <p:txBody>
-          <a:bodyPr rtlCol="0" anchor="ctr"/>
-          <a:lstStyle/>
-          <a:p>
-            <a:pPr algn="ctr"/>
-            <a:endParaRPr/>
-          </a:p>
-        </p:txBody>
-      </p:sp>
-      <p:sp>
-        <p:nvSpPr>
-          <p:cNvPr id="79" name="Rectangle 70">
-            <a:extLst>
-              <a:ext uri="{FF2B5EF4-FFF2-40B4-BE49-F238E27FC236}">
-                <a16:creationId xmlns:a16="http://schemas.microsoft.com/office/drawing/2014/main" id="{144AFD4A-47E9-4F8E-9878-0AADEB5B4BF6}"/>
-              </a:ext>
-            </a:extLst>
-          </p:cNvPr>
-          <p:cNvSpPr/>
-          <p:nvPr/>
-        </p:nvSpPr>
-        <p:spPr>
-          <a:xfrm>
-            <a:off x="6163056" y="4791456"/>
-            <a:ext cx="292608" cy="228600"/>
-          </a:xfrm>
-          <a:prstGeom prst="rect">
-            <a:avLst/>
-          </a:prstGeom>
-          <a:solidFill>
-            <a:srgbClr val="EFF5FB"/>
-          </a:solidFill>
-          <a:ln>
-            <a:noFill/>
-          </a:ln>
-        </p:spPr>
-        <p:style>
-          <a:lnRef idx="1">
-            <a:schemeClr val="accent1"/>
-          </a:lnRef>
-          <a:fillRef idx="3">
-            <a:schemeClr val="accent1"/>
-          </a:fillRef>
-          <a:effectRef idx="2">
-            <a:schemeClr val="accent1"/>
-          </a:effectRef>
-          <a:fontRef idx="minor">
-            <a:schemeClr val="lt1"/>
-          </a:fontRef>
-        </p:style>
-        <p:txBody>
-          <a:bodyPr rtlCol="0" anchor="ctr"/>
-          <a:lstStyle/>
-          <a:p>
-            <a:pPr algn="ctr"/>
-            <a:endParaRPr/>
-          </a:p>
-        </p:txBody>
-      </p:sp>
-      <p:sp>
-        <p:nvSpPr>
-          <p:cNvPr id="80" name="TextBox 71">
-            <a:extLst>
-              <a:ext uri="{FF2B5EF4-FFF2-40B4-BE49-F238E27FC236}">
-                <a16:creationId xmlns:a16="http://schemas.microsoft.com/office/drawing/2014/main" id="{214EBC0E-DC9A-484E-8333-A48A1115DCF0}"/>
-              </a:ext>
-            </a:extLst>
-          </p:cNvPr>
-          <p:cNvSpPr txBox="1"/>
-          <p:nvPr/>
-        </p:nvSpPr>
-        <p:spPr>
-          <a:xfrm>
-            <a:off x="6190488" y="4823460"/>
-            <a:ext cx="237744" cy="146304"/>
-          </a:xfrm>
-          <a:prstGeom prst="rect">
-            <a:avLst/>
-          </a:prstGeom>
-          <a:noFill/>
-        </p:spPr>
-        <p:txBody>
-          <a:bodyPr wrap="square" lIns="0" tIns="0" rIns="0" bIns="0">
-            <a:spAutoFit/>
-          </a:bodyPr>
-          <a:lstStyle/>
-          <a:p>
-            <a:pPr algn="ctr"/>
-            <a:r>
-              <a:rPr sz="740" b="1">
-                <a:solidFill>
-                  <a:srgbClr val="144970"/>
-                </a:solidFill>
-                <a:latin typeface="Microsoft YaHei"/>
-              </a:rPr>
-              <a:t>04</a:t>
-            </a:r>
-          </a:p>
-        </p:txBody>
-      </p:sp>
-      <p:sp>
-        <p:nvSpPr>
-          <p:cNvPr id="81" name="TextBox 72">
-            <a:extLst>
-              <a:ext uri="{FF2B5EF4-FFF2-40B4-BE49-F238E27FC236}">
-                <a16:creationId xmlns:a16="http://schemas.microsoft.com/office/drawing/2014/main" id="{185E8DBD-30BA-4DF5-8A20-1A45FB1BD964}"/>
-              </a:ext>
-            </a:extLst>
-          </p:cNvPr>
-          <p:cNvSpPr txBox="1"/>
-          <p:nvPr/>
-        </p:nvSpPr>
-        <p:spPr>
-          <a:xfrm>
-            <a:off x="6519672" y="4773168"/>
-            <a:ext cx="1097280" cy="219456"/>
-          </a:xfrm>
-          <a:prstGeom prst="rect">
-            <a:avLst/>
-          </a:prstGeom>
-          <a:noFill/>
-        </p:spPr>
-        <p:txBody>
-          <a:bodyPr wrap="square" lIns="0" tIns="0" rIns="0" bIns="0">
-            <a:spAutoFit/>
-          </a:bodyPr>
-          <a:lstStyle/>
-          <a:p>
-            <a:pPr algn="l"/>
-            <a:r>
-              <a:rPr sz="1320" b="1">
-                <a:solidFill>
-                  <a:srgbClr val="222C38"/>
-                </a:solidFill>
-                <a:latin typeface="Microsoft YaHei"/>
-              </a:rPr>
-              <a:t>风险管理</a:t>
-            </a:r>
-          </a:p>
-        </p:txBody>
-      </p:sp>
-      <p:sp>
-        <p:nvSpPr>
-          <p:cNvPr id="82" name="TextBox 73">
-            <a:extLst>
-              <a:ext uri="{FF2B5EF4-FFF2-40B4-BE49-F238E27FC236}">
-                <a16:creationId xmlns:a16="http://schemas.microsoft.com/office/drawing/2014/main" id="{0C4B3467-80C6-4948-A90E-C79185642C11}"/>
-              </a:ext>
-            </a:extLst>
-          </p:cNvPr>
-          <p:cNvSpPr txBox="1"/>
-          <p:nvPr/>
-        </p:nvSpPr>
-        <p:spPr>
-          <a:xfrm>
-            <a:off x="6519672" y="5020056"/>
-            <a:ext cx="4572000" cy="201168"/>
-          </a:xfrm>
-          <a:prstGeom prst="rect">
-            <a:avLst/>
-          </a:prstGeom>
-          <a:noFill/>
-        </p:spPr>
-        <p:txBody>
-          <a:bodyPr wrap="square" lIns="0" tIns="0" rIns="0" bIns="0">
-            <a:spAutoFit/>
-          </a:bodyPr>
-          <a:lstStyle/>
-          <a:p>
-            <a:pPr algn="l"/>
-            <a:r>
-              <a:rPr sz="770" b="0" dirty="0" err="1">
-                <a:solidFill>
-                  <a:srgbClr val="606976"/>
-                </a:solidFill>
-                <a:latin typeface="Microsoft YaHei"/>
-              </a:rPr>
-              <a:t>目标：在风险可控前提下，平衡通过率、额度与承接</a:t>
-            </a:r>
-            <a:endParaRPr sz="770" b="0" dirty="0">
-              <a:solidFill>
-                <a:srgbClr val="606976"/>
-              </a:solidFill>
-              <a:latin typeface="Microsoft YaHei"/>
-            </a:endParaRPr>
-          </a:p>
-        </p:txBody>
-      </p:sp>
-      <p:sp>
-        <p:nvSpPr>
-          <p:cNvPr id="83" name="Rectangle 74">
-            <a:extLst>
-              <a:ext uri="{FF2B5EF4-FFF2-40B4-BE49-F238E27FC236}">
-                <a16:creationId xmlns:a16="http://schemas.microsoft.com/office/drawing/2014/main" id="{5922F1E9-9B72-47EE-A585-8A4DFE5FA1FD}"/>
-              </a:ext>
-            </a:extLst>
-          </p:cNvPr>
-          <p:cNvSpPr/>
-          <p:nvPr/>
-        </p:nvSpPr>
-        <p:spPr>
-          <a:xfrm>
-            <a:off x="6163056" y="5257800"/>
-            <a:ext cx="5029200" cy="9144"/>
-          </a:xfrm>
-          <a:prstGeom prst="rect">
-            <a:avLst/>
-          </a:prstGeom>
-          <a:solidFill>
-            <a:srgbClr val="D6DBE1"/>
-          </a:solidFill>
-          <a:ln>
-            <a:noFill/>
-          </a:ln>
-        </p:spPr>
-        <p:style>
-          <a:lnRef idx="1">
-            <a:schemeClr val="accent1"/>
-          </a:lnRef>
-          <a:fillRef idx="3">
-            <a:schemeClr val="accent1"/>
-          </a:fillRef>
-          <a:effectRef idx="2">
-            <a:schemeClr val="accent1"/>
-          </a:effectRef>
-          <a:fontRef idx="minor">
-            <a:schemeClr val="lt1"/>
-          </a:fontRef>
-        </p:style>
-        <p:txBody>
-          <a:bodyPr rtlCol="0" anchor="ctr"/>
-          <a:lstStyle/>
-          <a:p>
-            <a:pPr algn="ctr"/>
-            <a:endParaRPr/>
-          </a:p>
-        </p:txBody>
-      </p:sp>
-      <p:sp>
-        <p:nvSpPr>
-          <p:cNvPr id="84" name="Rectangle 75">
-            <a:extLst>
-              <a:ext uri="{FF2B5EF4-FFF2-40B4-BE49-F238E27FC236}">
-                <a16:creationId xmlns:a16="http://schemas.microsoft.com/office/drawing/2014/main" id="{C0E99B71-2A6B-42DF-B94B-88A94F1634AF}"/>
-              </a:ext>
-            </a:extLst>
-          </p:cNvPr>
-          <p:cNvSpPr/>
-          <p:nvPr/>
-        </p:nvSpPr>
-        <p:spPr>
-          <a:xfrm>
-            <a:off x="6163056" y="5376672"/>
-            <a:ext cx="54864" cy="118872"/>
-          </a:xfrm>
-          <a:prstGeom prst="rect">
-            <a:avLst/>
-          </a:prstGeom>
-          <a:solidFill>
-            <a:srgbClr val="E2A600"/>
-          </a:solidFill>
-          <a:ln>
-            <a:noFill/>
-          </a:ln>
-        </p:spPr>
-        <p:style>
-          <a:lnRef idx="1">
-            <a:schemeClr val="accent1"/>
-          </a:lnRef>
-          <a:fillRef idx="3">
-            <a:schemeClr val="accent1"/>
-          </a:fillRef>
-          <a:effectRef idx="2">
-            <a:schemeClr val="accent1"/>
-          </a:effectRef>
-          <a:fontRef idx="minor">
-            <a:schemeClr val="lt1"/>
-          </a:fontRef>
-        </p:style>
-        <p:txBody>
-          <a:bodyPr rtlCol="0" anchor="ctr"/>
-          <a:lstStyle/>
-          <a:p>
-            <a:pPr algn="ctr"/>
-            <a:endParaRPr/>
-          </a:p>
-        </p:txBody>
-      </p:sp>
-      <p:sp>
-        <p:nvSpPr>
-          <p:cNvPr id="85" name="TextBox 76">
-            <a:extLst>
-              <a:ext uri="{FF2B5EF4-FFF2-40B4-BE49-F238E27FC236}">
-                <a16:creationId xmlns:a16="http://schemas.microsoft.com/office/drawing/2014/main" id="{965B33CF-A6C0-4DA4-83A5-87E3B51E79C1}"/>
-              </a:ext>
-            </a:extLst>
-          </p:cNvPr>
-          <p:cNvSpPr txBox="1"/>
-          <p:nvPr/>
-        </p:nvSpPr>
-        <p:spPr>
-          <a:xfrm>
-            <a:off x="6257964" y="5377302"/>
-            <a:ext cx="548640" cy="116955"/>
-          </a:xfrm>
-          <a:prstGeom prst="rect">
-            <a:avLst/>
-          </a:prstGeom>
-          <a:noFill/>
-        </p:spPr>
-        <p:txBody>
-          <a:bodyPr wrap="square" lIns="0" tIns="0" rIns="0" bIns="0">
-            <a:spAutoFit/>
-          </a:bodyPr>
-          <a:lstStyle/>
-          <a:p>
-            <a:pPr algn="l"/>
-            <a:r>
-              <a:rPr lang="zh-CN" altLang="en-US" sz="760" b="1" dirty="0">
-                <a:solidFill>
-                  <a:srgbClr val="144970"/>
-                </a:solidFill>
-                <a:latin typeface="Microsoft YaHei"/>
-              </a:rPr>
-              <a:t>模型迭代</a:t>
-            </a:r>
-            <a:endParaRPr sz="760" b="1" dirty="0">
-              <a:solidFill>
-                <a:srgbClr val="144970"/>
-              </a:solidFill>
-              <a:latin typeface="Microsoft YaHei"/>
-            </a:endParaRPr>
-          </a:p>
-        </p:txBody>
-      </p:sp>
-      <p:sp>
-        <p:nvSpPr>
-          <p:cNvPr id="86" name="Rectangle 77">
-            <a:extLst>
-              <a:ext uri="{FF2B5EF4-FFF2-40B4-BE49-F238E27FC236}">
-                <a16:creationId xmlns:a16="http://schemas.microsoft.com/office/drawing/2014/main" id="{A5BDB989-A8A4-439F-98E7-9A07394974C5}"/>
-              </a:ext>
-            </a:extLst>
-          </p:cNvPr>
-          <p:cNvSpPr/>
-          <p:nvPr/>
-        </p:nvSpPr>
-        <p:spPr>
-          <a:xfrm>
-            <a:off x="8741664" y="5376672"/>
-            <a:ext cx="54864" cy="118872"/>
-          </a:xfrm>
-          <a:prstGeom prst="rect">
-            <a:avLst/>
-          </a:prstGeom>
-          <a:solidFill>
-            <a:srgbClr val="E2A600"/>
-          </a:solidFill>
-          <a:ln>
-            <a:noFill/>
-          </a:ln>
-        </p:spPr>
-        <p:style>
-          <a:lnRef idx="1">
-            <a:schemeClr val="accent1"/>
-          </a:lnRef>
-          <a:fillRef idx="3">
-            <a:schemeClr val="accent1"/>
-          </a:fillRef>
-          <a:effectRef idx="2">
-            <a:schemeClr val="accent1"/>
-          </a:effectRef>
-          <a:fontRef idx="minor">
-            <a:schemeClr val="lt1"/>
-          </a:fontRef>
-        </p:style>
-        <p:txBody>
-          <a:bodyPr rtlCol="0" anchor="ctr"/>
-          <a:lstStyle/>
-          <a:p>
-            <a:pPr algn="ctr"/>
-            <a:endParaRPr/>
-          </a:p>
-        </p:txBody>
-      </p:sp>
-      <p:sp>
-        <p:nvSpPr>
-          <p:cNvPr id="87" name="TextBox 78">
-            <a:extLst>
-              <a:ext uri="{FF2B5EF4-FFF2-40B4-BE49-F238E27FC236}">
-                <a16:creationId xmlns:a16="http://schemas.microsoft.com/office/drawing/2014/main" id="{2C89A044-A3A1-417D-BEF4-D2ABF4F4F524}"/>
-              </a:ext>
-            </a:extLst>
-          </p:cNvPr>
-          <p:cNvSpPr txBox="1"/>
-          <p:nvPr/>
-        </p:nvSpPr>
-        <p:spPr>
-          <a:xfrm>
-            <a:off x="8823960" y="5358384"/>
-            <a:ext cx="548640" cy="164592"/>
-          </a:xfrm>
-          <a:prstGeom prst="rect">
-            <a:avLst/>
-          </a:prstGeom>
-          <a:noFill/>
-        </p:spPr>
-        <p:txBody>
-          <a:bodyPr wrap="square" lIns="0" tIns="0" rIns="0" bIns="0">
-            <a:spAutoFit/>
-          </a:bodyPr>
-          <a:lstStyle/>
-          <a:p>
-            <a:pPr algn="l"/>
-            <a:r>
-              <a:rPr sz="760" b="1">
-                <a:solidFill>
-                  <a:srgbClr val="144970"/>
-                </a:solidFill>
-                <a:latin typeface="Microsoft YaHei"/>
-              </a:rPr>
-              <a:t>输出形态</a:t>
-            </a:r>
-          </a:p>
-        </p:txBody>
-      </p:sp>
-      <p:sp>
-        <p:nvSpPr>
-          <p:cNvPr id="88" name="TextBox 79">
-            <a:extLst>
-              <a:ext uri="{FF2B5EF4-FFF2-40B4-BE49-F238E27FC236}">
-                <a16:creationId xmlns:a16="http://schemas.microsoft.com/office/drawing/2014/main" id="{8BE92C97-D1FA-4C98-AA7F-B0C8CFDE232A}"/>
-              </a:ext>
-            </a:extLst>
-          </p:cNvPr>
-          <p:cNvSpPr txBox="1"/>
-          <p:nvPr/>
-        </p:nvSpPr>
-        <p:spPr>
-          <a:xfrm>
-            <a:off x="6163056" y="5577840"/>
-            <a:ext cx="2359152" cy="115416"/>
-          </a:xfrm>
-          <a:prstGeom prst="rect">
-            <a:avLst/>
-          </a:prstGeom>
-          <a:noFill/>
-        </p:spPr>
-        <p:txBody>
-          <a:bodyPr wrap="square" lIns="0" tIns="0" rIns="0" bIns="0">
-            <a:spAutoFit/>
-          </a:bodyPr>
-          <a:lstStyle/>
-          <a:p>
-            <a:pPr>
-              <a:lnSpc>
-                <a:spcPct val="100000"/>
-              </a:lnSpc>
-              <a:spcAft>
-                <a:spcPts val="100"/>
-              </a:spcAft>
-              <a:defRPr sz="750">
-                <a:solidFill>
-                  <a:srgbClr val="222C38"/>
-                </a:solidFill>
-                <a:latin typeface="Microsoft YaHei"/>
-              </a:defRPr>
-            </a:pPr>
-            <a:r>
-              <a:rPr dirty="0"/>
-              <a:t>★ </a:t>
-            </a:r>
-            <a:r>
-              <a:rPr dirty="0" err="1"/>
-              <a:t>新老客</a:t>
-            </a:r>
-            <a:r>
-              <a:rPr dirty="0"/>
-              <a:t> PD </a:t>
-            </a:r>
-            <a:r>
-              <a:rPr dirty="0" err="1"/>
-              <a:t>模型迭代：增强头尾区分</a:t>
-            </a:r>
-            <a:endParaRPr dirty="0"/>
-          </a:p>
-        </p:txBody>
-      </p:sp>
-      <p:sp>
-        <p:nvSpPr>
-          <p:cNvPr id="90" name="文本框 89">
-            <a:extLst>
-              <a:ext uri="{FF2B5EF4-FFF2-40B4-BE49-F238E27FC236}">
-                <a16:creationId xmlns:a16="http://schemas.microsoft.com/office/drawing/2014/main" id="{D4C264D2-47E5-43BE-9318-54C1B3783D95}"/>
-              </a:ext>
-            </a:extLst>
-          </p:cNvPr>
-          <p:cNvSpPr txBox="1"/>
-          <p:nvPr/>
-        </p:nvSpPr>
-        <p:spPr>
-          <a:xfrm>
-            <a:off x="8677656" y="5534348"/>
-            <a:ext cx="2514600" cy="207749"/>
-          </a:xfrm>
-          <a:prstGeom prst="rect">
-            <a:avLst/>
-          </a:prstGeom>
-          <a:noFill/>
-        </p:spPr>
-        <p:txBody>
-          <a:bodyPr wrap="square">
-            <a:spAutoFit/>
-          </a:bodyPr>
-          <a:lstStyle/>
-          <a:p>
-            <a:pPr>
-              <a:spcAft>
-                <a:spcPts val="100"/>
-              </a:spcAft>
-              <a:defRPr sz="750">
-                <a:solidFill>
-                  <a:srgbClr val="222C38"/>
-                </a:solidFill>
-                <a:latin typeface="Microsoft YaHei"/>
-              </a:defRPr>
-            </a:pPr>
-            <a:r>
-              <a:rPr lang="zh-CN" altLang="en-US" sz="750" dirty="0">
-                <a:solidFill>
-                  <a:srgbClr val="222C38"/>
-                </a:solidFill>
-                <a:latin typeface="Microsoft YaHei"/>
-              </a:rPr>
-              <a:t>★ 风险 </a:t>
-            </a:r>
-            <a:r>
-              <a:rPr lang="en-US" altLang="zh-CN" sz="750" dirty="0">
-                <a:solidFill>
-                  <a:srgbClr val="222C38"/>
-                </a:solidFill>
-                <a:latin typeface="Microsoft YaHei"/>
-              </a:rPr>
-              <a:t>× </a:t>
-            </a:r>
-            <a:r>
-              <a:rPr lang="zh-CN" altLang="en-US" sz="750" dirty="0">
-                <a:solidFill>
-                  <a:srgbClr val="222C38"/>
-                </a:solidFill>
-                <a:latin typeface="Microsoft YaHei"/>
-              </a:rPr>
-              <a:t>价值联合额度策略：交叉分箱自动寻优算法</a:t>
-            </a:r>
           </a:p>
         </p:txBody>
       </p:sp>
     </p:spTree>
     <p:extLst>
       <p:ext uri="{BB962C8B-B14F-4D97-AF65-F5344CB8AC3E}">
-        <p14:creationId xmlns:p14="http://schemas.microsoft.com/office/powerpoint/2010/main" val="932786264"/>
+        <p14:creationId xmlns:p14="http://schemas.microsoft.com/office/powerpoint/2010/main" val="3758690521"/>
       </p:ext>
     </p:extLst>
   </p:cSld>

--- a/模型规划.pptx
+++ b/模型规划.pptx
@@ -260,7 +260,7 @@
           <a:p>
             <a:fld id="{B51C5E6E-2C9F-4268-909B-20CBB5B5588C}" type="datetimeFigureOut">
               <a:rPr lang="zh-CN" altLang="en-US" smtClean="0"/>
-              <a:t>2026/8/31</a:t>
+              <a:t>2026/9/1</a:t>
             </a:fld>
             <a:endParaRPr lang="zh-CN" altLang="en-US"/>
           </a:p>
@@ -458,7 +458,7 @@
           <a:p>
             <a:fld id="{B51C5E6E-2C9F-4268-909B-20CBB5B5588C}" type="datetimeFigureOut">
               <a:rPr lang="zh-CN" altLang="en-US" smtClean="0"/>
-              <a:t>2026/8/31</a:t>
+              <a:t>2026/9/1</a:t>
             </a:fld>
             <a:endParaRPr lang="zh-CN" altLang="en-US"/>
           </a:p>
@@ -666,7 +666,7 @@
           <a:p>
             <a:fld id="{B51C5E6E-2C9F-4268-909B-20CBB5B5588C}" type="datetimeFigureOut">
               <a:rPr lang="zh-CN" altLang="en-US" smtClean="0"/>
-              <a:t>2026/8/31</a:t>
+              <a:t>2026/9/1</a:t>
             </a:fld>
             <a:endParaRPr lang="zh-CN" altLang="en-US"/>
           </a:p>
@@ -886,7 +886,7 @@
           <a:p>
             <a:fld id="{73D38E0C-70A7-465C-B390-CC20D1E8458E}" type="datetimeFigureOut">
               <a:rPr lang="zh-CN" altLang="en-US" smtClean="0"/>
-              <a:t>2026/8/31</a:t>
+              <a:t>2026/9/1</a:t>
             </a:fld>
             <a:endParaRPr lang="zh-CN" altLang="en-US"/>
           </a:p>
@@ -1084,7 +1084,7 @@
           <a:p>
             <a:fld id="{73D38E0C-70A7-465C-B390-CC20D1E8458E}" type="datetimeFigureOut">
               <a:rPr lang="zh-CN" altLang="en-US" smtClean="0"/>
-              <a:t>2026/8/31</a:t>
+              <a:t>2026/9/1</a:t>
             </a:fld>
             <a:endParaRPr lang="zh-CN" altLang="en-US"/>
           </a:p>
@@ -1359,7 +1359,7 @@
           <a:p>
             <a:fld id="{73D38E0C-70A7-465C-B390-CC20D1E8458E}" type="datetimeFigureOut">
               <a:rPr lang="zh-CN" altLang="en-US" smtClean="0"/>
-              <a:t>2026/8/31</a:t>
+              <a:t>2026/9/1</a:t>
             </a:fld>
             <a:endParaRPr lang="zh-CN" altLang="en-US"/>
           </a:p>
@@ -1624,7 +1624,7 @@
           <a:p>
             <a:fld id="{73D38E0C-70A7-465C-B390-CC20D1E8458E}" type="datetimeFigureOut">
               <a:rPr lang="zh-CN" altLang="en-US" smtClean="0"/>
-              <a:t>2026/8/31</a:t>
+              <a:t>2026/9/1</a:t>
             </a:fld>
             <a:endParaRPr lang="zh-CN" altLang="en-US"/>
           </a:p>
@@ -2036,7 +2036,7 @@
           <a:p>
             <a:fld id="{73D38E0C-70A7-465C-B390-CC20D1E8458E}" type="datetimeFigureOut">
               <a:rPr lang="zh-CN" altLang="en-US" smtClean="0"/>
-              <a:t>2026/8/31</a:t>
+              <a:t>2026/9/1</a:t>
             </a:fld>
             <a:endParaRPr lang="zh-CN" altLang="en-US"/>
           </a:p>
@@ -2177,7 +2177,7 @@
           <a:p>
             <a:fld id="{73D38E0C-70A7-465C-B390-CC20D1E8458E}" type="datetimeFigureOut">
               <a:rPr lang="zh-CN" altLang="en-US" smtClean="0"/>
-              <a:t>2026/8/31</a:t>
+              <a:t>2026/9/1</a:t>
             </a:fld>
             <a:endParaRPr lang="zh-CN" altLang="en-US"/>
           </a:p>
@@ -2290,7 +2290,7 @@
           <a:p>
             <a:fld id="{73D38E0C-70A7-465C-B390-CC20D1E8458E}" type="datetimeFigureOut">
               <a:rPr lang="zh-CN" altLang="en-US" smtClean="0"/>
-              <a:t>2026/8/31</a:t>
+              <a:t>2026/9/1</a:t>
             </a:fld>
             <a:endParaRPr lang="zh-CN" altLang="en-US"/>
           </a:p>
@@ -2601,7 +2601,7 @@
           <a:p>
             <a:fld id="{73D38E0C-70A7-465C-B390-CC20D1E8458E}" type="datetimeFigureOut">
               <a:rPr lang="zh-CN" altLang="en-US" smtClean="0"/>
-              <a:t>2026/8/31</a:t>
+              <a:t>2026/9/1</a:t>
             </a:fld>
             <a:endParaRPr lang="zh-CN" altLang="en-US"/>
           </a:p>
@@ -2799,7 +2799,7 @@
           <a:p>
             <a:fld id="{B51C5E6E-2C9F-4268-909B-20CBB5B5588C}" type="datetimeFigureOut">
               <a:rPr lang="zh-CN" altLang="en-US" smtClean="0"/>
-              <a:t>2026/8/31</a:t>
+              <a:t>2026/9/1</a:t>
             </a:fld>
             <a:endParaRPr lang="zh-CN" altLang="en-US"/>
           </a:p>
@@ -3087,7 +3087,7 @@
           <a:p>
             <a:fld id="{73D38E0C-70A7-465C-B390-CC20D1E8458E}" type="datetimeFigureOut">
               <a:rPr lang="zh-CN" altLang="en-US" smtClean="0"/>
-              <a:t>2026/8/31</a:t>
+              <a:t>2026/9/1</a:t>
             </a:fld>
             <a:endParaRPr lang="zh-CN" altLang="en-US"/>
           </a:p>
@@ -3285,7 +3285,7 @@
           <a:p>
             <a:fld id="{73D38E0C-70A7-465C-B390-CC20D1E8458E}" type="datetimeFigureOut">
               <a:rPr lang="zh-CN" altLang="en-US" smtClean="0"/>
-              <a:t>2026/8/31</a:t>
+              <a:t>2026/9/1</a:t>
             </a:fld>
             <a:endParaRPr lang="zh-CN" altLang="en-US"/>
           </a:p>
@@ -3493,7 +3493,7 @@
           <a:p>
             <a:fld id="{73D38E0C-70A7-465C-B390-CC20D1E8458E}" type="datetimeFigureOut">
               <a:rPr lang="zh-CN" altLang="en-US" smtClean="0"/>
-              <a:t>2026/8/31</a:t>
+              <a:t>2026/9/1</a:t>
             </a:fld>
             <a:endParaRPr lang="zh-CN" altLang="en-US"/>
           </a:p>
@@ -4024,7 +4024,7 @@
           <a:p>
             <a:fld id="{B51C5E6E-2C9F-4268-909B-20CBB5B5588C}" type="datetimeFigureOut">
               <a:rPr lang="zh-CN" altLang="en-US" smtClean="0"/>
-              <a:t>2026/8/31</a:t>
+              <a:t>2026/9/1</a:t>
             </a:fld>
             <a:endParaRPr lang="zh-CN" altLang="en-US"/>
           </a:p>
@@ -4289,7 +4289,7 @@
           <a:p>
             <a:fld id="{B51C5E6E-2C9F-4268-909B-20CBB5B5588C}" type="datetimeFigureOut">
               <a:rPr lang="zh-CN" altLang="en-US" smtClean="0"/>
-              <a:t>2026/8/31</a:t>
+              <a:t>2026/9/1</a:t>
             </a:fld>
             <a:endParaRPr lang="zh-CN" altLang="en-US"/>
           </a:p>
@@ -4701,7 +4701,7 @@
           <a:p>
             <a:fld id="{B51C5E6E-2C9F-4268-909B-20CBB5B5588C}" type="datetimeFigureOut">
               <a:rPr lang="zh-CN" altLang="en-US" smtClean="0"/>
-              <a:t>2026/8/31</a:t>
+              <a:t>2026/9/1</a:t>
             </a:fld>
             <a:endParaRPr lang="zh-CN" altLang="en-US"/>
           </a:p>
@@ -4842,7 +4842,7 @@
           <a:p>
             <a:fld id="{B51C5E6E-2C9F-4268-909B-20CBB5B5588C}" type="datetimeFigureOut">
               <a:rPr lang="zh-CN" altLang="en-US" smtClean="0"/>
-              <a:t>2026/8/31</a:t>
+              <a:t>2026/9/1</a:t>
             </a:fld>
             <a:endParaRPr lang="zh-CN" altLang="en-US"/>
           </a:p>
@@ -4955,7 +4955,7 @@
           <a:p>
             <a:fld id="{B51C5E6E-2C9F-4268-909B-20CBB5B5588C}" type="datetimeFigureOut">
               <a:rPr lang="zh-CN" altLang="en-US" smtClean="0"/>
-              <a:t>2026/8/31</a:t>
+              <a:t>2026/9/1</a:t>
             </a:fld>
             <a:endParaRPr lang="zh-CN" altLang="en-US"/>
           </a:p>
@@ -5266,7 +5266,7 @@
           <a:p>
             <a:fld id="{B51C5E6E-2C9F-4268-909B-20CBB5B5588C}" type="datetimeFigureOut">
               <a:rPr lang="zh-CN" altLang="en-US" smtClean="0"/>
-              <a:t>2026/8/31</a:t>
+              <a:t>2026/9/1</a:t>
             </a:fld>
             <a:endParaRPr lang="zh-CN" altLang="en-US"/>
           </a:p>
@@ -5554,7 +5554,7 @@
           <a:p>
             <a:fld id="{B51C5E6E-2C9F-4268-909B-20CBB5B5588C}" type="datetimeFigureOut">
               <a:rPr lang="zh-CN" altLang="en-US" smtClean="0"/>
-              <a:t>2026/8/31</a:t>
+              <a:t>2026/9/1</a:t>
             </a:fld>
             <a:endParaRPr lang="zh-CN" altLang="en-US"/>
           </a:p>
@@ -5795,7 +5795,7 @@
           <a:p>
             <a:fld id="{B51C5E6E-2C9F-4268-909B-20CBB5B5588C}" type="datetimeFigureOut">
               <a:rPr lang="zh-CN" altLang="en-US" smtClean="0"/>
-              <a:t>2026/8/31</a:t>
+              <a:t>2026/9/1</a:t>
             </a:fld>
             <a:endParaRPr lang="zh-CN" altLang="en-US"/>
           </a:p>
@@ -6363,7 +6363,7 @@
           <a:p>
             <a:fld id="{73D38E0C-70A7-465C-B390-CC20D1E8458E}" type="datetimeFigureOut">
               <a:rPr lang="zh-CN" altLang="en-US" smtClean="0"/>
-              <a:t>2026/8/31</a:t>
+              <a:t>2026/9/1</a:t>
             </a:fld>
             <a:endParaRPr lang="zh-CN" altLang="en-US"/>
           </a:p>
@@ -7059,86 +7059,13 @@
       </p:sp>
       <p:sp>
         <p:nvSpPr>
-          <p:cNvPr id="40" name="Rectangle 39"/>
-          <p:cNvSpPr/>
-          <p:nvPr/>
-        </p:nvSpPr>
-        <p:spPr>
-          <a:xfrm>
-            <a:off x="539496" y="3008376"/>
-            <a:ext cx="3456432" cy="640080"/>
-          </a:xfrm>
-          <a:prstGeom prst="rect">
-            <a:avLst/>
-          </a:prstGeom>
-          <a:solidFill>
-            <a:srgbClr val="FBFCFE"/>
-          </a:solidFill>
-          <a:ln>
-            <a:noFill/>
-          </a:ln>
-        </p:spPr>
-        <p:style>
-          <a:lnRef idx="1">
-            <a:schemeClr val="accent1"/>
-          </a:lnRef>
-          <a:fillRef idx="3">
-            <a:schemeClr val="accent1"/>
-          </a:fillRef>
-          <a:effectRef idx="2">
-            <a:schemeClr val="accent1"/>
-          </a:effectRef>
-          <a:fontRef idx="minor">
-            <a:schemeClr val="lt1"/>
-          </a:fontRef>
-        </p:style>
-        <p:txBody>
-          <a:bodyPr rtlCol="0" anchor="ctr"/>
-          <a:lstStyle/>
-          <a:p>
-            <a:pPr marL="0" marR="0" lvl="0" indent="0" algn="ctr" defTabSz="914400" rtl="0" eaLnBrk="1" fontAlgn="auto" latinLnBrk="0" hangingPunct="1">
-              <a:lnSpc>
-                <a:spcPct val="100000"/>
-              </a:lnSpc>
-              <a:spcBef>
-                <a:spcPts val="0"/>
-              </a:spcBef>
-              <a:spcAft>
-                <a:spcPts val="0"/>
-              </a:spcAft>
-              <a:buClrTx/>
-              <a:buSzTx/>
-              <a:buFontTx/>
-              <a:buNone/>
-              <a:tabLst/>
-              <a:defRPr/>
-            </a:pPr>
-            <a:endParaRPr kumimoji="0" sz="1800" b="0" i="0" u="none" strike="noStrike" kern="1200" cap="none" spc="0" normalizeH="0" baseline="0" noProof="0">
-              <a:ln>
-                <a:noFill/>
-              </a:ln>
-              <a:solidFill>
-                <a:prstClr val="white"/>
-              </a:solidFill>
-              <a:effectLst/>
-              <a:uLnTx/>
-              <a:uFillTx/>
-              <a:latin typeface="等线" panose="020F0502020204030204"/>
-              <a:ea typeface="+mn-ea"/>
-              <a:cs typeface="+mn-cs"/>
-            </a:endParaRPr>
-          </a:p>
-        </p:txBody>
-      </p:sp>
-      <p:sp>
-        <p:nvSpPr>
           <p:cNvPr id="42" name="TextBox 41"/>
           <p:cNvSpPr txBox="1"/>
           <p:nvPr/>
         </p:nvSpPr>
         <p:spPr>
           <a:xfrm>
-            <a:off x="9232104" y="1458609"/>
+            <a:off x="476880" y="4259085"/>
             <a:ext cx="2834639" cy="256032"/>
           </a:xfrm>
           <a:prstGeom prst="rect">
@@ -7176,7 +7103,7 @@
                 </a:solidFill>
                 <a:latin typeface="Microsoft YaHei"/>
               </a:rPr>
-              <a:t>模型基建</a:t>
+              <a:t>数据基建</a:t>
             </a:r>
             <a:endParaRPr kumimoji="0" sz="1500" b="1" i="0" u="none" strike="noStrike" kern="1200" cap="none" spc="0" normalizeH="0" baseline="0" noProof="0" dirty="0">
               <a:ln>
@@ -7203,7 +7130,7 @@
         </p:nvSpPr>
         <p:spPr>
           <a:xfrm>
-            <a:off x="9184398" y="1868912"/>
+            <a:off x="639384" y="4668272"/>
             <a:ext cx="1476755" cy="395493"/>
           </a:xfrm>
           <a:prstGeom prst="rect">
@@ -7369,7 +7296,7 @@
         </p:nvSpPr>
         <p:spPr>
           <a:xfrm>
-            <a:off x="9184398" y="2287111"/>
+            <a:off x="651996" y="5086471"/>
             <a:ext cx="1476755" cy="196977"/>
           </a:xfrm>
           <a:prstGeom prst="rect">
@@ -7476,7 +7403,7 @@
         </p:nvSpPr>
         <p:spPr>
           <a:xfrm>
-            <a:off x="9232104" y="2863813"/>
+            <a:off x="4774087" y="4242863"/>
             <a:ext cx="2834639" cy="256032"/>
           </a:xfrm>
           <a:prstGeom prst="rect">
@@ -7549,7 +7476,7 @@
         </p:nvSpPr>
         <p:spPr>
           <a:xfrm>
-            <a:off x="9236202" y="3216600"/>
+            <a:off x="4714652" y="4640698"/>
             <a:ext cx="1476755" cy="395493"/>
           </a:xfrm>
           <a:prstGeom prst="rect">
@@ -7664,7 +7591,7 @@
         </p:nvSpPr>
         <p:spPr>
           <a:xfrm>
-            <a:off x="9237195" y="3639667"/>
+            <a:off x="4715645" y="5063765"/>
             <a:ext cx="1476755" cy="196977"/>
           </a:xfrm>
           <a:prstGeom prst="rect">
@@ -7737,7 +7664,7 @@
         </p:nvSpPr>
         <p:spPr>
           <a:xfrm>
-            <a:off x="9232104" y="4424439"/>
+            <a:off x="9524835" y="4131069"/>
             <a:ext cx="2834639" cy="256032"/>
           </a:xfrm>
           <a:prstGeom prst="rect">
@@ -7810,8 +7737,8 @@
         </p:nvSpPr>
         <p:spPr>
           <a:xfrm>
-            <a:off x="9236202" y="4798287"/>
-            <a:ext cx="2175510" cy="395493"/>
+            <a:off x="9524835" y="4504917"/>
+            <a:ext cx="2175510" cy="196977"/>
           </a:xfrm>
           <a:prstGeom prst="rect">
             <a:avLst/>
@@ -7873,35 +7800,10 @@
                 <a:ea typeface="+mn-ea"/>
                 <a:cs typeface="+mn-cs"/>
               </a:rPr>
-              <a:t>模型迭代</a:t>
-            </a:r>
-            <a:endParaRPr lang="en-US" sz="1040" dirty="0">
-              <a:solidFill>
-                <a:srgbClr val="1A232D"/>
-              </a:solidFill>
-              <a:latin typeface="Microsoft YaHei"/>
-            </a:endParaRPr>
-          </a:p>
-          <a:p>
-            <a:pPr marL="0" marR="0" lvl="0" indent="0" algn="l" defTabSz="914400" rtl="0" eaLnBrk="1" fontAlgn="auto" latinLnBrk="0" hangingPunct="1">
-              <a:lnSpc>
-                <a:spcPct val="100000"/>
-              </a:lnSpc>
-              <a:spcBef>
-                <a:spcPts val="0"/>
-              </a:spcBef>
-              <a:spcAft>
-                <a:spcPts val="300"/>
-              </a:spcAft>
-              <a:buClrTx/>
-              <a:buSzTx/>
-              <a:buFontTx/>
-              <a:buNone/>
-              <a:tabLst/>
-              <a:defRPr/>
-            </a:pPr>
-            <a:r>
-              <a:rPr kumimoji="0" sz="1040" b="0" i="0" u="none" strike="noStrike" kern="1200" cap="none" spc="0" normalizeH="0" baseline="0" noProof="0" dirty="0" err="1">
+              <a:t>模型迭</a:t>
+            </a:r>
+            <a:r>
+              <a:rPr kumimoji="0" lang="zh-CN" altLang="en-US" sz="1040" b="0" i="0" u="none" strike="noStrike" kern="1200" cap="none" spc="0" normalizeH="0" baseline="0" noProof="0" dirty="0">
                 <a:ln>
                   <a:noFill/>
                 </a:ln>
@@ -7915,22 +7817,8 @@
                 <a:ea typeface="+mn-ea"/>
                 <a:cs typeface="+mn-cs"/>
               </a:rPr>
-              <a:t>贷中银行流水的查询</a:t>
-            </a:r>
-            <a:endParaRPr kumimoji="0" sz="1040" b="0" i="0" u="none" strike="noStrike" kern="1200" cap="none" spc="0" normalizeH="0" baseline="0" noProof="0" dirty="0">
-              <a:ln>
-                <a:noFill/>
-              </a:ln>
-              <a:solidFill>
-                <a:srgbClr val="1A232D"/>
-              </a:solidFill>
-              <a:effectLst/>
-              <a:uLnTx/>
-              <a:uFillTx/>
-              <a:latin typeface="Microsoft YaHei"/>
-              <a:ea typeface="+mn-ea"/>
-              <a:cs typeface="+mn-cs"/>
-            </a:endParaRPr>
+              <a:t>代</a:t>
+            </a:r>
           </a:p>
         </p:txBody>
       </p:sp>
@@ -7942,7 +7830,7 @@
         </p:nvSpPr>
         <p:spPr>
           <a:xfrm>
-            <a:off x="9236202" y="5495999"/>
+            <a:off x="9524835" y="4767529"/>
             <a:ext cx="2046699" cy="196977"/>
           </a:xfrm>
           <a:prstGeom prst="rect">
@@ -8055,7 +7943,7 @@
         </p:nvSpPr>
         <p:spPr>
           <a:xfrm>
-            <a:off x="9078204" y="2522828"/>
+            <a:off x="564720" y="5322188"/>
             <a:ext cx="1492857" cy="252377"/>
           </a:xfrm>
           <a:prstGeom prst="rect">
@@ -8179,7 +8067,7 @@
         </p:nvSpPr>
         <p:spPr>
           <a:xfrm>
-            <a:off x="8877234" y="1073366"/>
+            <a:off x="407997" y="3687732"/>
             <a:ext cx="947398" cy="256032"/>
           </a:xfrm>
           <a:prstGeom prst="rect">
